--- a/ia-strategy-visual.pptx
+++ b/ia-strategy-visual.pptx
@@ -15,6 +15,8 @@
     <p:sldId id="263" r:id="rId14"/>
     <p:sldId id="264" r:id="rId15"/>
     <p:sldId id="265" r:id="rId16"/>
+    <p:sldId id="266" r:id="rId17"/>
+    <p:sldId id="267" r:id="rId18"/>
   </p:sldIdLst>
   <p:sldSz cx="12191695" cy="6858000" type="screen4x3"/>
   <p:notesSz cx="6858000" cy="9144000"/>
@@ -3371,7 +3373,7 @@
               </a:defRPr>
             </a:pPr>
             <a:r>
-              <a:t>5 — HIRING PLAN</a:t>
+              <a:t>7 — HIRING PLAN</a:t>
             </a:r>
           </a:p>
         </p:txBody>
@@ -4755,6 +4757,6710 @@
                 </a:solidFill>
               </a:rPr>
               <a:t>AI/ML expertise · Kubernetes/microservices · SaaS platform experience · Senior architect-level · Education industry knowledge</a:t>
+            </a:r>
+          </a:p>
+        </p:txBody>
+      </p:sp>
+    </p:spTree>
+  </p:cSld>
+  <p:clrMapOvr>
+    <a:masterClrMapping/>
+  </p:clrMapOvr>
+</p:sld>
+</file>
+
+<file path=ppt/slides/slide11.xml><?xml version="1.0" encoding="utf-8"?>
+<p:sld xmlns:a="http://schemas.openxmlformats.org/drawingml/2006/main" xmlns:p="http://schemas.openxmlformats.org/presentationml/2006/main" xmlns:r="http://schemas.openxmlformats.org/officeDocument/2006/relationships">
+  <p:cSld>
+    <p:spTree>
+      <p:nvGrpSpPr>
+        <p:cNvPr id="1" name=""/>
+        <p:cNvGrpSpPr/>
+        <p:nvPr/>
+      </p:nvGrpSpPr>
+      <p:grpSpPr/>
+      <p:sp>
+        <p:nvSpPr>
+          <p:cNvPr id="2" name="Rectangle 1"/>
+          <p:cNvSpPr/>
+          <p:nvPr/>
+        </p:nvSpPr>
+        <p:spPr>
+          <a:xfrm>
+            <a:off x="0" y="0"/>
+            <a:ext cx="12191695" cy="6858000"/>
+          </a:xfrm>
+          <a:prstGeom prst="rect">
+            <a:avLst/>
+          </a:prstGeom>
+          <a:solidFill>
+            <a:srgbClr val="FFFFFF"/>
+          </a:solidFill>
+          <a:ln>
+            <a:noFill/>
+          </a:ln>
+        </p:spPr>
+        <p:style>
+          <a:lnRef idx="1">
+            <a:schemeClr val="accent1"/>
+          </a:lnRef>
+          <a:fillRef idx="3">
+            <a:schemeClr val="accent1"/>
+          </a:fillRef>
+          <a:effectRef idx="2">
+            <a:schemeClr val="accent1"/>
+          </a:effectRef>
+          <a:fontRef idx="minor">
+            <a:schemeClr val="lt1"/>
+          </a:fontRef>
+        </p:style>
+        <p:txBody>
+          <a:bodyPr rtlCol="0" anchor="ctr"/>
+          <a:lstStyle/>
+          <a:p>
+            <a:pPr algn="ctr"/>
+          </a:p>
+        </p:txBody>
+      </p:sp>
+      <p:sp>
+        <p:nvSpPr>
+          <p:cNvPr id="3" name="TextBox 2"/>
+          <p:cNvSpPr txBox="1"/>
+          <p:nvPr/>
+        </p:nvSpPr>
+        <p:spPr>
+          <a:xfrm>
+            <a:off x="457200" y="182880"/>
+            <a:ext cx="11247120" cy="457200"/>
+          </a:xfrm>
+          <a:prstGeom prst="rect">
+            <a:avLst/>
+          </a:prstGeom>
+          <a:noFill/>
+        </p:spPr>
+        <p:txBody>
+          <a:bodyPr wrap="none">
+            <a:spAutoFit/>
+          </a:bodyPr>
+          <a:lstStyle/>
+          <a:p>
+            <a:pPr>
+              <a:defRPr sz="2200" b="1">
+                <a:solidFill>
+                  <a:srgbClr val="1A237E"/>
+                </a:solidFill>
+              </a:defRPr>
+            </a:pPr>
+            <a:r>
+              <a:t>5 — WHAT THE CUSTOMER GETS</a:t>
+            </a:r>
+          </a:p>
+        </p:txBody>
+      </p:sp>
+      <p:sp>
+        <p:nvSpPr>
+          <p:cNvPr id="4" name="TextBox 3"/>
+          <p:cNvSpPr txBox="1"/>
+          <p:nvPr/>
+        </p:nvSpPr>
+        <p:spPr>
+          <a:xfrm>
+            <a:off x="457200" y="640080"/>
+            <a:ext cx="11247120" cy="274320"/>
+          </a:xfrm>
+          <a:prstGeom prst="rect">
+            <a:avLst/>
+          </a:prstGeom>
+          <a:noFill/>
+        </p:spPr>
+        <p:txBody>
+          <a:bodyPr wrap="none">
+            <a:spAutoFit/>
+          </a:bodyPr>
+          <a:lstStyle/>
+          <a:p>
+            <a:pPr>
+              <a:defRPr sz="1100" b="0">
+                <a:solidFill>
+                  <a:srgbClr val="616161"/>
+                </a:solidFill>
+              </a:defRPr>
+            </a:pPr>
+            <a:r>
+              <a:t>Two offerings: AI Harness (client builds AI tools with our method) vs SaaS (client uses our finished product)</a:t>
+            </a:r>
+          </a:p>
+        </p:txBody>
+      </p:sp>
+      <p:sp>
+        <p:nvSpPr>
+          <p:cNvPr id="5" name="Rounded Rectangle 4"/>
+          <p:cNvSpPr/>
+          <p:nvPr/>
+        </p:nvSpPr>
+        <p:spPr>
+          <a:xfrm>
+            <a:off x="457200" y="1097280"/>
+            <a:ext cx="5486400" cy="5303520"/>
+          </a:xfrm>
+          <a:prstGeom prst="roundRect">
+            <a:avLst/>
+          </a:prstGeom>
+          <a:solidFill>
+            <a:srgbClr val="FFFFFF"/>
+          </a:solidFill>
+          <a:ln w="25400">
+            <a:solidFill>
+              <a:srgbClr val="2E7D32"/>
+            </a:solidFill>
+          </a:ln>
+        </p:spPr>
+        <p:style>
+          <a:lnRef idx="1">
+            <a:schemeClr val="accent1"/>
+          </a:lnRef>
+          <a:fillRef idx="3">
+            <a:schemeClr val="accent1"/>
+          </a:fillRef>
+          <a:effectRef idx="2">
+            <a:schemeClr val="accent1"/>
+          </a:effectRef>
+          <a:fontRef idx="minor">
+            <a:schemeClr val="lt1"/>
+          </a:fontRef>
+        </p:style>
+        <p:txBody>
+          <a:bodyPr rtlCol="0" anchor="ctr" wrap="square" lIns="182880" tIns="137160"/>
+          <a:lstStyle/>
+          <a:p>
+            <a:pPr algn="ctr">
+              <a:spcAft>
+                <a:spcPts val="600"/>
+              </a:spcAft>
+              <a:defRPr sz="1600" b="1">
+                <a:solidFill>
+                  <a:srgbClr val="2E7D32"/>
+                </a:solidFill>
+              </a:defRPr>
+            </a:pPr>
+            <a:r>
+              <a:t>🤖 AI Harness Service</a:t>
+            </a:r>
+          </a:p>
+          <a:p>
+            <a:pPr>
+              <a:spcAft>
+                <a:spcPts val="1000"/>
+              </a:spcAft>
+              <a:defRPr sz="1000">
+                <a:solidFill>
+                  <a:srgbClr val="616161"/>
+                </a:solidFill>
+              </a:defRPr>
+            </a:pPr>
+            <a:r>
+              <a:t>Client rents our AI dev method + tools + governance. Each dept gets a representative who builds dept-specific AI apps with company data.</a:t>
+            </a:r>
+          </a:p>
+          <a:p>
+            <a:pPr>
+              <a:spcAft>
+                <a:spcPts val="400"/>
+              </a:spcAft>
+              <a:defRPr sz="1100" b="1">
+                <a:solidFill>
+                  <a:srgbClr val="1E1E1E"/>
+                </a:solidFill>
+              </a:defRPr>
+            </a:pPr>
+            <a:r>
+              <a:t>What the client can do:</a:t>
+            </a:r>
+          </a:p>
+          <a:p>
+            <a:pPr>
+              <a:spcAft>
+                <a:spcPts val="300"/>
+              </a:spcAft>
+              <a:defRPr sz="900">
+                <a:solidFill>
+                  <a:srgbClr val="1E1E1E"/>
+                </a:solidFill>
+              </a:defRPr>
+            </a:pPr>
+            <a:r>
+              <a:t>• Each department builds AI-assisted tools using company data</a:t>
+            </a:r>
+          </a:p>
+          <a:p>
+            <a:pPr>
+              <a:spcAft>
+                <a:spcPts val="300"/>
+              </a:spcAft>
+              <a:defRPr sz="900">
+                <a:solidFill>
+                  <a:srgbClr val="1E1E1E"/>
+                </a:solidFill>
+              </a:defRPr>
+            </a:pPr>
+            <a:r>
+              <a:t>• Non-engineering staff create apps → push PRs → engineering reviews</a:t>
+            </a:r>
+          </a:p>
+          <a:p>
+            <a:pPr>
+              <a:spcAft>
+                <a:spcPts val="300"/>
+              </a:spcAft>
+              <a:defRPr sz="900">
+                <a:solidFill>
+                  <a:srgbClr val="1E1E1E"/>
+                </a:solidFill>
+              </a:defRPr>
+            </a:pPr>
+            <a:r>
+              <a:t>• Apps can be separate pages per dept or a combined portal</a:t>
+            </a:r>
+          </a:p>
+          <a:p>
+            <a:pPr>
+              <a:spcAft>
+                <a:spcPts val="300"/>
+              </a:spcAft>
+              <a:defRPr sz="900">
+                <a:solidFill>
+                  <a:srgbClr val="1E1E1E"/>
+                </a:solidFill>
+              </a:defRPr>
+            </a:pPr>
+            <a:r>
+              <a:t>• Governance: review gates, CI, ownership rules</a:t>
+            </a:r>
+          </a:p>
+          <a:p>
+            <a:pPr>
+              <a:spcAft>
+                <a:spcPts val="300"/>
+              </a:spcAft>
+              <a:defRPr sz="900">
+                <a:solidFill>
+                  <a:srgbClr val="1E1E1E"/>
+                </a:solidFill>
+              </a:defRPr>
+            </a:pPr>
+            <a:r>
+              <a:t>• Training: workshops, manager briefings, playbooks</a:t>
+            </a:r>
+          </a:p>
+        </p:txBody>
+      </p:sp>
+      <p:sp>
+        <p:nvSpPr>
+          <p:cNvPr id="6" name="Rounded Rectangle 5"/>
+          <p:cNvSpPr/>
+          <p:nvPr/>
+        </p:nvSpPr>
+        <p:spPr>
+          <a:xfrm>
+            <a:off x="6217920" y="1097280"/>
+            <a:ext cx="5486400" cy="5303520"/>
+          </a:xfrm>
+          <a:prstGeom prst="roundRect">
+            <a:avLst/>
+          </a:prstGeom>
+          <a:solidFill>
+            <a:srgbClr val="FFFFFF"/>
+          </a:solidFill>
+          <a:ln w="25400">
+            <a:solidFill>
+              <a:srgbClr val="7B1FA2"/>
+            </a:solidFill>
+          </a:ln>
+        </p:spPr>
+        <p:style>
+          <a:lnRef idx="1">
+            <a:schemeClr val="accent1"/>
+          </a:lnRef>
+          <a:fillRef idx="3">
+            <a:schemeClr val="accent1"/>
+          </a:fillRef>
+          <a:effectRef idx="2">
+            <a:schemeClr val="accent1"/>
+          </a:effectRef>
+          <a:fontRef idx="minor">
+            <a:schemeClr val="lt1"/>
+          </a:fontRef>
+        </p:style>
+        <p:txBody>
+          <a:bodyPr rtlCol="0" anchor="ctr" wrap="square" lIns="182880" tIns="137160"/>
+          <a:lstStyle/>
+          <a:p>
+            <a:pPr algn="ctr">
+              <a:spcAft>
+                <a:spcPts val="600"/>
+              </a:spcAft>
+              <a:defRPr sz="1600" b="1">
+                <a:solidFill>
+                  <a:srgbClr val="7B1FA2"/>
+                </a:solidFill>
+              </a:defRPr>
+            </a:pPr>
+            <a:r>
+              <a:t>📦 SaaS / BaaS Product</a:t>
+            </a:r>
+          </a:p>
+          <a:p>
+            <a:pPr>
+              <a:spcAft>
+                <a:spcPts val="1000"/>
+              </a:spcAft>
+              <a:defRPr sz="1000">
+                <a:solidFill>
+                  <a:srgbClr val="616161"/>
+                </a:solidFill>
+              </a:defRPr>
+            </a:pPr>
+            <a:r>
+              <a:t>Client gets a customizable LMS / customer management platform — configured for their organization. No development on their side.</a:t>
+            </a:r>
+          </a:p>
+          <a:p>
+            <a:pPr>
+              <a:spcAft>
+                <a:spcPts val="400"/>
+              </a:spcAft>
+              <a:defRPr sz="1100" b="1">
+                <a:solidFill>
+                  <a:srgbClr val="1E1E1E"/>
+                </a:solidFill>
+              </a:defRPr>
+            </a:pPr>
+            <a:r>
+              <a:t>What the client can do:</a:t>
+            </a:r>
+          </a:p>
+          <a:p>
+            <a:pPr>
+              <a:spcAft>
+                <a:spcPts val="300"/>
+              </a:spcAft>
+              <a:defRPr sz="900">
+                <a:solidFill>
+                  <a:srgbClr val="1E1E1E"/>
+                </a:solidFill>
+              </a:defRPr>
+            </a:pPr>
+            <a:r>
+              <a:t>• Use a proven LMS platform — branded and configured</a:t>
+            </a:r>
+          </a:p>
+          <a:p>
+            <a:pPr>
+              <a:spcAft>
+                <a:spcPts val="300"/>
+              </a:spcAft>
+              <a:defRPr sz="900">
+                <a:solidFill>
+                  <a:srgbClr val="1E1E1E"/>
+                </a:solidFill>
+              </a:defRPr>
+            </a:pPr>
+            <a:r>
+              <a:t>• Manage students/customers without building from scratch</a:t>
+            </a:r>
+          </a:p>
+          <a:p>
+            <a:pPr>
+              <a:spcAft>
+                <a:spcPts val="300"/>
+              </a:spcAft>
+              <a:defRPr sz="900">
+                <a:solidFill>
+                  <a:srgbClr val="1E1E1E"/>
+                </a:solidFill>
+              </a:defRPr>
+            </a:pPr>
+            <a:r>
+              <a:t>• Customize features within defined boundaries (tenant config)</a:t>
+            </a:r>
+          </a:p>
+          <a:p>
+            <a:pPr>
+              <a:spcAft>
+                <a:spcPts val="300"/>
+              </a:spcAft>
+              <a:defRPr sz="900">
+                <a:solidFill>
+                  <a:srgbClr val="1E1E1E"/>
+                </a:solidFill>
+              </a:defRPr>
+            </a:pPr>
+            <a:r>
+              <a:t>• Multi-tenant isolation — data separate from other clients</a:t>
+            </a:r>
+          </a:p>
+          <a:p>
+            <a:pPr>
+              <a:spcAft>
+                <a:spcPts val="300"/>
+              </a:spcAft>
+              <a:defRPr sz="900">
+                <a:solidFill>
+                  <a:srgbClr val="1E1E1E"/>
+                </a:solidFill>
+              </a:defRPr>
+            </a:pPr>
+            <a:r>
+              <a:t>• Monthly subscription — no development cost on their side</a:t>
+            </a:r>
+          </a:p>
+        </p:txBody>
+      </p:sp>
+      <p:sp>
+        <p:nvSpPr>
+          <p:cNvPr id="7" name="Rounded Rectangle 6"/>
+          <p:cNvSpPr/>
+          <p:nvPr/>
+        </p:nvSpPr>
+        <p:spPr>
+          <a:xfrm>
+            <a:off x="457200" y="6446520"/>
+            <a:ext cx="11247120" cy="320040"/>
+          </a:xfrm>
+          <a:prstGeom prst="roundRect">
+            <a:avLst/>
+          </a:prstGeom>
+          <a:solidFill>
+            <a:srgbClr val="F5F5F5"/>
+          </a:solidFill>
+          <a:ln>
+            <a:noFill/>
+          </a:ln>
+        </p:spPr>
+        <p:style>
+          <a:lnRef idx="1">
+            <a:schemeClr val="accent1"/>
+          </a:lnRef>
+          <a:fillRef idx="3">
+            <a:schemeClr val="accent1"/>
+          </a:fillRef>
+          <a:effectRef idx="2">
+            <a:schemeClr val="accent1"/>
+          </a:effectRef>
+          <a:fontRef idx="minor">
+            <a:schemeClr val="lt1"/>
+          </a:fontRef>
+        </p:style>
+        <p:txBody>
+          <a:bodyPr rtlCol="0" anchor="ctr" wrap="square" lIns="137160"/>
+          <a:lstStyle/>
+          <a:p>
+            <a:pPr algn="ctr"/>
+            <a:r>
+              <a:rPr sz="900" b="1">
+                <a:solidFill>
+                  <a:srgbClr val="1A237E"/>
+                </a:solidFill>
+              </a:rPr>
+              <a:t>Key difference: </a:t>
+            </a:r>
+            <a:r>
+              <a:rPr sz="900">
+                <a:solidFill>
+                  <a:srgbClr val="1E1E1E"/>
+                </a:solidFill>
+              </a:rPr>
+              <a:t>AI Harness = client learns to build own AI tools. SaaS = client uses our finished product. Both from same engineering work.</a:t>
+            </a:r>
+          </a:p>
+        </p:txBody>
+      </p:sp>
+    </p:spTree>
+  </p:cSld>
+  <p:clrMapOvr>
+    <a:masterClrMapping/>
+  </p:clrMapOvr>
+</p:sld>
+</file>
+
+<file path=ppt/slides/slide12.xml><?xml version="1.0" encoding="utf-8"?>
+<p:sld xmlns:a="http://schemas.openxmlformats.org/drawingml/2006/main" xmlns:p="http://schemas.openxmlformats.org/presentationml/2006/main" xmlns:r="http://schemas.openxmlformats.org/officeDocument/2006/relationships">
+  <p:cSld>
+    <p:spTree>
+      <p:nvGrpSpPr>
+        <p:cNvPr id="1" name=""/>
+        <p:cNvGrpSpPr/>
+        <p:nvPr/>
+      </p:nvGrpSpPr>
+      <p:grpSpPr/>
+      <p:sp>
+        <p:nvSpPr>
+          <p:cNvPr id="2" name="Rectangle 1"/>
+          <p:cNvSpPr/>
+          <p:nvPr/>
+        </p:nvSpPr>
+        <p:spPr>
+          <a:xfrm>
+            <a:off x="0" y="0"/>
+            <a:ext cx="12191695" cy="6858000"/>
+          </a:xfrm>
+          <a:prstGeom prst="rect">
+            <a:avLst/>
+          </a:prstGeom>
+          <a:solidFill>
+            <a:srgbClr val="FFFFFF"/>
+          </a:solidFill>
+          <a:ln>
+            <a:noFill/>
+          </a:ln>
+        </p:spPr>
+        <p:style>
+          <a:lnRef idx="1">
+            <a:schemeClr val="accent1"/>
+          </a:lnRef>
+          <a:fillRef idx="3">
+            <a:schemeClr val="accent1"/>
+          </a:fillRef>
+          <a:effectRef idx="2">
+            <a:schemeClr val="accent1"/>
+          </a:effectRef>
+          <a:fontRef idx="minor">
+            <a:schemeClr val="lt1"/>
+          </a:fontRef>
+        </p:style>
+        <p:txBody>
+          <a:bodyPr rtlCol="0" anchor="ctr"/>
+          <a:lstStyle/>
+          <a:p>
+            <a:pPr algn="ctr"/>
+          </a:p>
+        </p:txBody>
+      </p:sp>
+      <p:sp>
+        <p:nvSpPr>
+          <p:cNvPr id="3" name="TextBox 2"/>
+          <p:cNvSpPr txBox="1"/>
+          <p:nvPr/>
+        </p:nvSpPr>
+        <p:spPr>
+          <a:xfrm>
+            <a:off x="457200" y="182880"/>
+            <a:ext cx="11247120" cy="457200"/>
+          </a:xfrm>
+          <a:prstGeom prst="rect">
+            <a:avLst/>
+          </a:prstGeom>
+          <a:noFill/>
+        </p:spPr>
+        <p:txBody>
+          <a:bodyPr wrap="none">
+            <a:spAutoFit/>
+          </a:bodyPr>
+          <a:lstStyle/>
+          <a:p>
+            <a:pPr>
+              <a:defRPr sz="2200" b="1">
+                <a:solidFill>
+                  <a:srgbClr val="1A237E"/>
+                </a:solidFill>
+              </a:defRPr>
+            </a:pPr>
+            <a:r>
+              <a:t>6 — FINANCIAL SIMULATION (P&amp;L)</a:t>
+            </a:r>
+          </a:p>
+        </p:txBody>
+      </p:sp>
+      <p:sp>
+        <p:nvSpPr>
+          <p:cNvPr id="4" name="TextBox 3"/>
+          <p:cNvSpPr txBox="1"/>
+          <p:nvPr/>
+        </p:nvSpPr>
+        <p:spPr>
+          <a:xfrm>
+            <a:off x="457200" y="640080"/>
+            <a:ext cx="11247120" cy="274320"/>
+          </a:xfrm>
+          <a:prstGeom prst="rect">
+            <a:avLst/>
+          </a:prstGeom>
+          <a:noFill/>
+        </p:spPr>
+        <p:txBody>
+          <a:bodyPr wrap="none">
+            <a:spAutoFit/>
+          </a:bodyPr>
+          <a:lstStyle/>
+          <a:p>
+            <a:pPr>
+              <a:defRPr sz="1000" b="0">
+                <a:solidFill>
+                  <a:srgbClr val="616161"/>
+                </a:solidFill>
+              </a:defRPr>
+            </a:pPr>
+            <a:r>
+              <a:t>Revenue, cost, and profit projection 2026–2030+. All figures JPY. Pricing needs market validation.</a:t>
+            </a:r>
+          </a:p>
+        </p:txBody>
+      </p:sp>
+      <p:sp>
+        <p:nvSpPr>
+          <p:cNvPr id="5" name="TextBox 4"/>
+          <p:cNvSpPr txBox="1"/>
+          <p:nvPr/>
+        </p:nvSpPr>
+        <p:spPr>
+          <a:xfrm>
+            <a:off x="457200" y="1005840"/>
+            <a:ext cx="5486400" cy="274320"/>
+          </a:xfrm>
+          <a:prstGeom prst="rect">
+            <a:avLst/>
+          </a:prstGeom>
+          <a:noFill/>
+        </p:spPr>
+        <p:txBody>
+          <a:bodyPr wrap="none">
+            <a:spAutoFit/>
+          </a:bodyPr>
+          <a:lstStyle/>
+          <a:p>
+            <a:pPr>
+              <a:defRPr sz="1200" b="1">
+                <a:solidFill>
+                  <a:srgbClr val="1A237E"/>
+                </a:solidFill>
+              </a:defRPr>
+            </a:pPr>
+            <a:r>
+              <a:t>Revenue Projection</a:t>
+            </a:r>
+          </a:p>
+        </p:txBody>
+      </p:sp>
+      <p:sp>
+        <p:nvSpPr>
+          <p:cNvPr id="6" name="Rounded Rectangle 5"/>
+          <p:cNvSpPr/>
+          <p:nvPr/>
+        </p:nvSpPr>
+        <p:spPr>
+          <a:xfrm>
+            <a:off x="457200" y="1325880"/>
+            <a:ext cx="2743200" cy="274320"/>
+          </a:xfrm>
+          <a:prstGeom prst="roundRect">
+            <a:avLst/>
+          </a:prstGeom>
+          <a:solidFill>
+            <a:srgbClr val="1A237E"/>
+          </a:solidFill>
+          <a:ln>
+            <a:noFill/>
+          </a:ln>
+        </p:spPr>
+        <p:style>
+          <a:lnRef idx="1">
+            <a:schemeClr val="accent1"/>
+          </a:lnRef>
+          <a:fillRef idx="3">
+            <a:schemeClr val="accent1"/>
+          </a:fillRef>
+          <a:effectRef idx="2">
+            <a:schemeClr val="accent1"/>
+          </a:effectRef>
+          <a:fontRef idx="minor">
+            <a:schemeClr val="lt1"/>
+          </a:fontRef>
+        </p:style>
+        <p:txBody>
+          <a:bodyPr rtlCol="0" anchor="ctr" wrap="square" lIns="45720" rIns="45720" tIns="27432" bIns="27432"/>
+          <a:lstStyle/>
+          <a:p>
+            <a:pPr algn="ctr">
+              <a:defRPr sz="800" b="1">
+                <a:solidFill>
+                  <a:srgbClr val="FFFFFF"/>
+                </a:solidFill>
+              </a:defRPr>
+            </a:pPr>
+          </a:p>
+        </p:txBody>
+      </p:sp>
+      <p:sp>
+        <p:nvSpPr>
+          <p:cNvPr id="7" name="Rounded Rectangle 6"/>
+          <p:cNvSpPr/>
+          <p:nvPr/>
+        </p:nvSpPr>
+        <p:spPr>
+          <a:xfrm>
+            <a:off x="3200400" y="1325880"/>
+            <a:ext cx="2011680" cy="274320"/>
+          </a:xfrm>
+          <a:prstGeom prst="roundRect">
+            <a:avLst/>
+          </a:prstGeom>
+          <a:solidFill>
+            <a:srgbClr val="1A237E"/>
+          </a:solidFill>
+          <a:ln>
+            <a:noFill/>
+          </a:ln>
+        </p:spPr>
+        <p:style>
+          <a:lnRef idx="1">
+            <a:schemeClr val="accent1"/>
+          </a:lnRef>
+          <a:fillRef idx="3">
+            <a:schemeClr val="accent1"/>
+          </a:fillRef>
+          <a:effectRef idx="2">
+            <a:schemeClr val="accent1"/>
+          </a:effectRef>
+          <a:fontRef idx="minor">
+            <a:schemeClr val="lt1"/>
+          </a:fontRef>
+        </p:style>
+        <p:txBody>
+          <a:bodyPr rtlCol="0" anchor="ctr" wrap="square" lIns="45720" rIns="45720" tIns="27432" bIns="27432"/>
+          <a:lstStyle/>
+          <a:p>
+            <a:pPr algn="ctr">
+              <a:defRPr sz="800" b="1">
+                <a:solidFill>
+                  <a:srgbClr val="FFFFFF"/>
+                </a:solidFill>
+              </a:defRPr>
+            </a:pPr>
+            <a:r>
+              <a:t>2026</a:t>
+            </a:r>
+          </a:p>
+        </p:txBody>
+      </p:sp>
+      <p:sp>
+        <p:nvSpPr>
+          <p:cNvPr id="8" name="Rounded Rectangle 7"/>
+          <p:cNvSpPr/>
+          <p:nvPr/>
+        </p:nvSpPr>
+        <p:spPr>
+          <a:xfrm>
+            <a:off x="5212080" y="1325880"/>
+            <a:ext cx="2011680" cy="274320"/>
+          </a:xfrm>
+          <a:prstGeom prst="roundRect">
+            <a:avLst/>
+          </a:prstGeom>
+          <a:solidFill>
+            <a:srgbClr val="1A237E"/>
+          </a:solidFill>
+          <a:ln>
+            <a:noFill/>
+          </a:ln>
+        </p:spPr>
+        <p:style>
+          <a:lnRef idx="1">
+            <a:schemeClr val="accent1"/>
+          </a:lnRef>
+          <a:fillRef idx="3">
+            <a:schemeClr val="accent1"/>
+          </a:fillRef>
+          <a:effectRef idx="2">
+            <a:schemeClr val="accent1"/>
+          </a:effectRef>
+          <a:fontRef idx="minor">
+            <a:schemeClr val="lt1"/>
+          </a:fontRef>
+        </p:style>
+        <p:txBody>
+          <a:bodyPr rtlCol="0" anchor="ctr" wrap="square" lIns="45720" rIns="45720" tIns="27432" bIns="27432"/>
+          <a:lstStyle/>
+          <a:p>
+            <a:pPr algn="ctr">
+              <a:defRPr sz="800" b="1">
+                <a:solidFill>
+                  <a:srgbClr val="FFFFFF"/>
+                </a:solidFill>
+              </a:defRPr>
+            </a:pPr>
+            <a:r>
+              <a:t>2027</a:t>
+            </a:r>
+          </a:p>
+        </p:txBody>
+      </p:sp>
+      <p:sp>
+        <p:nvSpPr>
+          <p:cNvPr id="9" name="Rounded Rectangle 8"/>
+          <p:cNvSpPr/>
+          <p:nvPr/>
+        </p:nvSpPr>
+        <p:spPr>
+          <a:xfrm>
+            <a:off x="7223760" y="1325880"/>
+            <a:ext cx="2011680" cy="274320"/>
+          </a:xfrm>
+          <a:prstGeom prst="roundRect">
+            <a:avLst/>
+          </a:prstGeom>
+          <a:solidFill>
+            <a:srgbClr val="1A237E"/>
+          </a:solidFill>
+          <a:ln>
+            <a:noFill/>
+          </a:ln>
+        </p:spPr>
+        <p:style>
+          <a:lnRef idx="1">
+            <a:schemeClr val="accent1"/>
+          </a:lnRef>
+          <a:fillRef idx="3">
+            <a:schemeClr val="accent1"/>
+          </a:fillRef>
+          <a:effectRef idx="2">
+            <a:schemeClr val="accent1"/>
+          </a:effectRef>
+          <a:fontRef idx="minor">
+            <a:schemeClr val="lt1"/>
+          </a:fontRef>
+        </p:style>
+        <p:txBody>
+          <a:bodyPr rtlCol="0" anchor="ctr" wrap="square" lIns="45720" rIns="45720" tIns="27432" bIns="27432"/>
+          <a:lstStyle/>
+          <a:p>
+            <a:pPr algn="ctr">
+              <a:defRPr sz="800" b="1">
+                <a:solidFill>
+                  <a:srgbClr val="FFFFFF"/>
+                </a:solidFill>
+              </a:defRPr>
+            </a:pPr>
+            <a:r>
+              <a:t>2028</a:t>
+            </a:r>
+          </a:p>
+        </p:txBody>
+      </p:sp>
+      <p:sp>
+        <p:nvSpPr>
+          <p:cNvPr id="10" name="Rounded Rectangle 9"/>
+          <p:cNvSpPr/>
+          <p:nvPr/>
+        </p:nvSpPr>
+        <p:spPr>
+          <a:xfrm>
+            <a:off x="9235440" y="1325880"/>
+            <a:ext cx="2011680" cy="274320"/>
+          </a:xfrm>
+          <a:prstGeom prst="roundRect">
+            <a:avLst/>
+          </a:prstGeom>
+          <a:solidFill>
+            <a:srgbClr val="1A237E"/>
+          </a:solidFill>
+          <a:ln>
+            <a:noFill/>
+          </a:ln>
+        </p:spPr>
+        <p:style>
+          <a:lnRef idx="1">
+            <a:schemeClr val="accent1"/>
+          </a:lnRef>
+          <a:fillRef idx="3">
+            <a:schemeClr val="accent1"/>
+          </a:fillRef>
+          <a:effectRef idx="2">
+            <a:schemeClr val="accent1"/>
+          </a:effectRef>
+          <a:fontRef idx="minor">
+            <a:schemeClr val="lt1"/>
+          </a:fontRef>
+        </p:style>
+        <p:txBody>
+          <a:bodyPr rtlCol="0" anchor="ctr" wrap="square" lIns="45720" rIns="45720" tIns="27432" bIns="27432"/>
+          <a:lstStyle/>
+          <a:p>
+            <a:pPr algn="ctr">
+              <a:defRPr sz="800" b="1">
+                <a:solidFill>
+                  <a:srgbClr val="FFFFFF"/>
+                </a:solidFill>
+              </a:defRPr>
+            </a:pPr>
+            <a:r>
+              <a:t>2029</a:t>
+            </a:r>
+          </a:p>
+        </p:txBody>
+      </p:sp>
+      <p:sp>
+        <p:nvSpPr>
+          <p:cNvPr id="11" name="Rounded Rectangle 10"/>
+          <p:cNvSpPr/>
+          <p:nvPr/>
+        </p:nvSpPr>
+        <p:spPr>
+          <a:xfrm>
+            <a:off x="11247120" y="1325880"/>
+            <a:ext cx="2011680" cy="274320"/>
+          </a:xfrm>
+          <a:prstGeom prst="roundRect">
+            <a:avLst/>
+          </a:prstGeom>
+          <a:solidFill>
+            <a:srgbClr val="1A237E"/>
+          </a:solidFill>
+          <a:ln>
+            <a:noFill/>
+          </a:ln>
+        </p:spPr>
+        <p:style>
+          <a:lnRef idx="1">
+            <a:schemeClr val="accent1"/>
+          </a:lnRef>
+          <a:fillRef idx="3">
+            <a:schemeClr val="accent1"/>
+          </a:fillRef>
+          <a:effectRef idx="2">
+            <a:schemeClr val="accent1"/>
+          </a:effectRef>
+          <a:fontRef idx="minor">
+            <a:schemeClr val="lt1"/>
+          </a:fontRef>
+        </p:style>
+        <p:txBody>
+          <a:bodyPr rtlCol="0" anchor="ctr" wrap="square" lIns="45720" rIns="45720" tIns="27432" bIns="27432"/>
+          <a:lstStyle/>
+          <a:p>
+            <a:pPr algn="ctr">
+              <a:defRPr sz="800" b="1">
+                <a:solidFill>
+                  <a:srgbClr val="FFFFFF"/>
+                </a:solidFill>
+              </a:defRPr>
+            </a:pPr>
+            <a:r>
+              <a:t>2030+</a:t>
+            </a:r>
+          </a:p>
+        </p:txBody>
+      </p:sp>
+      <p:sp>
+        <p:nvSpPr>
+          <p:cNvPr id="12" name="Rounded Rectangle 11"/>
+          <p:cNvSpPr/>
+          <p:nvPr/>
+        </p:nvSpPr>
+        <p:spPr>
+          <a:xfrm>
+            <a:off x="457200" y="1600200"/>
+            <a:ext cx="2743200" cy="228600"/>
+          </a:xfrm>
+          <a:prstGeom prst="roundRect">
+            <a:avLst/>
+          </a:prstGeom>
+          <a:solidFill>
+            <a:srgbClr val="E8F5E9"/>
+          </a:solidFill>
+          <a:ln>
+            <a:noFill/>
+          </a:ln>
+        </p:spPr>
+        <p:style>
+          <a:lnRef idx="1">
+            <a:schemeClr val="accent1"/>
+          </a:lnRef>
+          <a:fillRef idx="3">
+            <a:schemeClr val="accent1"/>
+          </a:fillRef>
+          <a:effectRef idx="2">
+            <a:schemeClr val="accent1"/>
+          </a:effectRef>
+          <a:fontRef idx="minor">
+            <a:schemeClr val="lt1"/>
+          </a:fontRef>
+        </p:style>
+        <p:txBody>
+          <a:bodyPr rtlCol="0" anchor="ctr" wrap="square" lIns="45720" rIns="45720" tIns="27432" bIns="27432"/>
+          <a:lstStyle/>
+          <a:p>
+            <a:pPr algn="ctr">
+              <a:defRPr sz="800" b="0">
+                <a:solidFill>
+                  <a:srgbClr val="1E1E1E"/>
+                </a:solidFill>
+              </a:defRPr>
+            </a:pPr>
+            <a:r>
+              <a:t>AI Harness — Implementation</a:t>
+            </a:r>
+          </a:p>
+        </p:txBody>
+      </p:sp>
+      <p:sp>
+        <p:nvSpPr>
+          <p:cNvPr id="13" name="Rounded Rectangle 12"/>
+          <p:cNvSpPr/>
+          <p:nvPr/>
+        </p:nvSpPr>
+        <p:spPr>
+          <a:xfrm>
+            <a:off x="3200400" y="1600200"/>
+            <a:ext cx="2011680" cy="228600"/>
+          </a:xfrm>
+          <a:prstGeom prst="roundRect">
+            <a:avLst/>
+          </a:prstGeom>
+          <a:solidFill>
+            <a:srgbClr val="E8F5E9"/>
+          </a:solidFill>
+          <a:ln>
+            <a:noFill/>
+          </a:ln>
+        </p:spPr>
+        <p:style>
+          <a:lnRef idx="1">
+            <a:schemeClr val="accent1"/>
+          </a:lnRef>
+          <a:fillRef idx="3">
+            <a:schemeClr val="accent1"/>
+          </a:fillRef>
+          <a:effectRef idx="2">
+            <a:schemeClr val="accent1"/>
+          </a:effectRef>
+          <a:fontRef idx="minor">
+            <a:schemeClr val="lt1"/>
+          </a:fontRef>
+        </p:style>
+        <p:txBody>
+          <a:bodyPr rtlCol="0" anchor="ctr" wrap="square" lIns="45720" rIns="45720" tIns="27432" bIns="27432"/>
+          <a:lstStyle/>
+          <a:p>
+            <a:pPr algn="ctr">
+              <a:defRPr sz="800" b="0">
+                <a:solidFill>
+                  <a:srgbClr val="1E1E1E"/>
+                </a:solidFill>
+              </a:defRPr>
+            </a:pPr>
+            <a:r>
+              <a:t>¥0</a:t>
+            </a:r>
+          </a:p>
+        </p:txBody>
+      </p:sp>
+      <p:sp>
+        <p:nvSpPr>
+          <p:cNvPr id="14" name="Rounded Rectangle 13"/>
+          <p:cNvSpPr/>
+          <p:nvPr/>
+        </p:nvSpPr>
+        <p:spPr>
+          <a:xfrm>
+            <a:off x="5212080" y="1600200"/>
+            <a:ext cx="2011680" cy="228600"/>
+          </a:xfrm>
+          <a:prstGeom prst="roundRect">
+            <a:avLst/>
+          </a:prstGeom>
+          <a:solidFill>
+            <a:srgbClr val="E8F5E9"/>
+          </a:solidFill>
+          <a:ln>
+            <a:noFill/>
+          </a:ln>
+        </p:spPr>
+        <p:style>
+          <a:lnRef idx="1">
+            <a:schemeClr val="accent1"/>
+          </a:lnRef>
+          <a:fillRef idx="3">
+            <a:schemeClr val="accent1"/>
+          </a:fillRef>
+          <a:effectRef idx="2">
+            <a:schemeClr val="accent1"/>
+          </a:effectRef>
+          <a:fontRef idx="minor">
+            <a:schemeClr val="lt1"/>
+          </a:fontRef>
+        </p:style>
+        <p:txBody>
+          <a:bodyPr rtlCol="0" anchor="ctr" wrap="square" lIns="45720" rIns="45720" tIns="27432" bIns="27432"/>
+          <a:lstStyle/>
+          <a:p>
+            <a:pPr algn="ctr">
+              <a:defRPr sz="800" b="0">
+                <a:solidFill>
+                  <a:srgbClr val="1E1E1E"/>
+                </a:solidFill>
+              </a:defRPr>
+            </a:pPr>
+            <a:r>
+              <a:t>¥0</a:t>
+            </a:r>
+          </a:p>
+        </p:txBody>
+      </p:sp>
+      <p:sp>
+        <p:nvSpPr>
+          <p:cNvPr id="15" name="Rounded Rectangle 14"/>
+          <p:cNvSpPr/>
+          <p:nvPr/>
+        </p:nvSpPr>
+        <p:spPr>
+          <a:xfrm>
+            <a:off x="7223760" y="1600200"/>
+            <a:ext cx="2011680" cy="228600"/>
+          </a:xfrm>
+          <a:prstGeom prst="roundRect">
+            <a:avLst/>
+          </a:prstGeom>
+          <a:solidFill>
+            <a:srgbClr val="E8F5E9"/>
+          </a:solidFill>
+          <a:ln>
+            <a:noFill/>
+          </a:ln>
+        </p:spPr>
+        <p:style>
+          <a:lnRef idx="1">
+            <a:schemeClr val="accent1"/>
+          </a:lnRef>
+          <a:fillRef idx="3">
+            <a:schemeClr val="accent1"/>
+          </a:fillRef>
+          <a:effectRef idx="2">
+            <a:schemeClr val="accent1"/>
+          </a:effectRef>
+          <a:fontRef idx="minor">
+            <a:schemeClr val="lt1"/>
+          </a:fontRef>
+        </p:style>
+        <p:txBody>
+          <a:bodyPr rtlCol="0" anchor="ctr" wrap="square" lIns="45720" rIns="45720" tIns="27432" bIns="27432"/>
+          <a:lstStyle/>
+          <a:p>
+            <a:pPr algn="ctr">
+              <a:defRPr sz="800" b="0">
+                <a:solidFill>
+                  <a:srgbClr val="1E1E1E"/>
+                </a:solidFill>
+              </a:defRPr>
+            </a:pPr>
+            <a:r>
+              <a:t>¥3.0M</a:t>
+            </a:r>
+          </a:p>
+        </p:txBody>
+      </p:sp>
+      <p:sp>
+        <p:nvSpPr>
+          <p:cNvPr id="16" name="Rounded Rectangle 15"/>
+          <p:cNvSpPr/>
+          <p:nvPr/>
+        </p:nvSpPr>
+        <p:spPr>
+          <a:xfrm>
+            <a:off x="9235440" y="1600200"/>
+            <a:ext cx="2011680" cy="228600"/>
+          </a:xfrm>
+          <a:prstGeom prst="roundRect">
+            <a:avLst/>
+          </a:prstGeom>
+          <a:solidFill>
+            <a:srgbClr val="E8F5E9"/>
+          </a:solidFill>
+          <a:ln>
+            <a:noFill/>
+          </a:ln>
+        </p:spPr>
+        <p:style>
+          <a:lnRef idx="1">
+            <a:schemeClr val="accent1"/>
+          </a:lnRef>
+          <a:fillRef idx="3">
+            <a:schemeClr val="accent1"/>
+          </a:fillRef>
+          <a:effectRef idx="2">
+            <a:schemeClr val="accent1"/>
+          </a:effectRef>
+          <a:fontRef idx="minor">
+            <a:schemeClr val="lt1"/>
+          </a:fontRef>
+        </p:style>
+        <p:txBody>
+          <a:bodyPr rtlCol="0" anchor="ctr" wrap="square" lIns="45720" rIns="45720" tIns="27432" bIns="27432"/>
+          <a:lstStyle/>
+          <a:p>
+            <a:pPr algn="ctr">
+              <a:defRPr sz="800" b="0">
+                <a:solidFill>
+                  <a:srgbClr val="1E1E1E"/>
+                </a:solidFill>
+              </a:defRPr>
+            </a:pPr>
+            <a:r>
+              <a:t>¥3.0M</a:t>
+            </a:r>
+          </a:p>
+        </p:txBody>
+      </p:sp>
+      <p:sp>
+        <p:nvSpPr>
+          <p:cNvPr id="17" name="Rounded Rectangle 16"/>
+          <p:cNvSpPr/>
+          <p:nvPr/>
+        </p:nvSpPr>
+        <p:spPr>
+          <a:xfrm>
+            <a:off x="11247120" y="1600200"/>
+            <a:ext cx="2011680" cy="228600"/>
+          </a:xfrm>
+          <a:prstGeom prst="roundRect">
+            <a:avLst/>
+          </a:prstGeom>
+          <a:solidFill>
+            <a:srgbClr val="E8F5E9"/>
+          </a:solidFill>
+          <a:ln>
+            <a:noFill/>
+          </a:ln>
+        </p:spPr>
+        <p:style>
+          <a:lnRef idx="1">
+            <a:schemeClr val="accent1"/>
+          </a:lnRef>
+          <a:fillRef idx="3">
+            <a:schemeClr val="accent1"/>
+          </a:fillRef>
+          <a:effectRef idx="2">
+            <a:schemeClr val="accent1"/>
+          </a:effectRef>
+          <a:fontRef idx="minor">
+            <a:schemeClr val="lt1"/>
+          </a:fontRef>
+        </p:style>
+        <p:txBody>
+          <a:bodyPr rtlCol="0" anchor="ctr" wrap="square" lIns="45720" rIns="45720" tIns="27432" bIns="27432"/>
+          <a:lstStyle/>
+          <a:p>
+            <a:pPr algn="ctr">
+              <a:defRPr sz="800" b="0">
+                <a:solidFill>
+                  <a:srgbClr val="1E1E1E"/>
+                </a:solidFill>
+              </a:defRPr>
+            </a:pPr>
+            <a:r>
+              <a:t>¥6.0M</a:t>
+            </a:r>
+          </a:p>
+        </p:txBody>
+      </p:sp>
+      <p:sp>
+        <p:nvSpPr>
+          <p:cNvPr id="18" name="Rounded Rectangle 17"/>
+          <p:cNvSpPr/>
+          <p:nvPr/>
+        </p:nvSpPr>
+        <p:spPr>
+          <a:xfrm>
+            <a:off x="457200" y="1856232"/>
+            <a:ext cx="2743200" cy="228600"/>
+          </a:xfrm>
+          <a:prstGeom prst="roundRect">
+            <a:avLst/>
+          </a:prstGeom>
+          <a:solidFill>
+            <a:srgbClr val="E8F5E9"/>
+          </a:solidFill>
+          <a:ln>
+            <a:noFill/>
+          </a:ln>
+        </p:spPr>
+        <p:style>
+          <a:lnRef idx="1">
+            <a:schemeClr val="accent1"/>
+          </a:lnRef>
+          <a:fillRef idx="3">
+            <a:schemeClr val="accent1"/>
+          </a:fillRef>
+          <a:effectRef idx="2">
+            <a:schemeClr val="accent1"/>
+          </a:effectRef>
+          <a:fontRef idx="minor">
+            <a:schemeClr val="lt1"/>
+          </a:fontRef>
+        </p:style>
+        <p:txBody>
+          <a:bodyPr rtlCol="0" anchor="ctr" wrap="square" lIns="45720" rIns="45720" tIns="27432" bIns="27432"/>
+          <a:lstStyle/>
+          <a:p>
+            <a:pPr algn="ctr">
+              <a:defRPr sz="800" b="0">
+                <a:solidFill>
+                  <a:srgbClr val="1E1E1E"/>
+                </a:solidFill>
+              </a:defRPr>
+            </a:pPr>
+            <a:r>
+              <a:t>AI Harness — Retainer</a:t>
+            </a:r>
+          </a:p>
+        </p:txBody>
+      </p:sp>
+      <p:sp>
+        <p:nvSpPr>
+          <p:cNvPr id="19" name="Rounded Rectangle 18"/>
+          <p:cNvSpPr/>
+          <p:nvPr/>
+        </p:nvSpPr>
+        <p:spPr>
+          <a:xfrm>
+            <a:off x="3200400" y="1856232"/>
+            <a:ext cx="2011680" cy="228600"/>
+          </a:xfrm>
+          <a:prstGeom prst="roundRect">
+            <a:avLst/>
+          </a:prstGeom>
+          <a:solidFill>
+            <a:srgbClr val="E8F5E9"/>
+          </a:solidFill>
+          <a:ln>
+            <a:noFill/>
+          </a:ln>
+        </p:spPr>
+        <p:style>
+          <a:lnRef idx="1">
+            <a:schemeClr val="accent1"/>
+          </a:lnRef>
+          <a:fillRef idx="3">
+            <a:schemeClr val="accent1"/>
+          </a:fillRef>
+          <a:effectRef idx="2">
+            <a:schemeClr val="accent1"/>
+          </a:effectRef>
+          <a:fontRef idx="minor">
+            <a:schemeClr val="lt1"/>
+          </a:fontRef>
+        </p:style>
+        <p:txBody>
+          <a:bodyPr rtlCol="0" anchor="ctr" wrap="square" lIns="45720" rIns="45720" tIns="27432" bIns="27432"/>
+          <a:lstStyle/>
+          <a:p>
+            <a:pPr algn="ctr">
+              <a:defRPr sz="800" b="0">
+                <a:solidFill>
+                  <a:srgbClr val="1E1E1E"/>
+                </a:solidFill>
+              </a:defRPr>
+            </a:pPr>
+            <a:r>
+              <a:t>¥0</a:t>
+            </a:r>
+          </a:p>
+        </p:txBody>
+      </p:sp>
+      <p:sp>
+        <p:nvSpPr>
+          <p:cNvPr id="20" name="Rounded Rectangle 19"/>
+          <p:cNvSpPr/>
+          <p:nvPr/>
+        </p:nvSpPr>
+        <p:spPr>
+          <a:xfrm>
+            <a:off x="5212080" y="1856232"/>
+            <a:ext cx="2011680" cy="228600"/>
+          </a:xfrm>
+          <a:prstGeom prst="roundRect">
+            <a:avLst/>
+          </a:prstGeom>
+          <a:solidFill>
+            <a:srgbClr val="E8F5E9"/>
+          </a:solidFill>
+          <a:ln>
+            <a:noFill/>
+          </a:ln>
+        </p:spPr>
+        <p:style>
+          <a:lnRef idx="1">
+            <a:schemeClr val="accent1"/>
+          </a:lnRef>
+          <a:fillRef idx="3">
+            <a:schemeClr val="accent1"/>
+          </a:fillRef>
+          <a:effectRef idx="2">
+            <a:schemeClr val="accent1"/>
+          </a:effectRef>
+          <a:fontRef idx="minor">
+            <a:schemeClr val="lt1"/>
+          </a:fontRef>
+        </p:style>
+        <p:txBody>
+          <a:bodyPr rtlCol="0" anchor="ctr" wrap="square" lIns="45720" rIns="45720" tIns="27432" bIns="27432"/>
+          <a:lstStyle/>
+          <a:p>
+            <a:pPr algn="ctr">
+              <a:defRPr sz="800" b="0">
+                <a:solidFill>
+                  <a:srgbClr val="1E1E1E"/>
+                </a:solidFill>
+              </a:defRPr>
+            </a:pPr>
+            <a:r>
+              <a:t>¥0</a:t>
+            </a:r>
+          </a:p>
+        </p:txBody>
+      </p:sp>
+      <p:sp>
+        <p:nvSpPr>
+          <p:cNvPr id="21" name="Rounded Rectangle 20"/>
+          <p:cNvSpPr/>
+          <p:nvPr/>
+        </p:nvSpPr>
+        <p:spPr>
+          <a:xfrm>
+            <a:off x="7223760" y="1856232"/>
+            <a:ext cx="2011680" cy="228600"/>
+          </a:xfrm>
+          <a:prstGeom prst="roundRect">
+            <a:avLst/>
+          </a:prstGeom>
+          <a:solidFill>
+            <a:srgbClr val="E8F5E9"/>
+          </a:solidFill>
+          <a:ln>
+            <a:noFill/>
+          </a:ln>
+        </p:spPr>
+        <p:style>
+          <a:lnRef idx="1">
+            <a:schemeClr val="accent1"/>
+          </a:lnRef>
+          <a:fillRef idx="3">
+            <a:schemeClr val="accent1"/>
+          </a:fillRef>
+          <a:effectRef idx="2">
+            <a:schemeClr val="accent1"/>
+          </a:effectRef>
+          <a:fontRef idx="minor">
+            <a:schemeClr val="lt1"/>
+          </a:fontRef>
+        </p:style>
+        <p:txBody>
+          <a:bodyPr rtlCol="0" anchor="ctr" wrap="square" lIns="45720" rIns="45720" tIns="27432" bIns="27432"/>
+          <a:lstStyle/>
+          <a:p>
+            <a:pPr algn="ctr">
+              <a:defRPr sz="800" b="0">
+                <a:solidFill>
+                  <a:srgbClr val="1E1E1E"/>
+                </a:solidFill>
+              </a:defRPr>
+            </a:pPr>
+            <a:r>
+              <a:t>¥0.9M</a:t>
+            </a:r>
+          </a:p>
+        </p:txBody>
+      </p:sp>
+      <p:sp>
+        <p:nvSpPr>
+          <p:cNvPr id="22" name="Rounded Rectangle 21"/>
+          <p:cNvSpPr/>
+          <p:nvPr/>
+        </p:nvSpPr>
+        <p:spPr>
+          <a:xfrm>
+            <a:off x="9235440" y="1856232"/>
+            <a:ext cx="2011680" cy="228600"/>
+          </a:xfrm>
+          <a:prstGeom prst="roundRect">
+            <a:avLst/>
+          </a:prstGeom>
+          <a:solidFill>
+            <a:srgbClr val="E8F5E9"/>
+          </a:solidFill>
+          <a:ln>
+            <a:noFill/>
+          </a:ln>
+        </p:spPr>
+        <p:style>
+          <a:lnRef idx="1">
+            <a:schemeClr val="accent1"/>
+          </a:lnRef>
+          <a:fillRef idx="3">
+            <a:schemeClr val="accent1"/>
+          </a:fillRef>
+          <a:effectRef idx="2">
+            <a:schemeClr val="accent1"/>
+          </a:effectRef>
+          <a:fontRef idx="minor">
+            <a:schemeClr val="lt1"/>
+          </a:fontRef>
+        </p:style>
+        <p:txBody>
+          <a:bodyPr rtlCol="0" anchor="ctr" wrap="square" lIns="45720" rIns="45720" tIns="27432" bIns="27432"/>
+          <a:lstStyle/>
+          <a:p>
+            <a:pPr algn="ctr">
+              <a:defRPr sz="800" b="0">
+                <a:solidFill>
+                  <a:srgbClr val="1E1E1E"/>
+                </a:solidFill>
+              </a:defRPr>
+            </a:pPr>
+            <a:r>
+              <a:t>¥7.2M</a:t>
+            </a:r>
+          </a:p>
+        </p:txBody>
+      </p:sp>
+      <p:sp>
+        <p:nvSpPr>
+          <p:cNvPr id="23" name="Rounded Rectangle 22"/>
+          <p:cNvSpPr/>
+          <p:nvPr/>
+        </p:nvSpPr>
+        <p:spPr>
+          <a:xfrm>
+            <a:off x="11247120" y="1856232"/>
+            <a:ext cx="2011680" cy="228600"/>
+          </a:xfrm>
+          <a:prstGeom prst="roundRect">
+            <a:avLst/>
+          </a:prstGeom>
+          <a:solidFill>
+            <a:srgbClr val="E8F5E9"/>
+          </a:solidFill>
+          <a:ln>
+            <a:noFill/>
+          </a:ln>
+        </p:spPr>
+        <p:style>
+          <a:lnRef idx="1">
+            <a:schemeClr val="accent1"/>
+          </a:lnRef>
+          <a:fillRef idx="3">
+            <a:schemeClr val="accent1"/>
+          </a:fillRef>
+          <a:effectRef idx="2">
+            <a:schemeClr val="accent1"/>
+          </a:effectRef>
+          <a:fontRef idx="minor">
+            <a:schemeClr val="lt1"/>
+          </a:fontRef>
+        </p:style>
+        <p:txBody>
+          <a:bodyPr rtlCol="0" anchor="ctr" wrap="square" lIns="45720" rIns="45720" tIns="27432" bIns="27432"/>
+          <a:lstStyle/>
+          <a:p>
+            <a:pPr algn="ctr">
+              <a:defRPr sz="800" b="0">
+                <a:solidFill>
+                  <a:srgbClr val="1E1E1E"/>
+                </a:solidFill>
+              </a:defRPr>
+            </a:pPr>
+            <a:r>
+              <a:t>¥14.4M</a:t>
+            </a:r>
+          </a:p>
+        </p:txBody>
+      </p:sp>
+      <p:sp>
+        <p:nvSpPr>
+          <p:cNvPr id="24" name="Rounded Rectangle 23"/>
+          <p:cNvSpPr/>
+          <p:nvPr/>
+        </p:nvSpPr>
+        <p:spPr>
+          <a:xfrm>
+            <a:off x="457200" y="2112264"/>
+            <a:ext cx="2743200" cy="228600"/>
+          </a:xfrm>
+          <a:prstGeom prst="roundRect">
+            <a:avLst/>
+          </a:prstGeom>
+          <a:solidFill>
+            <a:srgbClr val="E8F5E9"/>
+          </a:solidFill>
+          <a:ln>
+            <a:noFill/>
+          </a:ln>
+        </p:spPr>
+        <p:style>
+          <a:lnRef idx="1">
+            <a:schemeClr val="accent1"/>
+          </a:lnRef>
+          <a:fillRef idx="3">
+            <a:schemeClr val="accent1"/>
+          </a:fillRef>
+          <a:effectRef idx="2">
+            <a:schemeClr val="accent1"/>
+          </a:effectRef>
+          <a:fontRef idx="minor">
+            <a:schemeClr val="lt1"/>
+          </a:fontRef>
+        </p:style>
+        <p:txBody>
+          <a:bodyPr rtlCol="0" anchor="ctr" wrap="square" lIns="45720" rIns="45720" tIns="27432" bIns="27432"/>
+          <a:lstStyle/>
+          <a:p>
+            <a:pPr algn="ctr">
+              <a:defRPr sz="800" b="0">
+                <a:solidFill>
+                  <a:srgbClr val="1E1E1E"/>
+                </a:solidFill>
+              </a:defRPr>
+            </a:pPr>
+            <a:r>
+              <a:t>AI Harness — Training</a:t>
+            </a:r>
+          </a:p>
+        </p:txBody>
+      </p:sp>
+      <p:sp>
+        <p:nvSpPr>
+          <p:cNvPr id="25" name="Rounded Rectangle 24"/>
+          <p:cNvSpPr/>
+          <p:nvPr/>
+        </p:nvSpPr>
+        <p:spPr>
+          <a:xfrm>
+            <a:off x="3200400" y="2112264"/>
+            <a:ext cx="2011680" cy="228600"/>
+          </a:xfrm>
+          <a:prstGeom prst="roundRect">
+            <a:avLst/>
+          </a:prstGeom>
+          <a:solidFill>
+            <a:srgbClr val="E8F5E9"/>
+          </a:solidFill>
+          <a:ln>
+            <a:noFill/>
+          </a:ln>
+        </p:spPr>
+        <p:style>
+          <a:lnRef idx="1">
+            <a:schemeClr val="accent1"/>
+          </a:lnRef>
+          <a:fillRef idx="3">
+            <a:schemeClr val="accent1"/>
+          </a:fillRef>
+          <a:effectRef idx="2">
+            <a:schemeClr val="accent1"/>
+          </a:effectRef>
+          <a:fontRef idx="minor">
+            <a:schemeClr val="lt1"/>
+          </a:fontRef>
+        </p:style>
+        <p:txBody>
+          <a:bodyPr rtlCol="0" anchor="ctr" wrap="square" lIns="45720" rIns="45720" tIns="27432" bIns="27432"/>
+          <a:lstStyle/>
+          <a:p>
+            <a:pPr algn="ctr">
+              <a:defRPr sz="800" b="0">
+                <a:solidFill>
+                  <a:srgbClr val="1E1E1E"/>
+                </a:solidFill>
+              </a:defRPr>
+            </a:pPr>
+            <a:r>
+              <a:t>¥0</a:t>
+            </a:r>
+          </a:p>
+        </p:txBody>
+      </p:sp>
+      <p:sp>
+        <p:nvSpPr>
+          <p:cNvPr id="26" name="Rounded Rectangle 25"/>
+          <p:cNvSpPr/>
+          <p:nvPr/>
+        </p:nvSpPr>
+        <p:spPr>
+          <a:xfrm>
+            <a:off x="5212080" y="2112264"/>
+            <a:ext cx="2011680" cy="228600"/>
+          </a:xfrm>
+          <a:prstGeom prst="roundRect">
+            <a:avLst/>
+          </a:prstGeom>
+          <a:solidFill>
+            <a:srgbClr val="E8F5E9"/>
+          </a:solidFill>
+          <a:ln>
+            <a:noFill/>
+          </a:ln>
+        </p:spPr>
+        <p:style>
+          <a:lnRef idx="1">
+            <a:schemeClr val="accent1"/>
+          </a:lnRef>
+          <a:fillRef idx="3">
+            <a:schemeClr val="accent1"/>
+          </a:fillRef>
+          <a:effectRef idx="2">
+            <a:schemeClr val="accent1"/>
+          </a:effectRef>
+          <a:fontRef idx="minor">
+            <a:schemeClr val="lt1"/>
+          </a:fontRef>
+        </p:style>
+        <p:txBody>
+          <a:bodyPr rtlCol="0" anchor="ctr" wrap="square" lIns="45720" rIns="45720" tIns="27432" bIns="27432"/>
+          <a:lstStyle/>
+          <a:p>
+            <a:pPr algn="ctr">
+              <a:defRPr sz="800" b="0">
+                <a:solidFill>
+                  <a:srgbClr val="1E1E1E"/>
+                </a:solidFill>
+              </a:defRPr>
+            </a:pPr>
+            <a:r>
+              <a:t>¥0</a:t>
+            </a:r>
+          </a:p>
+        </p:txBody>
+      </p:sp>
+      <p:sp>
+        <p:nvSpPr>
+          <p:cNvPr id="27" name="Rounded Rectangle 26"/>
+          <p:cNvSpPr/>
+          <p:nvPr/>
+        </p:nvSpPr>
+        <p:spPr>
+          <a:xfrm>
+            <a:off x="7223760" y="2112264"/>
+            <a:ext cx="2011680" cy="228600"/>
+          </a:xfrm>
+          <a:prstGeom prst="roundRect">
+            <a:avLst/>
+          </a:prstGeom>
+          <a:solidFill>
+            <a:srgbClr val="E8F5E9"/>
+          </a:solidFill>
+          <a:ln>
+            <a:noFill/>
+          </a:ln>
+        </p:spPr>
+        <p:style>
+          <a:lnRef idx="1">
+            <a:schemeClr val="accent1"/>
+          </a:lnRef>
+          <a:fillRef idx="3">
+            <a:schemeClr val="accent1"/>
+          </a:fillRef>
+          <a:effectRef idx="2">
+            <a:schemeClr val="accent1"/>
+          </a:effectRef>
+          <a:fontRef idx="minor">
+            <a:schemeClr val="lt1"/>
+          </a:fontRef>
+        </p:style>
+        <p:txBody>
+          <a:bodyPr rtlCol="0" anchor="ctr" wrap="square" lIns="45720" rIns="45720" tIns="27432" bIns="27432"/>
+          <a:lstStyle/>
+          <a:p>
+            <a:pPr algn="ctr">
+              <a:defRPr sz="800" b="0">
+                <a:solidFill>
+                  <a:srgbClr val="1E1E1E"/>
+                </a:solidFill>
+              </a:defRPr>
+            </a:pPr>
+            <a:r>
+              <a:t>¥0</a:t>
+            </a:r>
+          </a:p>
+        </p:txBody>
+      </p:sp>
+      <p:sp>
+        <p:nvSpPr>
+          <p:cNvPr id="28" name="Rounded Rectangle 27"/>
+          <p:cNvSpPr/>
+          <p:nvPr/>
+        </p:nvSpPr>
+        <p:spPr>
+          <a:xfrm>
+            <a:off x="9235440" y="2112264"/>
+            <a:ext cx="2011680" cy="228600"/>
+          </a:xfrm>
+          <a:prstGeom prst="roundRect">
+            <a:avLst/>
+          </a:prstGeom>
+          <a:solidFill>
+            <a:srgbClr val="E8F5E9"/>
+          </a:solidFill>
+          <a:ln>
+            <a:noFill/>
+          </a:ln>
+        </p:spPr>
+        <p:style>
+          <a:lnRef idx="1">
+            <a:schemeClr val="accent1"/>
+          </a:lnRef>
+          <a:fillRef idx="3">
+            <a:schemeClr val="accent1"/>
+          </a:fillRef>
+          <a:effectRef idx="2">
+            <a:schemeClr val="accent1"/>
+          </a:effectRef>
+          <a:fontRef idx="minor">
+            <a:schemeClr val="lt1"/>
+          </a:fontRef>
+        </p:style>
+        <p:txBody>
+          <a:bodyPr rtlCol="0" anchor="ctr" wrap="square" lIns="45720" rIns="45720" tIns="27432" bIns="27432"/>
+          <a:lstStyle/>
+          <a:p>
+            <a:pPr algn="ctr">
+              <a:defRPr sz="800" b="0">
+                <a:solidFill>
+                  <a:srgbClr val="1E1E1E"/>
+                </a:solidFill>
+              </a:defRPr>
+            </a:pPr>
+            <a:r>
+              <a:t>¥0.5M</a:t>
+            </a:r>
+          </a:p>
+        </p:txBody>
+      </p:sp>
+      <p:sp>
+        <p:nvSpPr>
+          <p:cNvPr id="29" name="Rounded Rectangle 28"/>
+          <p:cNvSpPr/>
+          <p:nvPr/>
+        </p:nvSpPr>
+        <p:spPr>
+          <a:xfrm>
+            <a:off x="11247120" y="2112264"/>
+            <a:ext cx="2011680" cy="228600"/>
+          </a:xfrm>
+          <a:prstGeom prst="roundRect">
+            <a:avLst/>
+          </a:prstGeom>
+          <a:solidFill>
+            <a:srgbClr val="E8F5E9"/>
+          </a:solidFill>
+          <a:ln>
+            <a:noFill/>
+          </a:ln>
+        </p:spPr>
+        <p:style>
+          <a:lnRef idx="1">
+            <a:schemeClr val="accent1"/>
+          </a:lnRef>
+          <a:fillRef idx="3">
+            <a:schemeClr val="accent1"/>
+          </a:fillRef>
+          <a:effectRef idx="2">
+            <a:schemeClr val="accent1"/>
+          </a:effectRef>
+          <a:fontRef idx="minor">
+            <a:schemeClr val="lt1"/>
+          </a:fontRef>
+        </p:style>
+        <p:txBody>
+          <a:bodyPr rtlCol="0" anchor="ctr" wrap="square" lIns="45720" rIns="45720" tIns="27432" bIns="27432"/>
+          <a:lstStyle/>
+          <a:p>
+            <a:pPr algn="ctr">
+              <a:defRPr sz="800" b="0">
+                <a:solidFill>
+                  <a:srgbClr val="1E1E1E"/>
+                </a:solidFill>
+              </a:defRPr>
+            </a:pPr>
+            <a:r>
+              <a:t>¥1.5M</a:t>
+            </a:r>
+          </a:p>
+        </p:txBody>
+      </p:sp>
+      <p:sp>
+        <p:nvSpPr>
+          <p:cNvPr id="30" name="Rounded Rectangle 29"/>
+          <p:cNvSpPr/>
+          <p:nvPr/>
+        </p:nvSpPr>
+        <p:spPr>
+          <a:xfrm>
+            <a:off x="457200" y="2368296"/>
+            <a:ext cx="2743200" cy="228600"/>
+          </a:xfrm>
+          <a:prstGeom prst="roundRect">
+            <a:avLst/>
+          </a:prstGeom>
+          <a:solidFill>
+            <a:srgbClr val="E8F5E9"/>
+          </a:solidFill>
+          <a:ln>
+            <a:noFill/>
+          </a:ln>
+        </p:spPr>
+        <p:style>
+          <a:lnRef idx="1">
+            <a:schemeClr val="accent1"/>
+          </a:lnRef>
+          <a:fillRef idx="3">
+            <a:schemeClr val="accent1"/>
+          </a:fillRef>
+          <a:effectRef idx="2">
+            <a:schemeClr val="accent1"/>
+          </a:effectRef>
+          <a:fontRef idx="minor">
+            <a:schemeClr val="lt1"/>
+          </a:fontRef>
+        </p:style>
+        <p:txBody>
+          <a:bodyPr rtlCol="0" anchor="ctr" wrap="square" lIns="45720" rIns="45720" tIns="27432" bIns="27432"/>
+          <a:lstStyle/>
+          <a:p>
+            <a:pPr algn="ctr">
+              <a:defRPr sz="800" b="0">
+                <a:solidFill>
+                  <a:srgbClr val="1E1E1E"/>
+                </a:solidFill>
+              </a:defRPr>
+            </a:pPr>
+            <a:r>
+              <a:t>SaaS — Setup</a:t>
+            </a:r>
+          </a:p>
+        </p:txBody>
+      </p:sp>
+      <p:sp>
+        <p:nvSpPr>
+          <p:cNvPr id="31" name="Rounded Rectangle 30"/>
+          <p:cNvSpPr/>
+          <p:nvPr/>
+        </p:nvSpPr>
+        <p:spPr>
+          <a:xfrm>
+            <a:off x="3200400" y="2368296"/>
+            <a:ext cx="2011680" cy="228600"/>
+          </a:xfrm>
+          <a:prstGeom prst="roundRect">
+            <a:avLst/>
+          </a:prstGeom>
+          <a:solidFill>
+            <a:srgbClr val="E8F5E9"/>
+          </a:solidFill>
+          <a:ln>
+            <a:noFill/>
+          </a:ln>
+        </p:spPr>
+        <p:style>
+          <a:lnRef idx="1">
+            <a:schemeClr val="accent1"/>
+          </a:lnRef>
+          <a:fillRef idx="3">
+            <a:schemeClr val="accent1"/>
+          </a:fillRef>
+          <a:effectRef idx="2">
+            <a:schemeClr val="accent1"/>
+          </a:effectRef>
+          <a:fontRef idx="minor">
+            <a:schemeClr val="lt1"/>
+          </a:fontRef>
+        </p:style>
+        <p:txBody>
+          <a:bodyPr rtlCol="0" anchor="ctr" wrap="square" lIns="45720" rIns="45720" tIns="27432" bIns="27432"/>
+          <a:lstStyle/>
+          <a:p>
+            <a:pPr algn="ctr">
+              <a:defRPr sz="800" b="0">
+                <a:solidFill>
+                  <a:srgbClr val="1E1E1E"/>
+                </a:solidFill>
+              </a:defRPr>
+            </a:pPr>
+            <a:r>
+              <a:t>¥0</a:t>
+            </a:r>
+          </a:p>
+        </p:txBody>
+      </p:sp>
+      <p:sp>
+        <p:nvSpPr>
+          <p:cNvPr id="32" name="Rounded Rectangle 31"/>
+          <p:cNvSpPr/>
+          <p:nvPr/>
+        </p:nvSpPr>
+        <p:spPr>
+          <a:xfrm>
+            <a:off x="5212080" y="2368296"/>
+            <a:ext cx="2011680" cy="228600"/>
+          </a:xfrm>
+          <a:prstGeom prst="roundRect">
+            <a:avLst/>
+          </a:prstGeom>
+          <a:solidFill>
+            <a:srgbClr val="E8F5E9"/>
+          </a:solidFill>
+          <a:ln>
+            <a:noFill/>
+          </a:ln>
+        </p:spPr>
+        <p:style>
+          <a:lnRef idx="1">
+            <a:schemeClr val="accent1"/>
+          </a:lnRef>
+          <a:fillRef idx="3">
+            <a:schemeClr val="accent1"/>
+          </a:fillRef>
+          <a:effectRef idx="2">
+            <a:schemeClr val="accent1"/>
+          </a:effectRef>
+          <a:fontRef idx="minor">
+            <a:schemeClr val="lt1"/>
+          </a:fontRef>
+        </p:style>
+        <p:txBody>
+          <a:bodyPr rtlCol="0" anchor="ctr" wrap="square" lIns="45720" rIns="45720" tIns="27432" bIns="27432"/>
+          <a:lstStyle/>
+          <a:p>
+            <a:pPr algn="ctr">
+              <a:defRPr sz="800" b="0">
+                <a:solidFill>
+                  <a:srgbClr val="1E1E1E"/>
+                </a:solidFill>
+              </a:defRPr>
+            </a:pPr>
+            <a:r>
+              <a:t>¥0</a:t>
+            </a:r>
+          </a:p>
+        </p:txBody>
+      </p:sp>
+      <p:sp>
+        <p:nvSpPr>
+          <p:cNvPr id="33" name="Rounded Rectangle 32"/>
+          <p:cNvSpPr/>
+          <p:nvPr/>
+        </p:nvSpPr>
+        <p:spPr>
+          <a:xfrm>
+            <a:off x="7223760" y="2368296"/>
+            <a:ext cx="2011680" cy="228600"/>
+          </a:xfrm>
+          <a:prstGeom prst="roundRect">
+            <a:avLst/>
+          </a:prstGeom>
+          <a:solidFill>
+            <a:srgbClr val="E8F5E9"/>
+          </a:solidFill>
+          <a:ln>
+            <a:noFill/>
+          </a:ln>
+        </p:spPr>
+        <p:style>
+          <a:lnRef idx="1">
+            <a:schemeClr val="accent1"/>
+          </a:lnRef>
+          <a:fillRef idx="3">
+            <a:schemeClr val="accent1"/>
+          </a:fillRef>
+          <a:effectRef idx="2">
+            <a:schemeClr val="accent1"/>
+          </a:effectRef>
+          <a:fontRef idx="minor">
+            <a:schemeClr val="lt1"/>
+          </a:fontRef>
+        </p:style>
+        <p:txBody>
+          <a:bodyPr rtlCol="0" anchor="ctr" wrap="square" lIns="45720" rIns="45720" tIns="27432" bIns="27432"/>
+          <a:lstStyle/>
+          <a:p>
+            <a:pPr algn="ctr">
+              <a:defRPr sz="800" b="0">
+                <a:solidFill>
+                  <a:srgbClr val="1E1E1E"/>
+                </a:solidFill>
+              </a:defRPr>
+            </a:pPr>
+            <a:r>
+              <a:t>¥0</a:t>
+            </a:r>
+          </a:p>
+        </p:txBody>
+      </p:sp>
+      <p:sp>
+        <p:nvSpPr>
+          <p:cNvPr id="34" name="Rounded Rectangle 33"/>
+          <p:cNvSpPr/>
+          <p:nvPr/>
+        </p:nvSpPr>
+        <p:spPr>
+          <a:xfrm>
+            <a:off x="9235440" y="2368296"/>
+            <a:ext cx="2011680" cy="228600"/>
+          </a:xfrm>
+          <a:prstGeom prst="roundRect">
+            <a:avLst/>
+          </a:prstGeom>
+          <a:solidFill>
+            <a:srgbClr val="E8F5E9"/>
+          </a:solidFill>
+          <a:ln>
+            <a:noFill/>
+          </a:ln>
+        </p:spPr>
+        <p:style>
+          <a:lnRef idx="1">
+            <a:schemeClr val="accent1"/>
+          </a:lnRef>
+          <a:fillRef idx="3">
+            <a:schemeClr val="accent1"/>
+          </a:fillRef>
+          <a:effectRef idx="2">
+            <a:schemeClr val="accent1"/>
+          </a:effectRef>
+          <a:fontRef idx="minor">
+            <a:schemeClr val="lt1"/>
+          </a:fontRef>
+        </p:style>
+        <p:txBody>
+          <a:bodyPr rtlCol="0" anchor="ctr" wrap="square" lIns="45720" rIns="45720" tIns="27432" bIns="27432"/>
+          <a:lstStyle/>
+          <a:p>
+            <a:pPr algn="ctr">
+              <a:defRPr sz="800" b="0">
+                <a:solidFill>
+                  <a:srgbClr val="1E1E1E"/>
+                </a:solidFill>
+              </a:defRPr>
+            </a:pPr>
+            <a:r>
+              <a:t>¥0.2M</a:t>
+            </a:r>
+          </a:p>
+        </p:txBody>
+      </p:sp>
+      <p:sp>
+        <p:nvSpPr>
+          <p:cNvPr id="35" name="Rounded Rectangle 34"/>
+          <p:cNvSpPr/>
+          <p:nvPr/>
+        </p:nvSpPr>
+        <p:spPr>
+          <a:xfrm>
+            <a:off x="11247120" y="2368296"/>
+            <a:ext cx="2011680" cy="228600"/>
+          </a:xfrm>
+          <a:prstGeom prst="roundRect">
+            <a:avLst/>
+          </a:prstGeom>
+          <a:solidFill>
+            <a:srgbClr val="E8F5E9"/>
+          </a:solidFill>
+          <a:ln>
+            <a:noFill/>
+          </a:ln>
+        </p:spPr>
+        <p:style>
+          <a:lnRef idx="1">
+            <a:schemeClr val="accent1"/>
+          </a:lnRef>
+          <a:fillRef idx="3">
+            <a:schemeClr val="accent1"/>
+          </a:fillRef>
+          <a:effectRef idx="2">
+            <a:schemeClr val="accent1"/>
+          </a:effectRef>
+          <a:fontRef idx="minor">
+            <a:schemeClr val="lt1"/>
+          </a:fontRef>
+        </p:style>
+        <p:txBody>
+          <a:bodyPr rtlCol="0" anchor="ctr" wrap="square" lIns="45720" rIns="45720" tIns="27432" bIns="27432"/>
+          <a:lstStyle/>
+          <a:p>
+            <a:pPr algn="ctr">
+              <a:defRPr sz="800" b="0">
+                <a:solidFill>
+                  <a:srgbClr val="1E1E1E"/>
+                </a:solidFill>
+              </a:defRPr>
+            </a:pPr>
+            <a:r>
+              <a:t>¥0.6M</a:t>
+            </a:r>
+          </a:p>
+        </p:txBody>
+      </p:sp>
+      <p:sp>
+        <p:nvSpPr>
+          <p:cNvPr id="36" name="Rounded Rectangle 35"/>
+          <p:cNvSpPr/>
+          <p:nvPr/>
+        </p:nvSpPr>
+        <p:spPr>
+          <a:xfrm>
+            <a:off x="457200" y="2624328"/>
+            <a:ext cx="2743200" cy="228600"/>
+          </a:xfrm>
+          <a:prstGeom prst="roundRect">
+            <a:avLst/>
+          </a:prstGeom>
+          <a:solidFill>
+            <a:srgbClr val="E8F5E9"/>
+          </a:solidFill>
+          <a:ln>
+            <a:noFill/>
+          </a:ln>
+        </p:spPr>
+        <p:style>
+          <a:lnRef idx="1">
+            <a:schemeClr val="accent1"/>
+          </a:lnRef>
+          <a:fillRef idx="3">
+            <a:schemeClr val="accent1"/>
+          </a:fillRef>
+          <a:effectRef idx="2">
+            <a:schemeClr val="accent1"/>
+          </a:effectRef>
+          <a:fontRef idx="minor">
+            <a:schemeClr val="lt1"/>
+          </a:fontRef>
+        </p:style>
+        <p:txBody>
+          <a:bodyPr rtlCol="0" anchor="ctr" wrap="square" lIns="45720" rIns="45720" tIns="27432" bIns="27432"/>
+          <a:lstStyle/>
+          <a:p>
+            <a:pPr algn="ctr">
+              <a:defRPr sz="800" b="0">
+                <a:solidFill>
+                  <a:srgbClr val="1E1E1E"/>
+                </a:solidFill>
+              </a:defRPr>
+            </a:pPr>
+            <a:r>
+              <a:t>SaaS — Monthly</a:t>
+            </a:r>
+          </a:p>
+        </p:txBody>
+      </p:sp>
+      <p:sp>
+        <p:nvSpPr>
+          <p:cNvPr id="37" name="Rounded Rectangle 36"/>
+          <p:cNvSpPr/>
+          <p:nvPr/>
+        </p:nvSpPr>
+        <p:spPr>
+          <a:xfrm>
+            <a:off x="3200400" y="2624328"/>
+            <a:ext cx="2011680" cy="228600"/>
+          </a:xfrm>
+          <a:prstGeom prst="roundRect">
+            <a:avLst/>
+          </a:prstGeom>
+          <a:solidFill>
+            <a:srgbClr val="E8F5E9"/>
+          </a:solidFill>
+          <a:ln>
+            <a:noFill/>
+          </a:ln>
+        </p:spPr>
+        <p:style>
+          <a:lnRef idx="1">
+            <a:schemeClr val="accent1"/>
+          </a:lnRef>
+          <a:fillRef idx="3">
+            <a:schemeClr val="accent1"/>
+          </a:fillRef>
+          <a:effectRef idx="2">
+            <a:schemeClr val="accent1"/>
+          </a:effectRef>
+          <a:fontRef idx="minor">
+            <a:schemeClr val="lt1"/>
+          </a:fontRef>
+        </p:style>
+        <p:txBody>
+          <a:bodyPr rtlCol="0" anchor="ctr" wrap="square" lIns="45720" rIns="45720" tIns="27432" bIns="27432"/>
+          <a:lstStyle/>
+          <a:p>
+            <a:pPr algn="ctr">
+              <a:defRPr sz="800" b="0">
+                <a:solidFill>
+                  <a:srgbClr val="1E1E1E"/>
+                </a:solidFill>
+              </a:defRPr>
+            </a:pPr>
+            <a:r>
+              <a:t>¥0</a:t>
+            </a:r>
+          </a:p>
+        </p:txBody>
+      </p:sp>
+      <p:sp>
+        <p:nvSpPr>
+          <p:cNvPr id="38" name="Rounded Rectangle 37"/>
+          <p:cNvSpPr/>
+          <p:nvPr/>
+        </p:nvSpPr>
+        <p:spPr>
+          <a:xfrm>
+            <a:off x="5212080" y="2624328"/>
+            <a:ext cx="2011680" cy="228600"/>
+          </a:xfrm>
+          <a:prstGeom prst="roundRect">
+            <a:avLst/>
+          </a:prstGeom>
+          <a:solidFill>
+            <a:srgbClr val="E8F5E9"/>
+          </a:solidFill>
+          <a:ln>
+            <a:noFill/>
+          </a:ln>
+        </p:spPr>
+        <p:style>
+          <a:lnRef idx="1">
+            <a:schemeClr val="accent1"/>
+          </a:lnRef>
+          <a:fillRef idx="3">
+            <a:schemeClr val="accent1"/>
+          </a:fillRef>
+          <a:effectRef idx="2">
+            <a:schemeClr val="accent1"/>
+          </a:effectRef>
+          <a:fontRef idx="minor">
+            <a:schemeClr val="lt1"/>
+          </a:fontRef>
+        </p:style>
+        <p:txBody>
+          <a:bodyPr rtlCol="0" anchor="ctr" wrap="square" lIns="45720" rIns="45720" tIns="27432" bIns="27432"/>
+          <a:lstStyle/>
+          <a:p>
+            <a:pPr algn="ctr">
+              <a:defRPr sz="800" b="0">
+                <a:solidFill>
+                  <a:srgbClr val="1E1E1E"/>
+                </a:solidFill>
+              </a:defRPr>
+            </a:pPr>
+            <a:r>
+              <a:t>¥0</a:t>
+            </a:r>
+          </a:p>
+        </p:txBody>
+      </p:sp>
+      <p:sp>
+        <p:nvSpPr>
+          <p:cNvPr id="39" name="Rounded Rectangle 38"/>
+          <p:cNvSpPr/>
+          <p:nvPr/>
+        </p:nvSpPr>
+        <p:spPr>
+          <a:xfrm>
+            <a:off x="7223760" y="2624328"/>
+            <a:ext cx="2011680" cy="228600"/>
+          </a:xfrm>
+          <a:prstGeom prst="roundRect">
+            <a:avLst/>
+          </a:prstGeom>
+          <a:solidFill>
+            <a:srgbClr val="E8F5E9"/>
+          </a:solidFill>
+          <a:ln>
+            <a:noFill/>
+          </a:ln>
+        </p:spPr>
+        <p:style>
+          <a:lnRef idx="1">
+            <a:schemeClr val="accent1"/>
+          </a:lnRef>
+          <a:fillRef idx="3">
+            <a:schemeClr val="accent1"/>
+          </a:fillRef>
+          <a:effectRef idx="2">
+            <a:schemeClr val="accent1"/>
+          </a:effectRef>
+          <a:fontRef idx="minor">
+            <a:schemeClr val="lt1"/>
+          </a:fontRef>
+        </p:style>
+        <p:txBody>
+          <a:bodyPr rtlCol="0" anchor="ctr" wrap="square" lIns="45720" rIns="45720" tIns="27432" bIns="27432"/>
+          <a:lstStyle/>
+          <a:p>
+            <a:pPr algn="ctr">
+              <a:defRPr sz="800" b="0">
+                <a:solidFill>
+                  <a:srgbClr val="1E1E1E"/>
+                </a:solidFill>
+              </a:defRPr>
+            </a:pPr>
+            <a:r>
+              <a:t>¥0</a:t>
+            </a:r>
+          </a:p>
+        </p:txBody>
+      </p:sp>
+      <p:sp>
+        <p:nvSpPr>
+          <p:cNvPr id="40" name="Rounded Rectangle 39"/>
+          <p:cNvSpPr/>
+          <p:nvPr/>
+        </p:nvSpPr>
+        <p:spPr>
+          <a:xfrm>
+            <a:off x="9235440" y="2624328"/>
+            <a:ext cx="2011680" cy="228600"/>
+          </a:xfrm>
+          <a:prstGeom prst="roundRect">
+            <a:avLst/>
+          </a:prstGeom>
+          <a:solidFill>
+            <a:srgbClr val="E8F5E9"/>
+          </a:solidFill>
+          <a:ln>
+            <a:noFill/>
+          </a:ln>
+        </p:spPr>
+        <p:style>
+          <a:lnRef idx="1">
+            <a:schemeClr val="accent1"/>
+          </a:lnRef>
+          <a:fillRef idx="3">
+            <a:schemeClr val="accent1"/>
+          </a:fillRef>
+          <a:effectRef idx="2">
+            <a:schemeClr val="accent1"/>
+          </a:effectRef>
+          <a:fontRef idx="minor">
+            <a:schemeClr val="lt1"/>
+          </a:fontRef>
+        </p:style>
+        <p:txBody>
+          <a:bodyPr rtlCol="0" anchor="ctr" wrap="square" lIns="45720" rIns="45720" tIns="27432" bIns="27432"/>
+          <a:lstStyle/>
+          <a:p>
+            <a:pPr algn="ctr">
+              <a:defRPr sz="800" b="0">
+                <a:solidFill>
+                  <a:srgbClr val="1E1E1E"/>
+                </a:solidFill>
+              </a:defRPr>
+            </a:pPr>
+            <a:r>
+              <a:t>¥0.6M</a:t>
+            </a:r>
+          </a:p>
+        </p:txBody>
+      </p:sp>
+      <p:sp>
+        <p:nvSpPr>
+          <p:cNvPr id="41" name="Rounded Rectangle 40"/>
+          <p:cNvSpPr/>
+          <p:nvPr/>
+        </p:nvSpPr>
+        <p:spPr>
+          <a:xfrm>
+            <a:off x="11247120" y="2624328"/>
+            <a:ext cx="2011680" cy="228600"/>
+          </a:xfrm>
+          <a:prstGeom prst="roundRect">
+            <a:avLst/>
+          </a:prstGeom>
+          <a:solidFill>
+            <a:srgbClr val="E8F5E9"/>
+          </a:solidFill>
+          <a:ln>
+            <a:noFill/>
+          </a:ln>
+        </p:spPr>
+        <p:style>
+          <a:lnRef idx="1">
+            <a:schemeClr val="accent1"/>
+          </a:lnRef>
+          <a:fillRef idx="3">
+            <a:schemeClr val="accent1"/>
+          </a:fillRef>
+          <a:effectRef idx="2">
+            <a:schemeClr val="accent1"/>
+          </a:effectRef>
+          <a:fontRef idx="minor">
+            <a:schemeClr val="lt1"/>
+          </a:fontRef>
+        </p:style>
+        <p:txBody>
+          <a:bodyPr rtlCol="0" anchor="ctr" wrap="square" lIns="45720" rIns="45720" tIns="27432" bIns="27432"/>
+          <a:lstStyle/>
+          <a:p>
+            <a:pPr algn="ctr">
+              <a:defRPr sz="800" b="0">
+                <a:solidFill>
+                  <a:srgbClr val="1E1E1E"/>
+                </a:solidFill>
+              </a:defRPr>
+            </a:pPr>
+            <a:r>
+              <a:t>¥4.8M</a:t>
+            </a:r>
+          </a:p>
+        </p:txBody>
+      </p:sp>
+      <p:sp>
+        <p:nvSpPr>
+          <p:cNvPr id="42" name="Rounded Rectangle 41"/>
+          <p:cNvSpPr/>
+          <p:nvPr/>
+        </p:nvSpPr>
+        <p:spPr>
+          <a:xfrm>
+            <a:off x="457200" y="2880360"/>
+            <a:ext cx="2743200" cy="228600"/>
+          </a:xfrm>
+          <a:prstGeom prst="roundRect">
+            <a:avLst/>
+          </a:prstGeom>
+          <a:solidFill>
+            <a:srgbClr val="C8E6C9"/>
+          </a:solidFill>
+          <a:ln>
+            <a:noFill/>
+          </a:ln>
+        </p:spPr>
+        <p:style>
+          <a:lnRef idx="1">
+            <a:schemeClr val="accent1"/>
+          </a:lnRef>
+          <a:fillRef idx="3">
+            <a:schemeClr val="accent1"/>
+          </a:fillRef>
+          <a:effectRef idx="2">
+            <a:schemeClr val="accent1"/>
+          </a:effectRef>
+          <a:fontRef idx="minor">
+            <a:schemeClr val="lt1"/>
+          </a:fontRef>
+        </p:style>
+        <p:txBody>
+          <a:bodyPr rtlCol="0" anchor="ctr" wrap="square" lIns="45720" rIns="45720" tIns="27432" bIns="27432"/>
+          <a:lstStyle/>
+          <a:p>
+            <a:pPr algn="ctr">
+              <a:defRPr sz="800" b="1">
+                <a:solidFill>
+                  <a:srgbClr val="1E1E1E"/>
+                </a:solidFill>
+              </a:defRPr>
+            </a:pPr>
+            <a:r>
+              <a:t>Total Revenue</a:t>
+            </a:r>
+          </a:p>
+        </p:txBody>
+      </p:sp>
+      <p:sp>
+        <p:nvSpPr>
+          <p:cNvPr id="43" name="Rounded Rectangle 42"/>
+          <p:cNvSpPr/>
+          <p:nvPr/>
+        </p:nvSpPr>
+        <p:spPr>
+          <a:xfrm>
+            <a:off x="3200400" y="2880360"/>
+            <a:ext cx="2011680" cy="228600"/>
+          </a:xfrm>
+          <a:prstGeom prst="roundRect">
+            <a:avLst/>
+          </a:prstGeom>
+          <a:solidFill>
+            <a:srgbClr val="C8E6C9"/>
+          </a:solidFill>
+          <a:ln>
+            <a:noFill/>
+          </a:ln>
+        </p:spPr>
+        <p:style>
+          <a:lnRef idx="1">
+            <a:schemeClr val="accent1"/>
+          </a:lnRef>
+          <a:fillRef idx="3">
+            <a:schemeClr val="accent1"/>
+          </a:fillRef>
+          <a:effectRef idx="2">
+            <a:schemeClr val="accent1"/>
+          </a:effectRef>
+          <a:fontRef idx="minor">
+            <a:schemeClr val="lt1"/>
+          </a:fontRef>
+        </p:style>
+        <p:txBody>
+          <a:bodyPr rtlCol="0" anchor="ctr" wrap="square" lIns="45720" rIns="45720" tIns="27432" bIns="27432"/>
+          <a:lstStyle/>
+          <a:p>
+            <a:pPr algn="ctr">
+              <a:defRPr sz="800" b="1">
+                <a:solidFill>
+                  <a:srgbClr val="1E1E1E"/>
+                </a:solidFill>
+              </a:defRPr>
+            </a:pPr>
+            <a:r>
+              <a:t>¥0</a:t>
+            </a:r>
+          </a:p>
+        </p:txBody>
+      </p:sp>
+      <p:sp>
+        <p:nvSpPr>
+          <p:cNvPr id="44" name="Rounded Rectangle 43"/>
+          <p:cNvSpPr/>
+          <p:nvPr/>
+        </p:nvSpPr>
+        <p:spPr>
+          <a:xfrm>
+            <a:off x="5212080" y="2880360"/>
+            <a:ext cx="2011680" cy="228600"/>
+          </a:xfrm>
+          <a:prstGeom prst="roundRect">
+            <a:avLst/>
+          </a:prstGeom>
+          <a:solidFill>
+            <a:srgbClr val="C8E6C9"/>
+          </a:solidFill>
+          <a:ln>
+            <a:noFill/>
+          </a:ln>
+        </p:spPr>
+        <p:style>
+          <a:lnRef idx="1">
+            <a:schemeClr val="accent1"/>
+          </a:lnRef>
+          <a:fillRef idx="3">
+            <a:schemeClr val="accent1"/>
+          </a:fillRef>
+          <a:effectRef idx="2">
+            <a:schemeClr val="accent1"/>
+          </a:effectRef>
+          <a:fontRef idx="minor">
+            <a:schemeClr val="lt1"/>
+          </a:fontRef>
+        </p:style>
+        <p:txBody>
+          <a:bodyPr rtlCol="0" anchor="ctr" wrap="square" lIns="45720" rIns="45720" tIns="27432" bIns="27432"/>
+          <a:lstStyle/>
+          <a:p>
+            <a:pPr algn="ctr">
+              <a:defRPr sz="800" b="1">
+                <a:solidFill>
+                  <a:srgbClr val="1E1E1E"/>
+                </a:solidFill>
+              </a:defRPr>
+            </a:pPr>
+            <a:r>
+              <a:t>¥0</a:t>
+            </a:r>
+          </a:p>
+        </p:txBody>
+      </p:sp>
+      <p:sp>
+        <p:nvSpPr>
+          <p:cNvPr id="45" name="Rounded Rectangle 44"/>
+          <p:cNvSpPr/>
+          <p:nvPr/>
+        </p:nvSpPr>
+        <p:spPr>
+          <a:xfrm>
+            <a:off x="7223760" y="2880360"/>
+            <a:ext cx="2011680" cy="228600"/>
+          </a:xfrm>
+          <a:prstGeom prst="roundRect">
+            <a:avLst/>
+          </a:prstGeom>
+          <a:solidFill>
+            <a:srgbClr val="C8E6C9"/>
+          </a:solidFill>
+          <a:ln>
+            <a:noFill/>
+          </a:ln>
+        </p:spPr>
+        <p:style>
+          <a:lnRef idx="1">
+            <a:schemeClr val="accent1"/>
+          </a:lnRef>
+          <a:fillRef idx="3">
+            <a:schemeClr val="accent1"/>
+          </a:fillRef>
+          <a:effectRef idx="2">
+            <a:schemeClr val="accent1"/>
+          </a:effectRef>
+          <a:fontRef idx="minor">
+            <a:schemeClr val="lt1"/>
+          </a:fontRef>
+        </p:style>
+        <p:txBody>
+          <a:bodyPr rtlCol="0" anchor="ctr" wrap="square" lIns="45720" rIns="45720" tIns="27432" bIns="27432"/>
+          <a:lstStyle/>
+          <a:p>
+            <a:pPr algn="ctr">
+              <a:defRPr sz="800" b="1">
+                <a:solidFill>
+                  <a:srgbClr val="1E1E1E"/>
+                </a:solidFill>
+              </a:defRPr>
+            </a:pPr>
+            <a:r>
+              <a:t>¥3.9M</a:t>
+            </a:r>
+          </a:p>
+        </p:txBody>
+      </p:sp>
+      <p:sp>
+        <p:nvSpPr>
+          <p:cNvPr id="46" name="Rounded Rectangle 45"/>
+          <p:cNvSpPr/>
+          <p:nvPr/>
+        </p:nvSpPr>
+        <p:spPr>
+          <a:xfrm>
+            <a:off x="9235440" y="2880360"/>
+            <a:ext cx="2011680" cy="228600"/>
+          </a:xfrm>
+          <a:prstGeom prst="roundRect">
+            <a:avLst/>
+          </a:prstGeom>
+          <a:solidFill>
+            <a:srgbClr val="C8E6C9"/>
+          </a:solidFill>
+          <a:ln>
+            <a:noFill/>
+          </a:ln>
+        </p:spPr>
+        <p:style>
+          <a:lnRef idx="1">
+            <a:schemeClr val="accent1"/>
+          </a:lnRef>
+          <a:fillRef idx="3">
+            <a:schemeClr val="accent1"/>
+          </a:fillRef>
+          <a:effectRef idx="2">
+            <a:schemeClr val="accent1"/>
+          </a:effectRef>
+          <a:fontRef idx="minor">
+            <a:schemeClr val="lt1"/>
+          </a:fontRef>
+        </p:style>
+        <p:txBody>
+          <a:bodyPr rtlCol="0" anchor="ctr" wrap="square" lIns="45720" rIns="45720" tIns="27432" bIns="27432"/>
+          <a:lstStyle/>
+          <a:p>
+            <a:pPr algn="ctr">
+              <a:defRPr sz="800" b="1">
+                <a:solidFill>
+                  <a:srgbClr val="1E1E1E"/>
+                </a:solidFill>
+              </a:defRPr>
+            </a:pPr>
+            <a:r>
+              <a:t>¥11.5M</a:t>
+            </a:r>
+          </a:p>
+        </p:txBody>
+      </p:sp>
+      <p:sp>
+        <p:nvSpPr>
+          <p:cNvPr id="47" name="Rounded Rectangle 46"/>
+          <p:cNvSpPr/>
+          <p:nvPr/>
+        </p:nvSpPr>
+        <p:spPr>
+          <a:xfrm>
+            <a:off x="11247120" y="2880360"/>
+            <a:ext cx="2011680" cy="228600"/>
+          </a:xfrm>
+          <a:prstGeom prst="roundRect">
+            <a:avLst/>
+          </a:prstGeom>
+          <a:solidFill>
+            <a:srgbClr val="C8E6C9"/>
+          </a:solidFill>
+          <a:ln>
+            <a:noFill/>
+          </a:ln>
+        </p:spPr>
+        <p:style>
+          <a:lnRef idx="1">
+            <a:schemeClr val="accent1"/>
+          </a:lnRef>
+          <a:fillRef idx="3">
+            <a:schemeClr val="accent1"/>
+          </a:fillRef>
+          <a:effectRef idx="2">
+            <a:schemeClr val="accent1"/>
+          </a:effectRef>
+          <a:fontRef idx="minor">
+            <a:schemeClr val="lt1"/>
+          </a:fontRef>
+        </p:style>
+        <p:txBody>
+          <a:bodyPr rtlCol="0" anchor="ctr" wrap="square" lIns="45720" rIns="45720" tIns="27432" bIns="27432"/>
+          <a:lstStyle/>
+          <a:p>
+            <a:pPr algn="ctr">
+              <a:defRPr sz="800" b="1">
+                <a:solidFill>
+                  <a:srgbClr val="1E1E1E"/>
+                </a:solidFill>
+              </a:defRPr>
+            </a:pPr>
+            <a:r>
+              <a:t>¥27.3M</a:t>
+            </a:r>
+          </a:p>
+        </p:txBody>
+      </p:sp>
+      <p:sp>
+        <p:nvSpPr>
+          <p:cNvPr id="48" name="TextBox 47"/>
+          <p:cNvSpPr txBox="1"/>
+          <p:nvPr/>
+        </p:nvSpPr>
+        <p:spPr>
+          <a:xfrm>
+            <a:off x="457200" y="3108960"/>
+            <a:ext cx="5486400" cy="274320"/>
+          </a:xfrm>
+          <a:prstGeom prst="rect">
+            <a:avLst/>
+          </a:prstGeom>
+          <a:noFill/>
+        </p:spPr>
+        <p:txBody>
+          <a:bodyPr wrap="none">
+            <a:spAutoFit/>
+          </a:bodyPr>
+          <a:lstStyle/>
+          <a:p>
+            <a:pPr>
+              <a:defRPr sz="1200" b="1">
+                <a:solidFill>
+                  <a:srgbClr val="1A237E"/>
+                </a:solidFill>
+              </a:defRPr>
+            </a:pPr>
+            <a:r>
+              <a:t>Cost Projection (new costs only)</a:t>
+            </a:r>
+          </a:p>
+        </p:txBody>
+      </p:sp>
+      <p:sp>
+        <p:nvSpPr>
+          <p:cNvPr id="49" name="Rounded Rectangle 48"/>
+          <p:cNvSpPr/>
+          <p:nvPr/>
+        </p:nvSpPr>
+        <p:spPr>
+          <a:xfrm>
+            <a:off x="457200" y="3429000"/>
+            <a:ext cx="2743200" cy="274320"/>
+          </a:xfrm>
+          <a:prstGeom prst="roundRect">
+            <a:avLst/>
+          </a:prstGeom>
+          <a:solidFill>
+            <a:srgbClr val="1A237E"/>
+          </a:solidFill>
+          <a:ln>
+            <a:noFill/>
+          </a:ln>
+        </p:spPr>
+        <p:style>
+          <a:lnRef idx="1">
+            <a:schemeClr val="accent1"/>
+          </a:lnRef>
+          <a:fillRef idx="3">
+            <a:schemeClr val="accent1"/>
+          </a:fillRef>
+          <a:effectRef idx="2">
+            <a:schemeClr val="accent1"/>
+          </a:effectRef>
+          <a:fontRef idx="minor">
+            <a:schemeClr val="lt1"/>
+          </a:fontRef>
+        </p:style>
+        <p:txBody>
+          <a:bodyPr rtlCol="0" anchor="ctr" wrap="square" lIns="45720" rIns="45720" tIns="27432" bIns="27432"/>
+          <a:lstStyle/>
+          <a:p>
+            <a:pPr algn="ctr">
+              <a:defRPr sz="800" b="1">
+                <a:solidFill>
+                  <a:srgbClr val="FFFFFF"/>
+                </a:solidFill>
+              </a:defRPr>
+            </a:pPr>
+          </a:p>
+        </p:txBody>
+      </p:sp>
+      <p:sp>
+        <p:nvSpPr>
+          <p:cNvPr id="50" name="Rounded Rectangle 49"/>
+          <p:cNvSpPr/>
+          <p:nvPr/>
+        </p:nvSpPr>
+        <p:spPr>
+          <a:xfrm>
+            <a:off x="3200400" y="3429000"/>
+            <a:ext cx="2011680" cy="274320"/>
+          </a:xfrm>
+          <a:prstGeom prst="roundRect">
+            <a:avLst/>
+          </a:prstGeom>
+          <a:solidFill>
+            <a:srgbClr val="1A237E"/>
+          </a:solidFill>
+          <a:ln>
+            <a:noFill/>
+          </a:ln>
+        </p:spPr>
+        <p:style>
+          <a:lnRef idx="1">
+            <a:schemeClr val="accent1"/>
+          </a:lnRef>
+          <a:fillRef idx="3">
+            <a:schemeClr val="accent1"/>
+          </a:fillRef>
+          <a:effectRef idx="2">
+            <a:schemeClr val="accent1"/>
+          </a:effectRef>
+          <a:fontRef idx="minor">
+            <a:schemeClr val="lt1"/>
+          </a:fontRef>
+        </p:style>
+        <p:txBody>
+          <a:bodyPr rtlCol="0" anchor="ctr" wrap="square" lIns="45720" rIns="45720" tIns="27432" bIns="27432"/>
+          <a:lstStyle/>
+          <a:p>
+            <a:pPr algn="ctr">
+              <a:defRPr sz="800" b="1">
+                <a:solidFill>
+                  <a:srgbClr val="FFFFFF"/>
+                </a:solidFill>
+              </a:defRPr>
+            </a:pPr>
+            <a:r>
+              <a:t>2026</a:t>
+            </a:r>
+          </a:p>
+        </p:txBody>
+      </p:sp>
+      <p:sp>
+        <p:nvSpPr>
+          <p:cNvPr id="51" name="Rounded Rectangle 50"/>
+          <p:cNvSpPr/>
+          <p:nvPr/>
+        </p:nvSpPr>
+        <p:spPr>
+          <a:xfrm>
+            <a:off x="5212080" y="3429000"/>
+            <a:ext cx="2011680" cy="274320"/>
+          </a:xfrm>
+          <a:prstGeom prst="roundRect">
+            <a:avLst/>
+          </a:prstGeom>
+          <a:solidFill>
+            <a:srgbClr val="1A237E"/>
+          </a:solidFill>
+          <a:ln>
+            <a:noFill/>
+          </a:ln>
+        </p:spPr>
+        <p:style>
+          <a:lnRef idx="1">
+            <a:schemeClr val="accent1"/>
+          </a:lnRef>
+          <a:fillRef idx="3">
+            <a:schemeClr val="accent1"/>
+          </a:fillRef>
+          <a:effectRef idx="2">
+            <a:schemeClr val="accent1"/>
+          </a:effectRef>
+          <a:fontRef idx="minor">
+            <a:schemeClr val="lt1"/>
+          </a:fontRef>
+        </p:style>
+        <p:txBody>
+          <a:bodyPr rtlCol="0" anchor="ctr" wrap="square" lIns="45720" rIns="45720" tIns="27432" bIns="27432"/>
+          <a:lstStyle/>
+          <a:p>
+            <a:pPr algn="ctr">
+              <a:defRPr sz="800" b="1">
+                <a:solidFill>
+                  <a:srgbClr val="FFFFFF"/>
+                </a:solidFill>
+              </a:defRPr>
+            </a:pPr>
+            <a:r>
+              <a:t>2027</a:t>
+            </a:r>
+          </a:p>
+        </p:txBody>
+      </p:sp>
+      <p:sp>
+        <p:nvSpPr>
+          <p:cNvPr id="52" name="Rounded Rectangle 51"/>
+          <p:cNvSpPr/>
+          <p:nvPr/>
+        </p:nvSpPr>
+        <p:spPr>
+          <a:xfrm>
+            <a:off x="7223760" y="3429000"/>
+            <a:ext cx="2011680" cy="274320"/>
+          </a:xfrm>
+          <a:prstGeom prst="roundRect">
+            <a:avLst/>
+          </a:prstGeom>
+          <a:solidFill>
+            <a:srgbClr val="1A237E"/>
+          </a:solidFill>
+          <a:ln>
+            <a:noFill/>
+          </a:ln>
+        </p:spPr>
+        <p:style>
+          <a:lnRef idx="1">
+            <a:schemeClr val="accent1"/>
+          </a:lnRef>
+          <a:fillRef idx="3">
+            <a:schemeClr val="accent1"/>
+          </a:fillRef>
+          <a:effectRef idx="2">
+            <a:schemeClr val="accent1"/>
+          </a:effectRef>
+          <a:fontRef idx="minor">
+            <a:schemeClr val="lt1"/>
+          </a:fontRef>
+        </p:style>
+        <p:txBody>
+          <a:bodyPr rtlCol="0" anchor="ctr" wrap="square" lIns="45720" rIns="45720" tIns="27432" bIns="27432"/>
+          <a:lstStyle/>
+          <a:p>
+            <a:pPr algn="ctr">
+              <a:defRPr sz="800" b="1">
+                <a:solidFill>
+                  <a:srgbClr val="FFFFFF"/>
+                </a:solidFill>
+              </a:defRPr>
+            </a:pPr>
+            <a:r>
+              <a:t>2028</a:t>
+            </a:r>
+          </a:p>
+        </p:txBody>
+      </p:sp>
+      <p:sp>
+        <p:nvSpPr>
+          <p:cNvPr id="53" name="Rounded Rectangle 52"/>
+          <p:cNvSpPr/>
+          <p:nvPr/>
+        </p:nvSpPr>
+        <p:spPr>
+          <a:xfrm>
+            <a:off x="9235440" y="3429000"/>
+            <a:ext cx="2011680" cy="274320"/>
+          </a:xfrm>
+          <a:prstGeom prst="roundRect">
+            <a:avLst/>
+          </a:prstGeom>
+          <a:solidFill>
+            <a:srgbClr val="1A237E"/>
+          </a:solidFill>
+          <a:ln>
+            <a:noFill/>
+          </a:ln>
+        </p:spPr>
+        <p:style>
+          <a:lnRef idx="1">
+            <a:schemeClr val="accent1"/>
+          </a:lnRef>
+          <a:fillRef idx="3">
+            <a:schemeClr val="accent1"/>
+          </a:fillRef>
+          <a:effectRef idx="2">
+            <a:schemeClr val="accent1"/>
+          </a:effectRef>
+          <a:fontRef idx="minor">
+            <a:schemeClr val="lt1"/>
+          </a:fontRef>
+        </p:style>
+        <p:txBody>
+          <a:bodyPr rtlCol="0" anchor="ctr" wrap="square" lIns="45720" rIns="45720" tIns="27432" bIns="27432"/>
+          <a:lstStyle/>
+          <a:p>
+            <a:pPr algn="ctr">
+              <a:defRPr sz="800" b="1">
+                <a:solidFill>
+                  <a:srgbClr val="FFFFFF"/>
+                </a:solidFill>
+              </a:defRPr>
+            </a:pPr>
+            <a:r>
+              <a:t>2029</a:t>
+            </a:r>
+          </a:p>
+        </p:txBody>
+      </p:sp>
+      <p:sp>
+        <p:nvSpPr>
+          <p:cNvPr id="54" name="Rounded Rectangle 53"/>
+          <p:cNvSpPr/>
+          <p:nvPr/>
+        </p:nvSpPr>
+        <p:spPr>
+          <a:xfrm>
+            <a:off x="11247120" y="3429000"/>
+            <a:ext cx="2011680" cy="274320"/>
+          </a:xfrm>
+          <a:prstGeom prst="roundRect">
+            <a:avLst/>
+          </a:prstGeom>
+          <a:solidFill>
+            <a:srgbClr val="1A237E"/>
+          </a:solidFill>
+          <a:ln>
+            <a:noFill/>
+          </a:ln>
+        </p:spPr>
+        <p:style>
+          <a:lnRef idx="1">
+            <a:schemeClr val="accent1"/>
+          </a:lnRef>
+          <a:fillRef idx="3">
+            <a:schemeClr val="accent1"/>
+          </a:fillRef>
+          <a:effectRef idx="2">
+            <a:schemeClr val="accent1"/>
+          </a:effectRef>
+          <a:fontRef idx="minor">
+            <a:schemeClr val="lt1"/>
+          </a:fontRef>
+        </p:style>
+        <p:txBody>
+          <a:bodyPr rtlCol="0" anchor="ctr" wrap="square" lIns="45720" rIns="45720" tIns="27432" bIns="27432"/>
+          <a:lstStyle/>
+          <a:p>
+            <a:pPr algn="ctr">
+              <a:defRPr sz="800" b="1">
+                <a:solidFill>
+                  <a:srgbClr val="FFFFFF"/>
+                </a:solidFill>
+              </a:defRPr>
+            </a:pPr>
+            <a:r>
+              <a:t>2030+</a:t>
+            </a:r>
+          </a:p>
+        </p:txBody>
+      </p:sp>
+      <p:sp>
+        <p:nvSpPr>
+          <p:cNvPr id="55" name="Rounded Rectangle 54"/>
+          <p:cNvSpPr/>
+          <p:nvPr/>
+        </p:nvSpPr>
+        <p:spPr>
+          <a:xfrm>
+            <a:off x="457200" y="3703320"/>
+            <a:ext cx="2743200" cy="228600"/>
+          </a:xfrm>
+          <a:prstGeom prst="roundRect">
+            <a:avLst/>
+          </a:prstGeom>
+          <a:solidFill>
+            <a:srgbClr val="FFEBEE"/>
+          </a:solidFill>
+          <a:ln>
+            <a:noFill/>
+          </a:ln>
+        </p:spPr>
+        <p:style>
+          <a:lnRef idx="1">
+            <a:schemeClr val="accent1"/>
+          </a:lnRef>
+          <a:fillRef idx="3">
+            <a:schemeClr val="accent1"/>
+          </a:fillRef>
+          <a:effectRef idx="2">
+            <a:schemeClr val="accent1"/>
+          </a:effectRef>
+          <a:fontRef idx="minor">
+            <a:schemeClr val="lt1"/>
+          </a:fontRef>
+        </p:style>
+        <p:txBody>
+          <a:bodyPr rtlCol="0" anchor="ctr" wrap="square" lIns="45720" rIns="45720" tIns="27432" bIns="27432"/>
+          <a:lstStyle/>
+          <a:p>
+            <a:pPr algn="ctr">
+              <a:defRPr sz="800" b="0">
+                <a:solidFill>
+                  <a:srgbClr val="1E1E1E"/>
+                </a:solidFill>
+              </a:defRPr>
+            </a:pPr>
+            <a:r>
+              <a:t>New developer salaries</a:t>
+            </a:r>
+          </a:p>
+        </p:txBody>
+      </p:sp>
+      <p:sp>
+        <p:nvSpPr>
+          <p:cNvPr id="56" name="Rounded Rectangle 55"/>
+          <p:cNvSpPr/>
+          <p:nvPr/>
+        </p:nvSpPr>
+        <p:spPr>
+          <a:xfrm>
+            <a:off x="3200400" y="3703320"/>
+            <a:ext cx="2011680" cy="228600"/>
+          </a:xfrm>
+          <a:prstGeom prst="roundRect">
+            <a:avLst/>
+          </a:prstGeom>
+          <a:solidFill>
+            <a:srgbClr val="FFEBEE"/>
+          </a:solidFill>
+          <a:ln>
+            <a:noFill/>
+          </a:ln>
+        </p:spPr>
+        <p:style>
+          <a:lnRef idx="1">
+            <a:schemeClr val="accent1"/>
+          </a:lnRef>
+          <a:fillRef idx="3">
+            <a:schemeClr val="accent1"/>
+          </a:fillRef>
+          <a:effectRef idx="2">
+            <a:schemeClr val="accent1"/>
+          </a:effectRef>
+          <a:fontRef idx="minor">
+            <a:schemeClr val="lt1"/>
+          </a:fontRef>
+        </p:style>
+        <p:txBody>
+          <a:bodyPr rtlCol="0" anchor="ctr" wrap="square" lIns="45720" rIns="45720" tIns="27432" bIns="27432"/>
+          <a:lstStyle/>
+          <a:p>
+            <a:pPr algn="ctr">
+              <a:defRPr sz="800" b="0">
+                <a:solidFill>
+                  <a:srgbClr val="1E1E1E"/>
+                </a:solidFill>
+              </a:defRPr>
+            </a:pPr>
+            <a:r>
+              <a:t>¥1.8M</a:t>
+            </a:r>
+          </a:p>
+        </p:txBody>
+      </p:sp>
+      <p:sp>
+        <p:nvSpPr>
+          <p:cNvPr id="57" name="Rounded Rectangle 56"/>
+          <p:cNvSpPr/>
+          <p:nvPr/>
+        </p:nvSpPr>
+        <p:spPr>
+          <a:xfrm>
+            <a:off x="5212080" y="3703320"/>
+            <a:ext cx="2011680" cy="228600"/>
+          </a:xfrm>
+          <a:prstGeom prst="roundRect">
+            <a:avLst/>
+          </a:prstGeom>
+          <a:solidFill>
+            <a:srgbClr val="FFEBEE"/>
+          </a:solidFill>
+          <a:ln>
+            <a:noFill/>
+          </a:ln>
+        </p:spPr>
+        <p:style>
+          <a:lnRef idx="1">
+            <a:schemeClr val="accent1"/>
+          </a:lnRef>
+          <a:fillRef idx="3">
+            <a:schemeClr val="accent1"/>
+          </a:fillRef>
+          <a:effectRef idx="2">
+            <a:schemeClr val="accent1"/>
+          </a:effectRef>
+          <a:fontRef idx="minor">
+            <a:schemeClr val="lt1"/>
+          </a:fontRef>
+        </p:style>
+        <p:txBody>
+          <a:bodyPr rtlCol="0" anchor="ctr" wrap="square" lIns="45720" rIns="45720" tIns="27432" bIns="27432"/>
+          <a:lstStyle/>
+          <a:p>
+            <a:pPr algn="ctr">
+              <a:defRPr sz="800" b="0">
+                <a:solidFill>
+                  <a:srgbClr val="1E1E1E"/>
+                </a:solidFill>
+              </a:defRPr>
+            </a:pPr>
+            <a:r>
+              <a:t>¥9.5M</a:t>
+            </a:r>
+          </a:p>
+        </p:txBody>
+      </p:sp>
+      <p:sp>
+        <p:nvSpPr>
+          <p:cNvPr id="58" name="Rounded Rectangle 57"/>
+          <p:cNvSpPr/>
+          <p:nvPr/>
+        </p:nvSpPr>
+        <p:spPr>
+          <a:xfrm>
+            <a:off x="7223760" y="3703320"/>
+            <a:ext cx="2011680" cy="228600"/>
+          </a:xfrm>
+          <a:prstGeom prst="roundRect">
+            <a:avLst/>
+          </a:prstGeom>
+          <a:solidFill>
+            <a:srgbClr val="FFEBEE"/>
+          </a:solidFill>
+          <a:ln>
+            <a:noFill/>
+          </a:ln>
+        </p:spPr>
+        <p:style>
+          <a:lnRef idx="1">
+            <a:schemeClr val="accent1"/>
+          </a:lnRef>
+          <a:fillRef idx="3">
+            <a:schemeClr val="accent1"/>
+          </a:fillRef>
+          <a:effectRef idx="2">
+            <a:schemeClr val="accent1"/>
+          </a:effectRef>
+          <a:fontRef idx="minor">
+            <a:schemeClr val="lt1"/>
+          </a:fontRef>
+        </p:style>
+        <p:txBody>
+          <a:bodyPr rtlCol="0" anchor="ctr" wrap="square" lIns="45720" rIns="45720" tIns="27432" bIns="27432"/>
+          <a:lstStyle/>
+          <a:p>
+            <a:pPr algn="ctr">
+              <a:defRPr sz="800" b="0">
+                <a:solidFill>
+                  <a:srgbClr val="1E1E1E"/>
+                </a:solidFill>
+              </a:defRPr>
+            </a:pPr>
+            <a:r>
+              <a:t>¥16.2M</a:t>
+            </a:r>
+          </a:p>
+        </p:txBody>
+      </p:sp>
+      <p:sp>
+        <p:nvSpPr>
+          <p:cNvPr id="59" name="Rounded Rectangle 58"/>
+          <p:cNvSpPr/>
+          <p:nvPr/>
+        </p:nvSpPr>
+        <p:spPr>
+          <a:xfrm>
+            <a:off x="9235440" y="3703320"/>
+            <a:ext cx="2011680" cy="228600"/>
+          </a:xfrm>
+          <a:prstGeom prst="roundRect">
+            <a:avLst/>
+          </a:prstGeom>
+          <a:solidFill>
+            <a:srgbClr val="FFEBEE"/>
+          </a:solidFill>
+          <a:ln>
+            <a:noFill/>
+          </a:ln>
+        </p:spPr>
+        <p:style>
+          <a:lnRef idx="1">
+            <a:schemeClr val="accent1"/>
+          </a:lnRef>
+          <a:fillRef idx="3">
+            <a:schemeClr val="accent1"/>
+          </a:fillRef>
+          <a:effectRef idx="2">
+            <a:schemeClr val="accent1"/>
+          </a:effectRef>
+          <a:fontRef idx="minor">
+            <a:schemeClr val="lt1"/>
+          </a:fontRef>
+        </p:style>
+        <p:txBody>
+          <a:bodyPr rtlCol="0" anchor="ctr" wrap="square" lIns="45720" rIns="45720" tIns="27432" bIns="27432"/>
+          <a:lstStyle/>
+          <a:p>
+            <a:pPr algn="ctr">
+              <a:defRPr sz="800" b="0">
+                <a:solidFill>
+                  <a:srgbClr val="1E1E1E"/>
+                </a:solidFill>
+              </a:defRPr>
+            </a:pPr>
+            <a:r>
+              <a:t>¥16.2M</a:t>
+            </a:r>
+          </a:p>
+        </p:txBody>
+      </p:sp>
+      <p:sp>
+        <p:nvSpPr>
+          <p:cNvPr id="60" name="Rounded Rectangle 59"/>
+          <p:cNvSpPr/>
+          <p:nvPr/>
+        </p:nvSpPr>
+        <p:spPr>
+          <a:xfrm>
+            <a:off x="11247120" y="3703320"/>
+            <a:ext cx="2011680" cy="228600"/>
+          </a:xfrm>
+          <a:prstGeom prst="roundRect">
+            <a:avLst/>
+          </a:prstGeom>
+          <a:solidFill>
+            <a:srgbClr val="FFEBEE"/>
+          </a:solidFill>
+          <a:ln>
+            <a:noFill/>
+          </a:ln>
+        </p:spPr>
+        <p:style>
+          <a:lnRef idx="1">
+            <a:schemeClr val="accent1"/>
+          </a:lnRef>
+          <a:fillRef idx="3">
+            <a:schemeClr val="accent1"/>
+          </a:fillRef>
+          <a:effectRef idx="2">
+            <a:schemeClr val="accent1"/>
+          </a:effectRef>
+          <a:fontRef idx="minor">
+            <a:schemeClr val="lt1"/>
+          </a:fontRef>
+        </p:style>
+        <p:txBody>
+          <a:bodyPr rtlCol="0" anchor="ctr" wrap="square" lIns="45720" rIns="45720" tIns="27432" bIns="27432"/>
+          <a:lstStyle/>
+          <a:p>
+            <a:pPr algn="ctr">
+              <a:defRPr sz="800" b="0">
+                <a:solidFill>
+                  <a:srgbClr val="1E1E1E"/>
+                </a:solidFill>
+              </a:defRPr>
+            </a:pPr>
+            <a:r>
+              <a:t>¥16.2M</a:t>
+            </a:r>
+          </a:p>
+        </p:txBody>
+      </p:sp>
+      <p:sp>
+        <p:nvSpPr>
+          <p:cNvPr id="61" name="Rounded Rectangle 60"/>
+          <p:cNvSpPr/>
+          <p:nvPr/>
+        </p:nvSpPr>
+        <p:spPr>
+          <a:xfrm>
+            <a:off x="457200" y="3959352"/>
+            <a:ext cx="2743200" cy="228600"/>
+          </a:xfrm>
+          <a:prstGeom prst="roundRect">
+            <a:avLst/>
+          </a:prstGeom>
+          <a:solidFill>
+            <a:srgbClr val="FFEBEE"/>
+          </a:solidFill>
+          <a:ln>
+            <a:noFill/>
+          </a:ln>
+        </p:spPr>
+        <p:style>
+          <a:lnRef idx="1">
+            <a:schemeClr val="accent1"/>
+          </a:lnRef>
+          <a:fillRef idx="3">
+            <a:schemeClr val="accent1"/>
+          </a:fillRef>
+          <a:effectRef idx="2">
+            <a:schemeClr val="accent1"/>
+          </a:effectRef>
+          <a:fontRef idx="minor">
+            <a:schemeClr val="lt1"/>
+          </a:fontRef>
+        </p:style>
+        <p:txBody>
+          <a:bodyPr rtlCol="0" anchor="ctr" wrap="square" lIns="45720" rIns="45720" tIns="27432" bIns="27432"/>
+          <a:lstStyle/>
+          <a:p>
+            <a:pPr algn="ctr">
+              <a:defRPr sz="800" b="0">
+                <a:solidFill>
+                  <a:srgbClr val="1E1E1E"/>
+                </a:solidFill>
+              </a:defRPr>
+            </a:pPr>
+            <a:r>
+              <a:t>AI Hardware (one-time)</a:t>
+            </a:r>
+          </a:p>
+        </p:txBody>
+      </p:sp>
+      <p:sp>
+        <p:nvSpPr>
+          <p:cNvPr id="62" name="Rounded Rectangle 61"/>
+          <p:cNvSpPr/>
+          <p:nvPr/>
+        </p:nvSpPr>
+        <p:spPr>
+          <a:xfrm>
+            <a:off x="3200400" y="3959352"/>
+            <a:ext cx="2011680" cy="228600"/>
+          </a:xfrm>
+          <a:prstGeom prst="roundRect">
+            <a:avLst/>
+          </a:prstGeom>
+          <a:solidFill>
+            <a:srgbClr val="FFEBEE"/>
+          </a:solidFill>
+          <a:ln>
+            <a:noFill/>
+          </a:ln>
+        </p:spPr>
+        <p:style>
+          <a:lnRef idx="1">
+            <a:schemeClr val="accent1"/>
+          </a:lnRef>
+          <a:fillRef idx="3">
+            <a:schemeClr val="accent1"/>
+          </a:fillRef>
+          <a:effectRef idx="2">
+            <a:schemeClr val="accent1"/>
+          </a:effectRef>
+          <a:fontRef idx="minor">
+            <a:schemeClr val="lt1"/>
+          </a:fontRef>
+        </p:style>
+        <p:txBody>
+          <a:bodyPr rtlCol="0" anchor="ctr" wrap="square" lIns="45720" rIns="45720" tIns="27432" bIns="27432"/>
+          <a:lstStyle/>
+          <a:p>
+            <a:pPr algn="ctr">
+              <a:defRPr sz="800" b="0">
+                <a:solidFill>
+                  <a:srgbClr val="1E1E1E"/>
+                </a:solidFill>
+              </a:defRPr>
+            </a:pPr>
+            <a:r>
+              <a:t>¥1.2M</a:t>
+            </a:r>
+          </a:p>
+        </p:txBody>
+      </p:sp>
+      <p:sp>
+        <p:nvSpPr>
+          <p:cNvPr id="63" name="Rounded Rectangle 62"/>
+          <p:cNvSpPr/>
+          <p:nvPr/>
+        </p:nvSpPr>
+        <p:spPr>
+          <a:xfrm>
+            <a:off x="5212080" y="3959352"/>
+            <a:ext cx="2011680" cy="228600"/>
+          </a:xfrm>
+          <a:prstGeom prst="roundRect">
+            <a:avLst/>
+          </a:prstGeom>
+          <a:solidFill>
+            <a:srgbClr val="FFEBEE"/>
+          </a:solidFill>
+          <a:ln>
+            <a:noFill/>
+          </a:ln>
+        </p:spPr>
+        <p:style>
+          <a:lnRef idx="1">
+            <a:schemeClr val="accent1"/>
+          </a:lnRef>
+          <a:fillRef idx="3">
+            <a:schemeClr val="accent1"/>
+          </a:fillRef>
+          <a:effectRef idx="2">
+            <a:schemeClr val="accent1"/>
+          </a:effectRef>
+          <a:fontRef idx="minor">
+            <a:schemeClr val="lt1"/>
+          </a:fontRef>
+        </p:style>
+        <p:txBody>
+          <a:bodyPr rtlCol="0" anchor="ctr" wrap="square" lIns="45720" rIns="45720" tIns="27432" bIns="27432"/>
+          <a:lstStyle/>
+          <a:p>
+            <a:pPr algn="ctr">
+              <a:defRPr sz="800" b="0">
+                <a:solidFill>
+                  <a:srgbClr val="1E1E1E"/>
+                </a:solidFill>
+              </a:defRPr>
+            </a:pPr>
+            <a:r>
+              <a:t>¥0</a:t>
+            </a:r>
+          </a:p>
+        </p:txBody>
+      </p:sp>
+      <p:sp>
+        <p:nvSpPr>
+          <p:cNvPr id="64" name="Rounded Rectangle 63"/>
+          <p:cNvSpPr/>
+          <p:nvPr/>
+        </p:nvSpPr>
+        <p:spPr>
+          <a:xfrm>
+            <a:off x="7223760" y="3959352"/>
+            <a:ext cx="2011680" cy="228600"/>
+          </a:xfrm>
+          <a:prstGeom prst="roundRect">
+            <a:avLst/>
+          </a:prstGeom>
+          <a:solidFill>
+            <a:srgbClr val="FFEBEE"/>
+          </a:solidFill>
+          <a:ln>
+            <a:noFill/>
+          </a:ln>
+        </p:spPr>
+        <p:style>
+          <a:lnRef idx="1">
+            <a:schemeClr val="accent1"/>
+          </a:lnRef>
+          <a:fillRef idx="3">
+            <a:schemeClr val="accent1"/>
+          </a:fillRef>
+          <a:effectRef idx="2">
+            <a:schemeClr val="accent1"/>
+          </a:effectRef>
+          <a:fontRef idx="minor">
+            <a:schemeClr val="lt1"/>
+          </a:fontRef>
+        </p:style>
+        <p:txBody>
+          <a:bodyPr rtlCol="0" anchor="ctr" wrap="square" lIns="45720" rIns="45720" tIns="27432" bIns="27432"/>
+          <a:lstStyle/>
+          <a:p>
+            <a:pPr algn="ctr">
+              <a:defRPr sz="800" b="0">
+                <a:solidFill>
+                  <a:srgbClr val="1E1E1E"/>
+                </a:solidFill>
+              </a:defRPr>
+            </a:pPr>
+            <a:r>
+              <a:t>¥0</a:t>
+            </a:r>
+          </a:p>
+        </p:txBody>
+      </p:sp>
+      <p:sp>
+        <p:nvSpPr>
+          <p:cNvPr id="65" name="Rounded Rectangle 64"/>
+          <p:cNvSpPr/>
+          <p:nvPr/>
+        </p:nvSpPr>
+        <p:spPr>
+          <a:xfrm>
+            <a:off x="9235440" y="3959352"/>
+            <a:ext cx="2011680" cy="228600"/>
+          </a:xfrm>
+          <a:prstGeom prst="roundRect">
+            <a:avLst/>
+          </a:prstGeom>
+          <a:solidFill>
+            <a:srgbClr val="FFEBEE"/>
+          </a:solidFill>
+          <a:ln>
+            <a:noFill/>
+          </a:ln>
+        </p:spPr>
+        <p:style>
+          <a:lnRef idx="1">
+            <a:schemeClr val="accent1"/>
+          </a:lnRef>
+          <a:fillRef idx="3">
+            <a:schemeClr val="accent1"/>
+          </a:fillRef>
+          <a:effectRef idx="2">
+            <a:schemeClr val="accent1"/>
+          </a:effectRef>
+          <a:fontRef idx="minor">
+            <a:schemeClr val="lt1"/>
+          </a:fontRef>
+        </p:style>
+        <p:txBody>
+          <a:bodyPr rtlCol="0" anchor="ctr" wrap="square" lIns="45720" rIns="45720" tIns="27432" bIns="27432"/>
+          <a:lstStyle/>
+          <a:p>
+            <a:pPr algn="ctr">
+              <a:defRPr sz="800" b="0">
+                <a:solidFill>
+                  <a:srgbClr val="1E1E1E"/>
+                </a:solidFill>
+              </a:defRPr>
+            </a:pPr>
+            <a:r>
+              <a:t>¥0</a:t>
+            </a:r>
+          </a:p>
+        </p:txBody>
+      </p:sp>
+      <p:sp>
+        <p:nvSpPr>
+          <p:cNvPr id="66" name="Rounded Rectangle 65"/>
+          <p:cNvSpPr/>
+          <p:nvPr/>
+        </p:nvSpPr>
+        <p:spPr>
+          <a:xfrm>
+            <a:off x="11247120" y="3959352"/>
+            <a:ext cx="2011680" cy="228600"/>
+          </a:xfrm>
+          <a:prstGeom prst="roundRect">
+            <a:avLst/>
+          </a:prstGeom>
+          <a:solidFill>
+            <a:srgbClr val="FFEBEE"/>
+          </a:solidFill>
+          <a:ln>
+            <a:noFill/>
+          </a:ln>
+        </p:spPr>
+        <p:style>
+          <a:lnRef idx="1">
+            <a:schemeClr val="accent1"/>
+          </a:lnRef>
+          <a:fillRef idx="3">
+            <a:schemeClr val="accent1"/>
+          </a:fillRef>
+          <a:effectRef idx="2">
+            <a:schemeClr val="accent1"/>
+          </a:effectRef>
+          <a:fontRef idx="minor">
+            <a:schemeClr val="lt1"/>
+          </a:fontRef>
+        </p:style>
+        <p:txBody>
+          <a:bodyPr rtlCol="0" anchor="ctr" wrap="square" lIns="45720" rIns="45720" tIns="27432" bIns="27432"/>
+          <a:lstStyle/>
+          <a:p>
+            <a:pPr algn="ctr">
+              <a:defRPr sz="800" b="0">
+                <a:solidFill>
+                  <a:srgbClr val="1E1E1E"/>
+                </a:solidFill>
+              </a:defRPr>
+            </a:pPr>
+            <a:r>
+              <a:t>¥0</a:t>
+            </a:r>
+          </a:p>
+        </p:txBody>
+      </p:sp>
+      <p:sp>
+        <p:nvSpPr>
+          <p:cNvPr id="67" name="Rounded Rectangle 66"/>
+          <p:cNvSpPr/>
+          <p:nvPr/>
+        </p:nvSpPr>
+        <p:spPr>
+          <a:xfrm>
+            <a:off x="457200" y="4215383"/>
+            <a:ext cx="2743200" cy="228600"/>
+          </a:xfrm>
+          <a:prstGeom prst="roundRect">
+            <a:avLst/>
+          </a:prstGeom>
+          <a:solidFill>
+            <a:srgbClr val="FFEBEE"/>
+          </a:solidFill>
+          <a:ln>
+            <a:noFill/>
+          </a:ln>
+        </p:spPr>
+        <p:style>
+          <a:lnRef idx="1">
+            <a:schemeClr val="accent1"/>
+          </a:lnRef>
+          <a:fillRef idx="3">
+            <a:schemeClr val="accent1"/>
+          </a:fillRef>
+          <a:effectRef idx="2">
+            <a:schemeClr val="accent1"/>
+          </a:effectRef>
+          <a:fontRef idx="minor">
+            <a:schemeClr val="lt1"/>
+          </a:fontRef>
+        </p:style>
+        <p:txBody>
+          <a:bodyPr rtlCol="0" anchor="ctr" wrap="square" lIns="45720" rIns="45720" tIns="27432" bIns="27432"/>
+          <a:lstStyle/>
+          <a:p>
+            <a:pPr algn="ctr">
+              <a:defRPr sz="800" b="0">
+                <a:solidFill>
+                  <a:srgbClr val="1E1E1E"/>
+                </a:solidFill>
+              </a:defRPr>
+            </a:pPr>
+            <a:r>
+              <a:t>AWS (additional)</a:t>
+            </a:r>
+          </a:p>
+        </p:txBody>
+      </p:sp>
+      <p:sp>
+        <p:nvSpPr>
+          <p:cNvPr id="68" name="Rounded Rectangle 67"/>
+          <p:cNvSpPr/>
+          <p:nvPr/>
+        </p:nvSpPr>
+        <p:spPr>
+          <a:xfrm>
+            <a:off x="3200400" y="4215383"/>
+            <a:ext cx="2011680" cy="228600"/>
+          </a:xfrm>
+          <a:prstGeom prst="roundRect">
+            <a:avLst/>
+          </a:prstGeom>
+          <a:solidFill>
+            <a:srgbClr val="FFEBEE"/>
+          </a:solidFill>
+          <a:ln>
+            <a:noFill/>
+          </a:ln>
+        </p:spPr>
+        <p:style>
+          <a:lnRef idx="1">
+            <a:schemeClr val="accent1"/>
+          </a:lnRef>
+          <a:fillRef idx="3">
+            <a:schemeClr val="accent1"/>
+          </a:fillRef>
+          <a:effectRef idx="2">
+            <a:schemeClr val="accent1"/>
+          </a:effectRef>
+          <a:fontRef idx="minor">
+            <a:schemeClr val="lt1"/>
+          </a:fontRef>
+        </p:style>
+        <p:txBody>
+          <a:bodyPr rtlCol="0" anchor="ctr" wrap="square" lIns="45720" rIns="45720" tIns="27432" bIns="27432"/>
+          <a:lstStyle/>
+          <a:p>
+            <a:pPr algn="ctr">
+              <a:defRPr sz="800" b="0">
+                <a:solidFill>
+                  <a:srgbClr val="1E1E1E"/>
+                </a:solidFill>
+              </a:defRPr>
+            </a:pPr>
+            <a:r>
+              <a:t>¥0</a:t>
+            </a:r>
+          </a:p>
+        </p:txBody>
+      </p:sp>
+      <p:sp>
+        <p:nvSpPr>
+          <p:cNvPr id="69" name="Rounded Rectangle 68"/>
+          <p:cNvSpPr/>
+          <p:nvPr/>
+        </p:nvSpPr>
+        <p:spPr>
+          <a:xfrm>
+            <a:off x="5212080" y="4215383"/>
+            <a:ext cx="2011680" cy="228600"/>
+          </a:xfrm>
+          <a:prstGeom prst="roundRect">
+            <a:avLst/>
+          </a:prstGeom>
+          <a:solidFill>
+            <a:srgbClr val="FFEBEE"/>
+          </a:solidFill>
+          <a:ln>
+            <a:noFill/>
+          </a:ln>
+        </p:spPr>
+        <p:style>
+          <a:lnRef idx="1">
+            <a:schemeClr val="accent1"/>
+          </a:lnRef>
+          <a:fillRef idx="3">
+            <a:schemeClr val="accent1"/>
+          </a:fillRef>
+          <a:effectRef idx="2">
+            <a:schemeClr val="accent1"/>
+          </a:effectRef>
+          <a:fontRef idx="minor">
+            <a:schemeClr val="lt1"/>
+          </a:fontRef>
+        </p:style>
+        <p:txBody>
+          <a:bodyPr rtlCol="0" anchor="ctr" wrap="square" lIns="45720" rIns="45720" tIns="27432" bIns="27432"/>
+          <a:lstStyle/>
+          <a:p>
+            <a:pPr algn="ctr">
+              <a:defRPr sz="800" b="0">
+                <a:solidFill>
+                  <a:srgbClr val="1E1E1E"/>
+                </a:solidFill>
+              </a:defRPr>
+            </a:pPr>
+            <a:r>
+              <a:t>¥0.24M</a:t>
+            </a:r>
+          </a:p>
+        </p:txBody>
+      </p:sp>
+      <p:sp>
+        <p:nvSpPr>
+          <p:cNvPr id="70" name="Rounded Rectangle 69"/>
+          <p:cNvSpPr/>
+          <p:nvPr/>
+        </p:nvSpPr>
+        <p:spPr>
+          <a:xfrm>
+            <a:off x="7223760" y="4215383"/>
+            <a:ext cx="2011680" cy="228600"/>
+          </a:xfrm>
+          <a:prstGeom prst="roundRect">
+            <a:avLst/>
+          </a:prstGeom>
+          <a:solidFill>
+            <a:srgbClr val="FFEBEE"/>
+          </a:solidFill>
+          <a:ln>
+            <a:noFill/>
+          </a:ln>
+        </p:spPr>
+        <p:style>
+          <a:lnRef idx="1">
+            <a:schemeClr val="accent1"/>
+          </a:lnRef>
+          <a:fillRef idx="3">
+            <a:schemeClr val="accent1"/>
+          </a:fillRef>
+          <a:effectRef idx="2">
+            <a:schemeClr val="accent1"/>
+          </a:effectRef>
+          <a:fontRef idx="minor">
+            <a:schemeClr val="lt1"/>
+          </a:fontRef>
+        </p:style>
+        <p:txBody>
+          <a:bodyPr rtlCol="0" anchor="ctr" wrap="square" lIns="45720" rIns="45720" tIns="27432" bIns="27432"/>
+          <a:lstStyle/>
+          <a:p>
+            <a:pPr algn="ctr">
+              <a:defRPr sz="800" b="0">
+                <a:solidFill>
+                  <a:srgbClr val="1E1E1E"/>
+                </a:solidFill>
+              </a:defRPr>
+            </a:pPr>
+            <a:r>
+              <a:t>¥0.24M</a:t>
+            </a:r>
+          </a:p>
+        </p:txBody>
+      </p:sp>
+      <p:sp>
+        <p:nvSpPr>
+          <p:cNvPr id="71" name="Rounded Rectangle 70"/>
+          <p:cNvSpPr/>
+          <p:nvPr/>
+        </p:nvSpPr>
+        <p:spPr>
+          <a:xfrm>
+            <a:off x="9235440" y="4215383"/>
+            <a:ext cx="2011680" cy="228600"/>
+          </a:xfrm>
+          <a:prstGeom prst="roundRect">
+            <a:avLst/>
+          </a:prstGeom>
+          <a:solidFill>
+            <a:srgbClr val="FFEBEE"/>
+          </a:solidFill>
+          <a:ln>
+            <a:noFill/>
+          </a:ln>
+        </p:spPr>
+        <p:style>
+          <a:lnRef idx="1">
+            <a:schemeClr val="accent1"/>
+          </a:lnRef>
+          <a:fillRef idx="3">
+            <a:schemeClr val="accent1"/>
+          </a:fillRef>
+          <a:effectRef idx="2">
+            <a:schemeClr val="accent1"/>
+          </a:effectRef>
+          <a:fontRef idx="minor">
+            <a:schemeClr val="lt1"/>
+          </a:fontRef>
+        </p:style>
+        <p:txBody>
+          <a:bodyPr rtlCol="0" anchor="ctr" wrap="square" lIns="45720" rIns="45720" tIns="27432" bIns="27432"/>
+          <a:lstStyle/>
+          <a:p>
+            <a:pPr algn="ctr">
+              <a:defRPr sz="800" b="0">
+                <a:solidFill>
+                  <a:srgbClr val="1E1E1E"/>
+                </a:solidFill>
+              </a:defRPr>
+            </a:pPr>
+            <a:r>
+              <a:t>¥0.24M</a:t>
+            </a:r>
+          </a:p>
+        </p:txBody>
+      </p:sp>
+      <p:sp>
+        <p:nvSpPr>
+          <p:cNvPr id="72" name="Rounded Rectangle 71"/>
+          <p:cNvSpPr/>
+          <p:nvPr/>
+        </p:nvSpPr>
+        <p:spPr>
+          <a:xfrm>
+            <a:off x="11247120" y="4215383"/>
+            <a:ext cx="2011680" cy="228600"/>
+          </a:xfrm>
+          <a:prstGeom prst="roundRect">
+            <a:avLst/>
+          </a:prstGeom>
+          <a:solidFill>
+            <a:srgbClr val="FFEBEE"/>
+          </a:solidFill>
+          <a:ln>
+            <a:noFill/>
+          </a:ln>
+        </p:spPr>
+        <p:style>
+          <a:lnRef idx="1">
+            <a:schemeClr val="accent1"/>
+          </a:lnRef>
+          <a:fillRef idx="3">
+            <a:schemeClr val="accent1"/>
+          </a:fillRef>
+          <a:effectRef idx="2">
+            <a:schemeClr val="accent1"/>
+          </a:effectRef>
+          <a:fontRef idx="minor">
+            <a:schemeClr val="lt1"/>
+          </a:fontRef>
+        </p:style>
+        <p:txBody>
+          <a:bodyPr rtlCol="0" anchor="ctr" wrap="square" lIns="45720" rIns="45720" tIns="27432" bIns="27432"/>
+          <a:lstStyle/>
+          <a:p>
+            <a:pPr algn="ctr">
+              <a:defRPr sz="800" b="0">
+                <a:solidFill>
+                  <a:srgbClr val="1E1E1E"/>
+                </a:solidFill>
+              </a:defRPr>
+            </a:pPr>
+            <a:r>
+              <a:t>¥0.24M</a:t>
+            </a:r>
+          </a:p>
+        </p:txBody>
+      </p:sp>
+      <p:sp>
+        <p:nvSpPr>
+          <p:cNvPr id="73" name="Rounded Rectangle 72"/>
+          <p:cNvSpPr/>
+          <p:nvPr/>
+        </p:nvSpPr>
+        <p:spPr>
+          <a:xfrm>
+            <a:off x="457200" y="4471416"/>
+            <a:ext cx="2743200" cy="228600"/>
+          </a:xfrm>
+          <a:prstGeom prst="roundRect">
+            <a:avLst/>
+          </a:prstGeom>
+          <a:solidFill>
+            <a:srgbClr val="E3F2FD"/>
+          </a:solidFill>
+          <a:ln>
+            <a:noFill/>
+          </a:ln>
+        </p:spPr>
+        <p:style>
+          <a:lnRef idx="1">
+            <a:schemeClr val="accent1"/>
+          </a:lnRef>
+          <a:fillRef idx="3">
+            <a:schemeClr val="accent1"/>
+          </a:fillRef>
+          <a:effectRef idx="2">
+            <a:schemeClr val="accent1"/>
+          </a:effectRef>
+          <a:fontRef idx="minor">
+            <a:schemeClr val="lt1"/>
+          </a:fontRef>
+        </p:style>
+        <p:txBody>
+          <a:bodyPr rtlCol="0" anchor="ctr" wrap="square" lIns="45720" rIns="45720" tIns="27432" bIns="27432"/>
+          <a:lstStyle/>
+          <a:p>
+            <a:pPr algn="ctr">
+              <a:defRPr sz="800" b="0">
+                <a:solidFill>
+                  <a:srgbClr val="1565C0"/>
+                </a:solidFill>
+              </a:defRPr>
+            </a:pPr>
+            <a:r>
+              <a:t>OD Video savings</a:t>
+            </a:r>
+          </a:p>
+        </p:txBody>
+      </p:sp>
+      <p:sp>
+        <p:nvSpPr>
+          <p:cNvPr id="74" name="Rounded Rectangle 73"/>
+          <p:cNvSpPr/>
+          <p:nvPr/>
+        </p:nvSpPr>
+        <p:spPr>
+          <a:xfrm>
+            <a:off x="3200400" y="4471416"/>
+            <a:ext cx="2011680" cy="228600"/>
+          </a:xfrm>
+          <a:prstGeom prst="roundRect">
+            <a:avLst/>
+          </a:prstGeom>
+          <a:solidFill>
+            <a:srgbClr val="E3F2FD"/>
+          </a:solidFill>
+          <a:ln>
+            <a:noFill/>
+          </a:ln>
+        </p:spPr>
+        <p:style>
+          <a:lnRef idx="1">
+            <a:schemeClr val="accent1"/>
+          </a:lnRef>
+          <a:fillRef idx="3">
+            <a:schemeClr val="accent1"/>
+          </a:fillRef>
+          <a:effectRef idx="2">
+            <a:schemeClr val="accent1"/>
+          </a:effectRef>
+          <a:fontRef idx="minor">
+            <a:schemeClr val="lt1"/>
+          </a:fontRef>
+        </p:style>
+        <p:txBody>
+          <a:bodyPr rtlCol="0" anchor="ctr" wrap="square" lIns="45720" rIns="45720" tIns="27432" bIns="27432"/>
+          <a:lstStyle/>
+          <a:p>
+            <a:pPr algn="ctr">
+              <a:defRPr sz="800" b="0">
+                <a:solidFill>
+                  <a:srgbClr val="1565C0"/>
+                </a:solidFill>
+              </a:defRPr>
+            </a:pPr>
+            <a:r>
+              <a:t>-¥0</a:t>
+            </a:r>
+          </a:p>
+        </p:txBody>
+      </p:sp>
+      <p:sp>
+        <p:nvSpPr>
+          <p:cNvPr id="75" name="Rounded Rectangle 74"/>
+          <p:cNvSpPr/>
+          <p:nvPr/>
+        </p:nvSpPr>
+        <p:spPr>
+          <a:xfrm>
+            <a:off x="5212080" y="4471416"/>
+            <a:ext cx="2011680" cy="228600"/>
+          </a:xfrm>
+          <a:prstGeom prst="roundRect">
+            <a:avLst/>
+          </a:prstGeom>
+          <a:solidFill>
+            <a:srgbClr val="E3F2FD"/>
+          </a:solidFill>
+          <a:ln>
+            <a:noFill/>
+          </a:ln>
+        </p:spPr>
+        <p:style>
+          <a:lnRef idx="1">
+            <a:schemeClr val="accent1"/>
+          </a:lnRef>
+          <a:fillRef idx="3">
+            <a:schemeClr val="accent1"/>
+          </a:fillRef>
+          <a:effectRef idx="2">
+            <a:schemeClr val="accent1"/>
+          </a:effectRef>
+          <a:fontRef idx="minor">
+            <a:schemeClr val="lt1"/>
+          </a:fontRef>
+        </p:style>
+        <p:txBody>
+          <a:bodyPr rtlCol="0" anchor="ctr" wrap="square" lIns="45720" rIns="45720" tIns="27432" bIns="27432"/>
+          <a:lstStyle/>
+          <a:p>
+            <a:pPr algn="ctr">
+              <a:defRPr sz="800" b="0">
+                <a:solidFill>
+                  <a:srgbClr val="1565C0"/>
+                </a:solidFill>
+              </a:defRPr>
+            </a:pPr>
+            <a:r>
+              <a:t>-¥2.9M</a:t>
+            </a:r>
+          </a:p>
+        </p:txBody>
+      </p:sp>
+      <p:sp>
+        <p:nvSpPr>
+          <p:cNvPr id="76" name="Rounded Rectangle 75"/>
+          <p:cNvSpPr/>
+          <p:nvPr/>
+        </p:nvSpPr>
+        <p:spPr>
+          <a:xfrm>
+            <a:off x="7223760" y="4471416"/>
+            <a:ext cx="2011680" cy="228600"/>
+          </a:xfrm>
+          <a:prstGeom prst="roundRect">
+            <a:avLst/>
+          </a:prstGeom>
+          <a:solidFill>
+            <a:srgbClr val="E3F2FD"/>
+          </a:solidFill>
+          <a:ln>
+            <a:noFill/>
+          </a:ln>
+        </p:spPr>
+        <p:style>
+          <a:lnRef idx="1">
+            <a:schemeClr val="accent1"/>
+          </a:lnRef>
+          <a:fillRef idx="3">
+            <a:schemeClr val="accent1"/>
+          </a:fillRef>
+          <a:effectRef idx="2">
+            <a:schemeClr val="accent1"/>
+          </a:effectRef>
+          <a:fontRef idx="minor">
+            <a:schemeClr val="lt1"/>
+          </a:fontRef>
+        </p:style>
+        <p:txBody>
+          <a:bodyPr rtlCol="0" anchor="ctr" wrap="square" lIns="45720" rIns="45720" tIns="27432" bIns="27432"/>
+          <a:lstStyle/>
+          <a:p>
+            <a:pPr algn="ctr">
+              <a:defRPr sz="800" b="0">
+                <a:solidFill>
+                  <a:srgbClr val="1565C0"/>
+                </a:solidFill>
+              </a:defRPr>
+            </a:pPr>
+            <a:r>
+              <a:t>-¥2.9M</a:t>
+            </a:r>
+          </a:p>
+        </p:txBody>
+      </p:sp>
+      <p:sp>
+        <p:nvSpPr>
+          <p:cNvPr id="77" name="Rounded Rectangle 76"/>
+          <p:cNvSpPr/>
+          <p:nvPr/>
+        </p:nvSpPr>
+        <p:spPr>
+          <a:xfrm>
+            <a:off x="9235440" y="4471416"/>
+            <a:ext cx="2011680" cy="228600"/>
+          </a:xfrm>
+          <a:prstGeom prst="roundRect">
+            <a:avLst/>
+          </a:prstGeom>
+          <a:solidFill>
+            <a:srgbClr val="E3F2FD"/>
+          </a:solidFill>
+          <a:ln>
+            <a:noFill/>
+          </a:ln>
+        </p:spPr>
+        <p:style>
+          <a:lnRef idx="1">
+            <a:schemeClr val="accent1"/>
+          </a:lnRef>
+          <a:fillRef idx="3">
+            <a:schemeClr val="accent1"/>
+          </a:fillRef>
+          <a:effectRef idx="2">
+            <a:schemeClr val="accent1"/>
+          </a:effectRef>
+          <a:fontRef idx="minor">
+            <a:schemeClr val="lt1"/>
+          </a:fontRef>
+        </p:style>
+        <p:txBody>
+          <a:bodyPr rtlCol="0" anchor="ctr" wrap="square" lIns="45720" rIns="45720" tIns="27432" bIns="27432"/>
+          <a:lstStyle/>
+          <a:p>
+            <a:pPr algn="ctr">
+              <a:defRPr sz="800" b="0">
+                <a:solidFill>
+                  <a:srgbClr val="1565C0"/>
+                </a:solidFill>
+              </a:defRPr>
+            </a:pPr>
+            <a:r>
+              <a:t>-¥2.9M</a:t>
+            </a:r>
+          </a:p>
+        </p:txBody>
+      </p:sp>
+      <p:sp>
+        <p:nvSpPr>
+          <p:cNvPr id="78" name="Rounded Rectangle 77"/>
+          <p:cNvSpPr/>
+          <p:nvPr/>
+        </p:nvSpPr>
+        <p:spPr>
+          <a:xfrm>
+            <a:off x="11247120" y="4471416"/>
+            <a:ext cx="2011680" cy="228600"/>
+          </a:xfrm>
+          <a:prstGeom prst="roundRect">
+            <a:avLst/>
+          </a:prstGeom>
+          <a:solidFill>
+            <a:srgbClr val="E3F2FD"/>
+          </a:solidFill>
+          <a:ln>
+            <a:noFill/>
+          </a:ln>
+        </p:spPr>
+        <p:style>
+          <a:lnRef idx="1">
+            <a:schemeClr val="accent1"/>
+          </a:lnRef>
+          <a:fillRef idx="3">
+            <a:schemeClr val="accent1"/>
+          </a:fillRef>
+          <a:effectRef idx="2">
+            <a:schemeClr val="accent1"/>
+          </a:effectRef>
+          <a:fontRef idx="minor">
+            <a:schemeClr val="lt1"/>
+          </a:fontRef>
+        </p:style>
+        <p:txBody>
+          <a:bodyPr rtlCol="0" anchor="ctr" wrap="square" lIns="45720" rIns="45720" tIns="27432" bIns="27432"/>
+          <a:lstStyle/>
+          <a:p>
+            <a:pPr algn="ctr">
+              <a:defRPr sz="800" b="0">
+                <a:solidFill>
+                  <a:srgbClr val="1565C0"/>
+                </a:solidFill>
+              </a:defRPr>
+            </a:pPr>
+            <a:r>
+              <a:t>-¥2.9M</a:t>
+            </a:r>
+          </a:p>
+        </p:txBody>
+      </p:sp>
+      <p:sp>
+        <p:nvSpPr>
+          <p:cNvPr id="79" name="Rounded Rectangle 78"/>
+          <p:cNvSpPr/>
+          <p:nvPr/>
+        </p:nvSpPr>
+        <p:spPr>
+          <a:xfrm>
+            <a:off x="457200" y="4727448"/>
+            <a:ext cx="2743200" cy="228600"/>
+          </a:xfrm>
+          <a:prstGeom prst="roundRect">
+            <a:avLst/>
+          </a:prstGeom>
+          <a:solidFill>
+            <a:srgbClr val="E3F2FD"/>
+          </a:solidFill>
+          <a:ln>
+            <a:noFill/>
+          </a:ln>
+        </p:spPr>
+        <p:style>
+          <a:lnRef idx="1">
+            <a:schemeClr val="accent1"/>
+          </a:lnRef>
+          <a:fillRef idx="3">
+            <a:schemeClr val="accent1"/>
+          </a:fillRef>
+          <a:effectRef idx="2">
+            <a:schemeClr val="accent1"/>
+          </a:effectRef>
+          <a:fontRef idx="minor">
+            <a:schemeClr val="lt1"/>
+          </a:fontRef>
+        </p:style>
+        <p:txBody>
+          <a:bodyPr rtlCol="0" anchor="ctr" wrap="square" lIns="45720" rIns="45720" tIns="27432" bIns="27432"/>
+          <a:lstStyle/>
+          <a:p>
+            <a:pPr algn="ctr">
+              <a:defRPr sz="800" b="0">
+                <a:solidFill>
+                  <a:srgbClr val="1565C0"/>
+                </a:solidFill>
+              </a:defRPr>
+            </a:pPr>
+            <a:r>
+              <a:t>Zendesk reduction</a:t>
+            </a:r>
+          </a:p>
+        </p:txBody>
+      </p:sp>
+      <p:sp>
+        <p:nvSpPr>
+          <p:cNvPr id="80" name="Rounded Rectangle 79"/>
+          <p:cNvSpPr/>
+          <p:nvPr/>
+        </p:nvSpPr>
+        <p:spPr>
+          <a:xfrm>
+            <a:off x="3200400" y="4727448"/>
+            <a:ext cx="2011680" cy="228600"/>
+          </a:xfrm>
+          <a:prstGeom prst="roundRect">
+            <a:avLst/>
+          </a:prstGeom>
+          <a:solidFill>
+            <a:srgbClr val="E3F2FD"/>
+          </a:solidFill>
+          <a:ln>
+            <a:noFill/>
+          </a:ln>
+        </p:spPr>
+        <p:style>
+          <a:lnRef idx="1">
+            <a:schemeClr val="accent1"/>
+          </a:lnRef>
+          <a:fillRef idx="3">
+            <a:schemeClr val="accent1"/>
+          </a:fillRef>
+          <a:effectRef idx="2">
+            <a:schemeClr val="accent1"/>
+          </a:effectRef>
+          <a:fontRef idx="minor">
+            <a:schemeClr val="lt1"/>
+          </a:fontRef>
+        </p:style>
+        <p:txBody>
+          <a:bodyPr rtlCol="0" anchor="ctr" wrap="square" lIns="45720" rIns="45720" tIns="27432" bIns="27432"/>
+          <a:lstStyle/>
+          <a:p>
+            <a:pPr algn="ctr">
+              <a:defRPr sz="800" b="0">
+                <a:solidFill>
+                  <a:srgbClr val="1565C0"/>
+                </a:solidFill>
+              </a:defRPr>
+            </a:pPr>
+            <a:r>
+              <a:t>-¥0</a:t>
+            </a:r>
+          </a:p>
+        </p:txBody>
+      </p:sp>
+      <p:sp>
+        <p:nvSpPr>
+          <p:cNvPr id="81" name="Rounded Rectangle 80"/>
+          <p:cNvSpPr/>
+          <p:nvPr/>
+        </p:nvSpPr>
+        <p:spPr>
+          <a:xfrm>
+            <a:off x="5212080" y="4727448"/>
+            <a:ext cx="2011680" cy="228600"/>
+          </a:xfrm>
+          <a:prstGeom prst="roundRect">
+            <a:avLst/>
+          </a:prstGeom>
+          <a:solidFill>
+            <a:srgbClr val="E3F2FD"/>
+          </a:solidFill>
+          <a:ln>
+            <a:noFill/>
+          </a:ln>
+        </p:spPr>
+        <p:style>
+          <a:lnRef idx="1">
+            <a:schemeClr val="accent1"/>
+          </a:lnRef>
+          <a:fillRef idx="3">
+            <a:schemeClr val="accent1"/>
+          </a:fillRef>
+          <a:effectRef idx="2">
+            <a:schemeClr val="accent1"/>
+          </a:effectRef>
+          <a:fontRef idx="minor">
+            <a:schemeClr val="lt1"/>
+          </a:fontRef>
+        </p:style>
+        <p:txBody>
+          <a:bodyPr rtlCol="0" anchor="ctr" wrap="square" lIns="45720" rIns="45720" tIns="27432" bIns="27432"/>
+          <a:lstStyle/>
+          <a:p>
+            <a:pPr algn="ctr">
+              <a:defRPr sz="800" b="0">
+                <a:solidFill>
+                  <a:srgbClr val="1565C0"/>
+                </a:solidFill>
+              </a:defRPr>
+            </a:pPr>
+            <a:r>
+              <a:t>-¥0</a:t>
+            </a:r>
+          </a:p>
+        </p:txBody>
+      </p:sp>
+      <p:sp>
+        <p:nvSpPr>
+          <p:cNvPr id="82" name="Rounded Rectangle 81"/>
+          <p:cNvSpPr/>
+          <p:nvPr/>
+        </p:nvSpPr>
+        <p:spPr>
+          <a:xfrm>
+            <a:off x="7223760" y="4727448"/>
+            <a:ext cx="2011680" cy="228600"/>
+          </a:xfrm>
+          <a:prstGeom prst="roundRect">
+            <a:avLst/>
+          </a:prstGeom>
+          <a:solidFill>
+            <a:srgbClr val="E3F2FD"/>
+          </a:solidFill>
+          <a:ln>
+            <a:noFill/>
+          </a:ln>
+        </p:spPr>
+        <p:style>
+          <a:lnRef idx="1">
+            <a:schemeClr val="accent1"/>
+          </a:lnRef>
+          <a:fillRef idx="3">
+            <a:schemeClr val="accent1"/>
+          </a:fillRef>
+          <a:effectRef idx="2">
+            <a:schemeClr val="accent1"/>
+          </a:effectRef>
+          <a:fontRef idx="minor">
+            <a:schemeClr val="lt1"/>
+          </a:fontRef>
+        </p:style>
+        <p:txBody>
+          <a:bodyPr rtlCol="0" anchor="ctr" wrap="square" lIns="45720" rIns="45720" tIns="27432" bIns="27432"/>
+          <a:lstStyle/>
+          <a:p>
+            <a:pPr algn="ctr">
+              <a:defRPr sz="800" b="0">
+                <a:solidFill>
+                  <a:srgbClr val="1565C0"/>
+                </a:solidFill>
+              </a:defRPr>
+            </a:pPr>
+            <a:r>
+              <a:t>-¥0.07M</a:t>
+            </a:r>
+          </a:p>
+        </p:txBody>
+      </p:sp>
+      <p:sp>
+        <p:nvSpPr>
+          <p:cNvPr id="83" name="Rounded Rectangle 82"/>
+          <p:cNvSpPr/>
+          <p:nvPr/>
+        </p:nvSpPr>
+        <p:spPr>
+          <a:xfrm>
+            <a:off x="9235440" y="4727448"/>
+            <a:ext cx="2011680" cy="228600"/>
+          </a:xfrm>
+          <a:prstGeom prst="roundRect">
+            <a:avLst/>
+          </a:prstGeom>
+          <a:solidFill>
+            <a:srgbClr val="E3F2FD"/>
+          </a:solidFill>
+          <a:ln>
+            <a:noFill/>
+          </a:ln>
+        </p:spPr>
+        <p:style>
+          <a:lnRef idx="1">
+            <a:schemeClr val="accent1"/>
+          </a:lnRef>
+          <a:fillRef idx="3">
+            <a:schemeClr val="accent1"/>
+          </a:fillRef>
+          <a:effectRef idx="2">
+            <a:schemeClr val="accent1"/>
+          </a:effectRef>
+          <a:fontRef idx="minor">
+            <a:schemeClr val="lt1"/>
+          </a:fontRef>
+        </p:style>
+        <p:txBody>
+          <a:bodyPr rtlCol="0" anchor="ctr" wrap="square" lIns="45720" rIns="45720" tIns="27432" bIns="27432"/>
+          <a:lstStyle/>
+          <a:p>
+            <a:pPr algn="ctr">
+              <a:defRPr sz="800" b="0">
+                <a:solidFill>
+                  <a:srgbClr val="1565C0"/>
+                </a:solidFill>
+              </a:defRPr>
+            </a:pPr>
+            <a:r>
+              <a:t>-¥0.14M</a:t>
+            </a:r>
+          </a:p>
+        </p:txBody>
+      </p:sp>
+      <p:sp>
+        <p:nvSpPr>
+          <p:cNvPr id="84" name="Rounded Rectangle 83"/>
+          <p:cNvSpPr/>
+          <p:nvPr/>
+        </p:nvSpPr>
+        <p:spPr>
+          <a:xfrm>
+            <a:off x="11247120" y="4727448"/>
+            <a:ext cx="2011680" cy="228600"/>
+          </a:xfrm>
+          <a:prstGeom prst="roundRect">
+            <a:avLst/>
+          </a:prstGeom>
+          <a:solidFill>
+            <a:srgbClr val="E3F2FD"/>
+          </a:solidFill>
+          <a:ln>
+            <a:noFill/>
+          </a:ln>
+        </p:spPr>
+        <p:style>
+          <a:lnRef idx="1">
+            <a:schemeClr val="accent1"/>
+          </a:lnRef>
+          <a:fillRef idx="3">
+            <a:schemeClr val="accent1"/>
+          </a:fillRef>
+          <a:effectRef idx="2">
+            <a:schemeClr val="accent1"/>
+          </a:effectRef>
+          <a:fontRef idx="minor">
+            <a:schemeClr val="lt1"/>
+          </a:fontRef>
+        </p:style>
+        <p:txBody>
+          <a:bodyPr rtlCol="0" anchor="ctr" wrap="square" lIns="45720" rIns="45720" tIns="27432" bIns="27432"/>
+          <a:lstStyle/>
+          <a:p>
+            <a:pPr algn="ctr">
+              <a:defRPr sz="800" b="0">
+                <a:solidFill>
+                  <a:srgbClr val="1565C0"/>
+                </a:solidFill>
+              </a:defRPr>
+            </a:pPr>
+            <a:r>
+              <a:t>-¥0.18M</a:t>
+            </a:r>
+          </a:p>
+        </p:txBody>
+      </p:sp>
+      <p:sp>
+        <p:nvSpPr>
+          <p:cNvPr id="85" name="Rounded Rectangle 84"/>
+          <p:cNvSpPr/>
+          <p:nvPr/>
+        </p:nvSpPr>
+        <p:spPr>
+          <a:xfrm>
+            <a:off x="457200" y="4983480"/>
+            <a:ext cx="2743200" cy="228600"/>
+          </a:xfrm>
+          <a:prstGeom prst="roundRect">
+            <a:avLst/>
+          </a:prstGeom>
+          <a:solidFill>
+            <a:srgbClr val="FFCDD2"/>
+          </a:solidFill>
+          <a:ln>
+            <a:noFill/>
+          </a:ln>
+        </p:spPr>
+        <p:style>
+          <a:lnRef idx="1">
+            <a:schemeClr val="accent1"/>
+          </a:lnRef>
+          <a:fillRef idx="3">
+            <a:schemeClr val="accent1"/>
+          </a:fillRef>
+          <a:effectRef idx="2">
+            <a:schemeClr val="accent1"/>
+          </a:effectRef>
+          <a:fontRef idx="minor">
+            <a:schemeClr val="lt1"/>
+          </a:fontRef>
+        </p:style>
+        <p:txBody>
+          <a:bodyPr rtlCol="0" anchor="ctr" wrap="square" lIns="45720" rIns="45720" tIns="27432" bIns="27432"/>
+          <a:lstStyle/>
+          <a:p>
+            <a:pPr algn="ctr">
+              <a:defRPr sz="800" b="1">
+                <a:solidFill>
+                  <a:srgbClr val="1E1E1E"/>
+                </a:solidFill>
+              </a:defRPr>
+            </a:pPr>
+            <a:r>
+              <a:t>Net New Costs</a:t>
+            </a:r>
+          </a:p>
+        </p:txBody>
+      </p:sp>
+      <p:sp>
+        <p:nvSpPr>
+          <p:cNvPr id="86" name="Rounded Rectangle 85"/>
+          <p:cNvSpPr/>
+          <p:nvPr/>
+        </p:nvSpPr>
+        <p:spPr>
+          <a:xfrm>
+            <a:off x="3200400" y="4983480"/>
+            <a:ext cx="2011680" cy="228600"/>
+          </a:xfrm>
+          <a:prstGeom prst="roundRect">
+            <a:avLst/>
+          </a:prstGeom>
+          <a:solidFill>
+            <a:srgbClr val="FFCDD2"/>
+          </a:solidFill>
+          <a:ln>
+            <a:noFill/>
+          </a:ln>
+        </p:spPr>
+        <p:style>
+          <a:lnRef idx="1">
+            <a:schemeClr val="accent1"/>
+          </a:lnRef>
+          <a:fillRef idx="3">
+            <a:schemeClr val="accent1"/>
+          </a:fillRef>
+          <a:effectRef idx="2">
+            <a:schemeClr val="accent1"/>
+          </a:effectRef>
+          <a:fontRef idx="minor">
+            <a:schemeClr val="lt1"/>
+          </a:fontRef>
+        </p:style>
+        <p:txBody>
+          <a:bodyPr rtlCol="0" anchor="ctr" wrap="square" lIns="45720" rIns="45720" tIns="27432" bIns="27432"/>
+          <a:lstStyle/>
+          <a:p>
+            <a:pPr algn="ctr">
+              <a:defRPr sz="800" b="1">
+                <a:solidFill>
+                  <a:srgbClr val="1E1E1E"/>
+                </a:solidFill>
+              </a:defRPr>
+            </a:pPr>
+            <a:r>
+              <a:t>¥3.0M</a:t>
+            </a:r>
+          </a:p>
+        </p:txBody>
+      </p:sp>
+      <p:sp>
+        <p:nvSpPr>
+          <p:cNvPr id="87" name="Rounded Rectangle 86"/>
+          <p:cNvSpPr/>
+          <p:nvPr/>
+        </p:nvSpPr>
+        <p:spPr>
+          <a:xfrm>
+            <a:off x="5212080" y="4983480"/>
+            <a:ext cx="2011680" cy="228600"/>
+          </a:xfrm>
+          <a:prstGeom prst="roundRect">
+            <a:avLst/>
+          </a:prstGeom>
+          <a:solidFill>
+            <a:srgbClr val="FFCDD2"/>
+          </a:solidFill>
+          <a:ln>
+            <a:noFill/>
+          </a:ln>
+        </p:spPr>
+        <p:style>
+          <a:lnRef idx="1">
+            <a:schemeClr val="accent1"/>
+          </a:lnRef>
+          <a:fillRef idx="3">
+            <a:schemeClr val="accent1"/>
+          </a:fillRef>
+          <a:effectRef idx="2">
+            <a:schemeClr val="accent1"/>
+          </a:effectRef>
+          <a:fontRef idx="minor">
+            <a:schemeClr val="lt1"/>
+          </a:fontRef>
+        </p:style>
+        <p:txBody>
+          <a:bodyPr rtlCol="0" anchor="ctr" wrap="square" lIns="45720" rIns="45720" tIns="27432" bIns="27432"/>
+          <a:lstStyle/>
+          <a:p>
+            <a:pPr algn="ctr">
+              <a:defRPr sz="800" b="1">
+                <a:solidFill>
+                  <a:srgbClr val="1E1E1E"/>
+                </a:solidFill>
+              </a:defRPr>
+            </a:pPr>
+            <a:r>
+              <a:t>¥6.8M</a:t>
+            </a:r>
+          </a:p>
+        </p:txBody>
+      </p:sp>
+      <p:sp>
+        <p:nvSpPr>
+          <p:cNvPr id="88" name="Rounded Rectangle 87"/>
+          <p:cNvSpPr/>
+          <p:nvPr/>
+        </p:nvSpPr>
+        <p:spPr>
+          <a:xfrm>
+            <a:off x="7223760" y="4983480"/>
+            <a:ext cx="2011680" cy="228600"/>
+          </a:xfrm>
+          <a:prstGeom prst="roundRect">
+            <a:avLst/>
+          </a:prstGeom>
+          <a:solidFill>
+            <a:srgbClr val="FFCDD2"/>
+          </a:solidFill>
+          <a:ln>
+            <a:noFill/>
+          </a:ln>
+        </p:spPr>
+        <p:style>
+          <a:lnRef idx="1">
+            <a:schemeClr val="accent1"/>
+          </a:lnRef>
+          <a:fillRef idx="3">
+            <a:schemeClr val="accent1"/>
+          </a:fillRef>
+          <a:effectRef idx="2">
+            <a:schemeClr val="accent1"/>
+          </a:effectRef>
+          <a:fontRef idx="minor">
+            <a:schemeClr val="lt1"/>
+          </a:fontRef>
+        </p:style>
+        <p:txBody>
+          <a:bodyPr rtlCol="0" anchor="ctr" wrap="square" lIns="45720" rIns="45720" tIns="27432" bIns="27432"/>
+          <a:lstStyle/>
+          <a:p>
+            <a:pPr algn="ctr">
+              <a:defRPr sz="800" b="1">
+                <a:solidFill>
+                  <a:srgbClr val="1E1E1E"/>
+                </a:solidFill>
+              </a:defRPr>
+            </a:pPr>
+            <a:r>
+              <a:t>¥13.5M</a:t>
+            </a:r>
+          </a:p>
+        </p:txBody>
+      </p:sp>
+      <p:sp>
+        <p:nvSpPr>
+          <p:cNvPr id="89" name="Rounded Rectangle 88"/>
+          <p:cNvSpPr/>
+          <p:nvPr/>
+        </p:nvSpPr>
+        <p:spPr>
+          <a:xfrm>
+            <a:off x="9235440" y="4983480"/>
+            <a:ext cx="2011680" cy="228600"/>
+          </a:xfrm>
+          <a:prstGeom prst="roundRect">
+            <a:avLst/>
+          </a:prstGeom>
+          <a:solidFill>
+            <a:srgbClr val="FFCDD2"/>
+          </a:solidFill>
+          <a:ln>
+            <a:noFill/>
+          </a:ln>
+        </p:spPr>
+        <p:style>
+          <a:lnRef idx="1">
+            <a:schemeClr val="accent1"/>
+          </a:lnRef>
+          <a:fillRef idx="3">
+            <a:schemeClr val="accent1"/>
+          </a:fillRef>
+          <a:effectRef idx="2">
+            <a:schemeClr val="accent1"/>
+          </a:effectRef>
+          <a:fontRef idx="minor">
+            <a:schemeClr val="lt1"/>
+          </a:fontRef>
+        </p:style>
+        <p:txBody>
+          <a:bodyPr rtlCol="0" anchor="ctr" wrap="square" lIns="45720" rIns="45720" tIns="27432" bIns="27432"/>
+          <a:lstStyle/>
+          <a:p>
+            <a:pPr algn="ctr">
+              <a:defRPr sz="800" b="1">
+                <a:solidFill>
+                  <a:srgbClr val="1E1E1E"/>
+                </a:solidFill>
+              </a:defRPr>
+            </a:pPr>
+            <a:r>
+              <a:t>¥13.4M</a:t>
+            </a:r>
+          </a:p>
+        </p:txBody>
+      </p:sp>
+      <p:sp>
+        <p:nvSpPr>
+          <p:cNvPr id="90" name="Rounded Rectangle 89"/>
+          <p:cNvSpPr/>
+          <p:nvPr/>
+        </p:nvSpPr>
+        <p:spPr>
+          <a:xfrm>
+            <a:off x="11247120" y="4983480"/>
+            <a:ext cx="2011680" cy="228600"/>
+          </a:xfrm>
+          <a:prstGeom prst="roundRect">
+            <a:avLst/>
+          </a:prstGeom>
+          <a:solidFill>
+            <a:srgbClr val="FFCDD2"/>
+          </a:solidFill>
+          <a:ln>
+            <a:noFill/>
+          </a:ln>
+        </p:spPr>
+        <p:style>
+          <a:lnRef idx="1">
+            <a:schemeClr val="accent1"/>
+          </a:lnRef>
+          <a:fillRef idx="3">
+            <a:schemeClr val="accent1"/>
+          </a:fillRef>
+          <a:effectRef idx="2">
+            <a:schemeClr val="accent1"/>
+          </a:effectRef>
+          <a:fontRef idx="minor">
+            <a:schemeClr val="lt1"/>
+          </a:fontRef>
+        </p:style>
+        <p:txBody>
+          <a:bodyPr rtlCol="0" anchor="ctr" wrap="square" lIns="45720" rIns="45720" tIns="27432" bIns="27432"/>
+          <a:lstStyle/>
+          <a:p>
+            <a:pPr algn="ctr">
+              <a:defRPr sz="800" b="1">
+                <a:solidFill>
+                  <a:srgbClr val="1E1E1E"/>
+                </a:solidFill>
+              </a:defRPr>
+            </a:pPr>
+            <a:r>
+              <a:t>¥13.4M</a:t>
+            </a:r>
+          </a:p>
+        </p:txBody>
+      </p:sp>
+      <p:sp>
+        <p:nvSpPr>
+          <p:cNvPr id="91" name="TextBox 90"/>
+          <p:cNvSpPr txBox="1"/>
+          <p:nvPr/>
+        </p:nvSpPr>
+        <p:spPr>
+          <a:xfrm>
+            <a:off x="457200" y="5212080"/>
+            <a:ext cx="5486400" cy="274320"/>
+          </a:xfrm>
+          <a:prstGeom prst="rect">
+            <a:avLst/>
+          </a:prstGeom>
+          <a:noFill/>
+        </p:spPr>
+        <p:txBody>
+          <a:bodyPr wrap="none">
+            <a:spAutoFit/>
+          </a:bodyPr>
+          <a:lstStyle/>
+          <a:p>
+            <a:pPr>
+              <a:defRPr sz="1200" b="1">
+                <a:solidFill>
+                  <a:srgbClr val="1A237E"/>
+                </a:solidFill>
+              </a:defRPr>
+            </a:pPr>
+            <a:r>
+              <a:t>Profit Simulation</a:t>
+            </a:r>
+          </a:p>
+        </p:txBody>
+      </p:sp>
+      <p:sp>
+        <p:nvSpPr>
+          <p:cNvPr id="92" name="Rounded Rectangle 91"/>
+          <p:cNvSpPr/>
+          <p:nvPr/>
+        </p:nvSpPr>
+        <p:spPr>
+          <a:xfrm>
+            <a:off x="457200" y="5532120"/>
+            <a:ext cx="2743200" cy="274320"/>
+          </a:xfrm>
+          <a:prstGeom prst="roundRect">
+            <a:avLst/>
+          </a:prstGeom>
+          <a:solidFill>
+            <a:srgbClr val="1A237E"/>
+          </a:solidFill>
+          <a:ln>
+            <a:noFill/>
+          </a:ln>
+        </p:spPr>
+        <p:style>
+          <a:lnRef idx="1">
+            <a:schemeClr val="accent1"/>
+          </a:lnRef>
+          <a:fillRef idx="3">
+            <a:schemeClr val="accent1"/>
+          </a:fillRef>
+          <a:effectRef idx="2">
+            <a:schemeClr val="accent1"/>
+          </a:effectRef>
+          <a:fontRef idx="minor">
+            <a:schemeClr val="lt1"/>
+          </a:fontRef>
+        </p:style>
+        <p:txBody>
+          <a:bodyPr rtlCol="0" anchor="ctr" wrap="square" lIns="45720" rIns="45720" tIns="27432" bIns="27432"/>
+          <a:lstStyle/>
+          <a:p>
+            <a:pPr algn="ctr">
+              <a:defRPr sz="800" b="1">
+                <a:solidFill>
+                  <a:srgbClr val="FFFFFF"/>
+                </a:solidFill>
+              </a:defRPr>
+            </a:pPr>
+          </a:p>
+        </p:txBody>
+      </p:sp>
+      <p:sp>
+        <p:nvSpPr>
+          <p:cNvPr id="93" name="Rounded Rectangle 92"/>
+          <p:cNvSpPr/>
+          <p:nvPr/>
+        </p:nvSpPr>
+        <p:spPr>
+          <a:xfrm>
+            <a:off x="3200400" y="5532120"/>
+            <a:ext cx="2011680" cy="274320"/>
+          </a:xfrm>
+          <a:prstGeom prst="roundRect">
+            <a:avLst/>
+          </a:prstGeom>
+          <a:solidFill>
+            <a:srgbClr val="1A237E"/>
+          </a:solidFill>
+          <a:ln>
+            <a:noFill/>
+          </a:ln>
+        </p:spPr>
+        <p:style>
+          <a:lnRef idx="1">
+            <a:schemeClr val="accent1"/>
+          </a:lnRef>
+          <a:fillRef idx="3">
+            <a:schemeClr val="accent1"/>
+          </a:fillRef>
+          <a:effectRef idx="2">
+            <a:schemeClr val="accent1"/>
+          </a:effectRef>
+          <a:fontRef idx="minor">
+            <a:schemeClr val="lt1"/>
+          </a:fontRef>
+        </p:style>
+        <p:txBody>
+          <a:bodyPr rtlCol="0" anchor="ctr" wrap="square" lIns="45720" rIns="45720" tIns="27432" bIns="27432"/>
+          <a:lstStyle/>
+          <a:p>
+            <a:pPr algn="ctr">
+              <a:defRPr sz="800" b="1">
+                <a:solidFill>
+                  <a:srgbClr val="FFFFFF"/>
+                </a:solidFill>
+              </a:defRPr>
+            </a:pPr>
+            <a:r>
+              <a:t>2026</a:t>
+            </a:r>
+          </a:p>
+        </p:txBody>
+      </p:sp>
+      <p:sp>
+        <p:nvSpPr>
+          <p:cNvPr id="94" name="Rounded Rectangle 93"/>
+          <p:cNvSpPr/>
+          <p:nvPr/>
+        </p:nvSpPr>
+        <p:spPr>
+          <a:xfrm>
+            <a:off x="5212080" y="5532120"/>
+            <a:ext cx="2011680" cy="274320"/>
+          </a:xfrm>
+          <a:prstGeom prst="roundRect">
+            <a:avLst/>
+          </a:prstGeom>
+          <a:solidFill>
+            <a:srgbClr val="1A237E"/>
+          </a:solidFill>
+          <a:ln>
+            <a:noFill/>
+          </a:ln>
+        </p:spPr>
+        <p:style>
+          <a:lnRef idx="1">
+            <a:schemeClr val="accent1"/>
+          </a:lnRef>
+          <a:fillRef idx="3">
+            <a:schemeClr val="accent1"/>
+          </a:fillRef>
+          <a:effectRef idx="2">
+            <a:schemeClr val="accent1"/>
+          </a:effectRef>
+          <a:fontRef idx="minor">
+            <a:schemeClr val="lt1"/>
+          </a:fontRef>
+        </p:style>
+        <p:txBody>
+          <a:bodyPr rtlCol="0" anchor="ctr" wrap="square" lIns="45720" rIns="45720" tIns="27432" bIns="27432"/>
+          <a:lstStyle/>
+          <a:p>
+            <a:pPr algn="ctr">
+              <a:defRPr sz="800" b="1">
+                <a:solidFill>
+                  <a:srgbClr val="FFFFFF"/>
+                </a:solidFill>
+              </a:defRPr>
+            </a:pPr>
+            <a:r>
+              <a:t>2027</a:t>
+            </a:r>
+          </a:p>
+        </p:txBody>
+      </p:sp>
+      <p:sp>
+        <p:nvSpPr>
+          <p:cNvPr id="95" name="Rounded Rectangle 94"/>
+          <p:cNvSpPr/>
+          <p:nvPr/>
+        </p:nvSpPr>
+        <p:spPr>
+          <a:xfrm>
+            <a:off x="7223760" y="5532120"/>
+            <a:ext cx="2011680" cy="274320"/>
+          </a:xfrm>
+          <a:prstGeom prst="roundRect">
+            <a:avLst/>
+          </a:prstGeom>
+          <a:solidFill>
+            <a:srgbClr val="1A237E"/>
+          </a:solidFill>
+          <a:ln>
+            <a:noFill/>
+          </a:ln>
+        </p:spPr>
+        <p:style>
+          <a:lnRef idx="1">
+            <a:schemeClr val="accent1"/>
+          </a:lnRef>
+          <a:fillRef idx="3">
+            <a:schemeClr val="accent1"/>
+          </a:fillRef>
+          <a:effectRef idx="2">
+            <a:schemeClr val="accent1"/>
+          </a:effectRef>
+          <a:fontRef idx="minor">
+            <a:schemeClr val="lt1"/>
+          </a:fontRef>
+        </p:style>
+        <p:txBody>
+          <a:bodyPr rtlCol="0" anchor="ctr" wrap="square" lIns="45720" rIns="45720" tIns="27432" bIns="27432"/>
+          <a:lstStyle/>
+          <a:p>
+            <a:pPr algn="ctr">
+              <a:defRPr sz="800" b="1">
+                <a:solidFill>
+                  <a:srgbClr val="FFFFFF"/>
+                </a:solidFill>
+              </a:defRPr>
+            </a:pPr>
+            <a:r>
+              <a:t>2028</a:t>
+            </a:r>
+          </a:p>
+        </p:txBody>
+      </p:sp>
+      <p:sp>
+        <p:nvSpPr>
+          <p:cNvPr id="96" name="Rounded Rectangle 95"/>
+          <p:cNvSpPr/>
+          <p:nvPr/>
+        </p:nvSpPr>
+        <p:spPr>
+          <a:xfrm>
+            <a:off x="9235440" y="5532120"/>
+            <a:ext cx="2011680" cy="274320"/>
+          </a:xfrm>
+          <a:prstGeom prst="roundRect">
+            <a:avLst/>
+          </a:prstGeom>
+          <a:solidFill>
+            <a:srgbClr val="1A237E"/>
+          </a:solidFill>
+          <a:ln>
+            <a:noFill/>
+          </a:ln>
+        </p:spPr>
+        <p:style>
+          <a:lnRef idx="1">
+            <a:schemeClr val="accent1"/>
+          </a:lnRef>
+          <a:fillRef idx="3">
+            <a:schemeClr val="accent1"/>
+          </a:fillRef>
+          <a:effectRef idx="2">
+            <a:schemeClr val="accent1"/>
+          </a:effectRef>
+          <a:fontRef idx="minor">
+            <a:schemeClr val="lt1"/>
+          </a:fontRef>
+        </p:style>
+        <p:txBody>
+          <a:bodyPr rtlCol="0" anchor="ctr" wrap="square" lIns="45720" rIns="45720" tIns="27432" bIns="27432"/>
+          <a:lstStyle/>
+          <a:p>
+            <a:pPr algn="ctr">
+              <a:defRPr sz="800" b="1">
+                <a:solidFill>
+                  <a:srgbClr val="FFFFFF"/>
+                </a:solidFill>
+              </a:defRPr>
+            </a:pPr>
+            <a:r>
+              <a:t>2029</a:t>
+            </a:r>
+          </a:p>
+        </p:txBody>
+      </p:sp>
+      <p:sp>
+        <p:nvSpPr>
+          <p:cNvPr id="97" name="Rounded Rectangle 96"/>
+          <p:cNvSpPr/>
+          <p:nvPr/>
+        </p:nvSpPr>
+        <p:spPr>
+          <a:xfrm>
+            <a:off x="11247120" y="5532120"/>
+            <a:ext cx="2011680" cy="274320"/>
+          </a:xfrm>
+          <a:prstGeom prst="roundRect">
+            <a:avLst/>
+          </a:prstGeom>
+          <a:solidFill>
+            <a:srgbClr val="1A237E"/>
+          </a:solidFill>
+          <a:ln>
+            <a:noFill/>
+          </a:ln>
+        </p:spPr>
+        <p:style>
+          <a:lnRef idx="1">
+            <a:schemeClr val="accent1"/>
+          </a:lnRef>
+          <a:fillRef idx="3">
+            <a:schemeClr val="accent1"/>
+          </a:fillRef>
+          <a:effectRef idx="2">
+            <a:schemeClr val="accent1"/>
+          </a:effectRef>
+          <a:fontRef idx="minor">
+            <a:schemeClr val="lt1"/>
+          </a:fontRef>
+        </p:style>
+        <p:txBody>
+          <a:bodyPr rtlCol="0" anchor="ctr" wrap="square" lIns="45720" rIns="45720" tIns="27432" bIns="27432"/>
+          <a:lstStyle/>
+          <a:p>
+            <a:pPr algn="ctr">
+              <a:defRPr sz="800" b="1">
+                <a:solidFill>
+                  <a:srgbClr val="FFFFFF"/>
+                </a:solidFill>
+              </a:defRPr>
+            </a:pPr>
+            <a:r>
+              <a:t>2030+</a:t>
+            </a:r>
+          </a:p>
+        </p:txBody>
+      </p:sp>
+      <p:sp>
+        <p:nvSpPr>
+          <p:cNvPr id="98" name="Rounded Rectangle 97"/>
+          <p:cNvSpPr/>
+          <p:nvPr/>
+        </p:nvSpPr>
+        <p:spPr>
+          <a:xfrm>
+            <a:off x="457200" y="5806440"/>
+            <a:ext cx="2743200" cy="228600"/>
+          </a:xfrm>
+          <a:prstGeom prst="roundRect">
+            <a:avLst/>
+          </a:prstGeom>
+          <a:solidFill>
+            <a:srgbClr val="E8F5E9"/>
+          </a:solidFill>
+          <a:ln>
+            <a:noFill/>
+          </a:ln>
+        </p:spPr>
+        <p:style>
+          <a:lnRef idx="1">
+            <a:schemeClr val="accent1"/>
+          </a:lnRef>
+          <a:fillRef idx="3">
+            <a:schemeClr val="accent1"/>
+          </a:fillRef>
+          <a:effectRef idx="2">
+            <a:schemeClr val="accent1"/>
+          </a:effectRef>
+          <a:fontRef idx="minor">
+            <a:schemeClr val="lt1"/>
+          </a:fontRef>
+        </p:style>
+        <p:txBody>
+          <a:bodyPr rtlCol="0" anchor="ctr" wrap="square" lIns="45720" rIns="45720" tIns="27432" bIns="27432"/>
+          <a:lstStyle/>
+          <a:p>
+            <a:pPr algn="ctr">
+              <a:defRPr sz="900" b="0">
+                <a:solidFill>
+                  <a:srgbClr val="1E1E1E"/>
+                </a:solidFill>
+              </a:defRPr>
+            </a:pPr>
+            <a:r>
+              <a:t>Total Revenue</a:t>
+            </a:r>
+          </a:p>
+        </p:txBody>
+      </p:sp>
+      <p:sp>
+        <p:nvSpPr>
+          <p:cNvPr id="99" name="Rounded Rectangle 98"/>
+          <p:cNvSpPr/>
+          <p:nvPr/>
+        </p:nvSpPr>
+        <p:spPr>
+          <a:xfrm>
+            <a:off x="3200400" y="5806440"/>
+            <a:ext cx="2011680" cy="228600"/>
+          </a:xfrm>
+          <a:prstGeom prst="roundRect">
+            <a:avLst/>
+          </a:prstGeom>
+          <a:solidFill>
+            <a:srgbClr val="E8F5E9"/>
+          </a:solidFill>
+          <a:ln>
+            <a:noFill/>
+          </a:ln>
+        </p:spPr>
+        <p:style>
+          <a:lnRef idx="1">
+            <a:schemeClr val="accent1"/>
+          </a:lnRef>
+          <a:fillRef idx="3">
+            <a:schemeClr val="accent1"/>
+          </a:fillRef>
+          <a:effectRef idx="2">
+            <a:schemeClr val="accent1"/>
+          </a:effectRef>
+          <a:fontRef idx="minor">
+            <a:schemeClr val="lt1"/>
+          </a:fontRef>
+        </p:style>
+        <p:txBody>
+          <a:bodyPr rtlCol="0" anchor="ctr" wrap="square" lIns="45720" rIns="45720" tIns="27432" bIns="27432"/>
+          <a:lstStyle/>
+          <a:p>
+            <a:pPr algn="ctr">
+              <a:defRPr sz="900" b="0">
+                <a:solidFill>
+                  <a:srgbClr val="1E1E1E"/>
+                </a:solidFill>
+              </a:defRPr>
+            </a:pPr>
+            <a:r>
+              <a:t>¥0</a:t>
+            </a:r>
+          </a:p>
+        </p:txBody>
+      </p:sp>
+      <p:sp>
+        <p:nvSpPr>
+          <p:cNvPr id="100" name="Rounded Rectangle 99"/>
+          <p:cNvSpPr/>
+          <p:nvPr/>
+        </p:nvSpPr>
+        <p:spPr>
+          <a:xfrm>
+            <a:off x="5212080" y="5806440"/>
+            <a:ext cx="2011680" cy="228600"/>
+          </a:xfrm>
+          <a:prstGeom prst="roundRect">
+            <a:avLst/>
+          </a:prstGeom>
+          <a:solidFill>
+            <a:srgbClr val="E8F5E9"/>
+          </a:solidFill>
+          <a:ln>
+            <a:noFill/>
+          </a:ln>
+        </p:spPr>
+        <p:style>
+          <a:lnRef idx="1">
+            <a:schemeClr val="accent1"/>
+          </a:lnRef>
+          <a:fillRef idx="3">
+            <a:schemeClr val="accent1"/>
+          </a:fillRef>
+          <a:effectRef idx="2">
+            <a:schemeClr val="accent1"/>
+          </a:effectRef>
+          <a:fontRef idx="minor">
+            <a:schemeClr val="lt1"/>
+          </a:fontRef>
+        </p:style>
+        <p:txBody>
+          <a:bodyPr rtlCol="0" anchor="ctr" wrap="square" lIns="45720" rIns="45720" tIns="27432" bIns="27432"/>
+          <a:lstStyle/>
+          <a:p>
+            <a:pPr algn="ctr">
+              <a:defRPr sz="900" b="0">
+                <a:solidFill>
+                  <a:srgbClr val="1E1E1E"/>
+                </a:solidFill>
+              </a:defRPr>
+            </a:pPr>
+            <a:r>
+              <a:t>¥0</a:t>
+            </a:r>
+          </a:p>
+        </p:txBody>
+      </p:sp>
+      <p:sp>
+        <p:nvSpPr>
+          <p:cNvPr id="101" name="Rounded Rectangle 100"/>
+          <p:cNvSpPr/>
+          <p:nvPr/>
+        </p:nvSpPr>
+        <p:spPr>
+          <a:xfrm>
+            <a:off x="7223760" y="5806440"/>
+            <a:ext cx="2011680" cy="228600"/>
+          </a:xfrm>
+          <a:prstGeom prst="roundRect">
+            <a:avLst/>
+          </a:prstGeom>
+          <a:solidFill>
+            <a:srgbClr val="E8F5E9"/>
+          </a:solidFill>
+          <a:ln>
+            <a:noFill/>
+          </a:ln>
+        </p:spPr>
+        <p:style>
+          <a:lnRef idx="1">
+            <a:schemeClr val="accent1"/>
+          </a:lnRef>
+          <a:fillRef idx="3">
+            <a:schemeClr val="accent1"/>
+          </a:fillRef>
+          <a:effectRef idx="2">
+            <a:schemeClr val="accent1"/>
+          </a:effectRef>
+          <a:fontRef idx="minor">
+            <a:schemeClr val="lt1"/>
+          </a:fontRef>
+        </p:style>
+        <p:txBody>
+          <a:bodyPr rtlCol="0" anchor="ctr" wrap="square" lIns="45720" rIns="45720" tIns="27432" bIns="27432"/>
+          <a:lstStyle/>
+          <a:p>
+            <a:pPr algn="ctr">
+              <a:defRPr sz="900" b="0">
+                <a:solidFill>
+                  <a:srgbClr val="1E1E1E"/>
+                </a:solidFill>
+              </a:defRPr>
+            </a:pPr>
+            <a:r>
+              <a:t>¥3.9M</a:t>
+            </a:r>
+          </a:p>
+        </p:txBody>
+      </p:sp>
+      <p:sp>
+        <p:nvSpPr>
+          <p:cNvPr id="102" name="Rounded Rectangle 101"/>
+          <p:cNvSpPr/>
+          <p:nvPr/>
+        </p:nvSpPr>
+        <p:spPr>
+          <a:xfrm>
+            <a:off x="9235440" y="5806440"/>
+            <a:ext cx="2011680" cy="228600"/>
+          </a:xfrm>
+          <a:prstGeom prst="roundRect">
+            <a:avLst/>
+          </a:prstGeom>
+          <a:solidFill>
+            <a:srgbClr val="E8F5E9"/>
+          </a:solidFill>
+          <a:ln>
+            <a:noFill/>
+          </a:ln>
+        </p:spPr>
+        <p:style>
+          <a:lnRef idx="1">
+            <a:schemeClr val="accent1"/>
+          </a:lnRef>
+          <a:fillRef idx="3">
+            <a:schemeClr val="accent1"/>
+          </a:fillRef>
+          <a:effectRef idx="2">
+            <a:schemeClr val="accent1"/>
+          </a:effectRef>
+          <a:fontRef idx="minor">
+            <a:schemeClr val="lt1"/>
+          </a:fontRef>
+        </p:style>
+        <p:txBody>
+          <a:bodyPr rtlCol="0" anchor="ctr" wrap="square" lIns="45720" rIns="45720" tIns="27432" bIns="27432"/>
+          <a:lstStyle/>
+          <a:p>
+            <a:pPr algn="ctr">
+              <a:defRPr sz="900" b="0">
+                <a:solidFill>
+                  <a:srgbClr val="1E1E1E"/>
+                </a:solidFill>
+              </a:defRPr>
+            </a:pPr>
+            <a:r>
+              <a:t>¥11.5M</a:t>
+            </a:r>
+          </a:p>
+        </p:txBody>
+      </p:sp>
+      <p:sp>
+        <p:nvSpPr>
+          <p:cNvPr id="103" name="Rounded Rectangle 102"/>
+          <p:cNvSpPr/>
+          <p:nvPr/>
+        </p:nvSpPr>
+        <p:spPr>
+          <a:xfrm>
+            <a:off x="11247120" y="5806440"/>
+            <a:ext cx="2011680" cy="228600"/>
+          </a:xfrm>
+          <a:prstGeom prst="roundRect">
+            <a:avLst/>
+          </a:prstGeom>
+          <a:solidFill>
+            <a:srgbClr val="E8F5E9"/>
+          </a:solidFill>
+          <a:ln>
+            <a:noFill/>
+          </a:ln>
+        </p:spPr>
+        <p:style>
+          <a:lnRef idx="1">
+            <a:schemeClr val="accent1"/>
+          </a:lnRef>
+          <a:fillRef idx="3">
+            <a:schemeClr val="accent1"/>
+          </a:fillRef>
+          <a:effectRef idx="2">
+            <a:schemeClr val="accent1"/>
+          </a:effectRef>
+          <a:fontRef idx="minor">
+            <a:schemeClr val="lt1"/>
+          </a:fontRef>
+        </p:style>
+        <p:txBody>
+          <a:bodyPr rtlCol="0" anchor="ctr" wrap="square" lIns="45720" rIns="45720" tIns="27432" bIns="27432"/>
+          <a:lstStyle/>
+          <a:p>
+            <a:pPr algn="ctr">
+              <a:defRPr sz="900" b="0">
+                <a:solidFill>
+                  <a:srgbClr val="1E1E1E"/>
+                </a:solidFill>
+              </a:defRPr>
+            </a:pPr>
+            <a:r>
+              <a:t>¥27.3M</a:t>
+            </a:r>
+          </a:p>
+        </p:txBody>
+      </p:sp>
+      <p:sp>
+        <p:nvSpPr>
+          <p:cNvPr id="104" name="Rounded Rectangle 103"/>
+          <p:cNvSpPr/>
+          <p:nvPr/>
+        </p:nvSpPr>
+        <p:spPr>
+          <a:xfrm>
+            <a:off x="457200" y="6062472"/>
+            <a:ext cx="2743200" cy="228600"/>
+          </a:xfrm>
+          <a:prstGeom prst="roundRect">
+            <a:avLst/>
+          </a:prstGeom>
+          <a:solidFill>
+            <a:srgbClr val="FFEBEE"/>
+          </a:solidFill>
+          <a:ln>
+            <a:noFill/>
+          </a:ln>
+        </p:spPr>
+        <p:style>
+          <a:lnRef idx="1">
+            <a:schemeClr val="accent1"/>
+          </a:lnRef>
+          <a:fillRef idx="3">
+            <a:schemeClr val="accent1"/>
+          </a:fillRef>
+          <a:effectRef idx="2">
+            <a:schemeClr val="accent1"/>
+          </a:effectRef>
+          <a:fontRef idx="minor">
+            <a:schemeClr val="lt1"/>
+          </a:fontRef>
+        </p:style>
+        <p:txBody>
+          <a:bodyPr rtlCol="0" anchor="ctr" wrap="square" lIns="45720" rIns="45720" tIns="27432" bIns="27432"/>
+          <a:lstStyle/>
+          <a:p>
+            <a:pPr algn="ctr">
+              <a:defRPr sz="900" b="0">
+                <a:solidFill>
+                  <a:srgbClr val="1E1E1E"/>
+                </a:solidFill>
+              </a:defRPr>
+            </a:pPr>
+            <a:r>
+              <a:t>Net New Costs</a:t>
+            </a:r>
+          </a:p>
+        </p:txBody>
+      </p:sp>
+      <p:sp>
+        <p:nvSpPr>
+          <p:cNvPr id="105" name="Rounded Rectangle 104"/>
+          <p:cNvSpPr/>
+          <p:nvPr/>
+        </p:nvSpPr>
+        <p:spPr>
+          <a:xfrm>
+            <a:off x="3200400" y="6062472"/>
+            <a:ext cx="2011680" cy="228600"/>
+          </a:xfrm>
+          <a:prstGeom prst="roundRect">
+            <a:avLst/>
+          </a:prstGeom>
+          <a:solidFill>
+            <a:srgbClr val="FFEBEE"/>
+          </a:solidFill>
+          <a:ln>
+            <a:noFill/>
+          </a:ln>
+        </p:spPr>
+        <p:style>
+          <a:lnRef idx="1">
+            <a:schemeClr val="accent1"/>
+          </a:lnRef>
+          <a:fillRef idx="3">
+            <a:schemeClr val="accent1"/>
+          </a:fillRef>
+          <a:effectRef idx="2">
+            <a:schemeClr val="accent1"/>
+          </a:effectRef>
+          <a:fontRef idx="minor">
+            <a:schemeClr val="lt1"/>
+          </a:fontRef>
+        </p:style>
+        <p:txBody>
+          <a:bodyPr rtlCol="0" anchor="ctr" wrap="square" lIns="45720" rIns="45720" tIns="27432" bIns="27432"/>
+          <a:lstStyle/>
+          <a:p>
+            <a:pPr algn="ctr">
+              <a:defRPr sz="900" b="0">
+                <a:solidFill>
+                  <a:srgbClr val="1E1E1E"/>
+                </a:solidFill>
+              </a:defRPr>
+            </a:pPr>
+            <a:r>
+              <a:t>¥3.0M</a:t>
+            </a:r>
+          </a:p>
+        </p:txBody>
+      </p:sp>
+      <p:sp>
+        <p:nvSpPr>
+          <p:cNvPr id="106" name="Rounded Rectangle 105"/>
+          <p:cNvSpPr/>
+          <p:nvPr/>
+        </p:nvSpPr>
+        <p:spPr>
+          <a:xfrm>
+            <a:off x="5212080" y="6062472"/>
+            <a:ext cx="2011680" cy="228600"/>
+          </a:xfrm>
+          <a:prstGeom prst="roundRect">
+            <a:avLst/>
+          </a:prstGeom>
+          <a:solidFill>
+            <a:srgbClr val="FFEBEE"/>
+          </a:solidFill>
+          <a:ln>
+            <a:noFill/>
+          </a:ln>
+        </p:spPr>
+        <p:style>
+          <a:lnRef idx="1">
+            <a:schemeClr val="accent1"/>
+          </a:lnRef>
+          <a:fillRef idx="3">
+            <a:schemeClr val="accent1"/>
+          </a:fillRef>
+          <a:effectRef idx="2">
+            <a:schemeClr val="accent1"/>
+          </a:effectRef>
+          <a:fontRef idx="minor">
+            <a:schemeClr val="lt1"/>
+          </a:fontRef>
+        </p:style>
+        <p:txBody>
+          <a:bodyPr rtlCol="0" anchor="ctr" wrap="square" lIns="45720" rIns="45720" tIns="27432" bIns="27432"/>
+          <a:lstStyle/>
+          <a:p>
+            <a:pPr algn="ctr">
+              <a:defRPr sz="900" b="0">
+                <a:solidFill>
+                  <a:srgbClr val="1E1E1E"/>
+                </a:solidFill>
+              </a:defRPr>
+            </a:pPr>
+            <a:r>
+              <a:t>¥6.8M</a:t>
+            </a:r>
+          </a:p>
+        </p:txBody>
+      </p:sp>
+      <p:sp>
+        <p:nvSpPr>
+          <p:cNvPr id="107" name="Rounded Rectangle 106"/>
+          <p:cNvSpPr/>
+          <p:nvPr/>
+        </p:nvSpPr>
+        <p:spPr>
+          <a:xfrm>
+            <a:off x="7223760" y="6062472"/>
+            <a:ext cx="2011680" cy="228600"/>
+          </a:xfrm>
+          <a:prstGeom prst="roundRect">
+            <a:avLst/>
+          </a:prstGeom>
+          <a:solidFill>
+            <a:srgbClr val="FFEBEE"/>
+          </a:solidFill>
+          <a:ln>
+            <a:noFill/>
+          </a:ln>
+        </p:spPr>
+        <p:style>
+          <a:lnRef idx="1">
+            <a:schemeClr val="accent1"/>
+          </a:lnRef>
+          <a:fillRef idx="3">
+            <a:schemeClr val="accent1"/>
+          </a:fillRef>
+          <a:effectRef idx="2">
+            <a:schemeClr val="accent1"/>
+          </a:effectRef>
+          <a:fontRef idx="minor">
+            <a:schemeClr val="lt1"/>
+          </a:fontRef>
+        </p:style>
+        <p:txBody>
+          <a:bodyPr rtlCol="0" anchor="ctr" wrap="square" lIns="45720" rIns="45720" tIns="27432" bIns="27432"/>
+          <a:lstStyle/>
+          <a:p>
+            <a:pPr algn="ctr">
+              <a:defRPr sz="900" b="0">
+                <a:solidFill>
+                  <a:srgbClr val="1E1E1E"/>
+                </a:solidFill>
+              </a:defRPr>
+            </a:pPr>
+            <a:r>
+              <a:t>¥13.5M</a:t>
+            </a:r>
+          </a:p>
+        </p:txBody>
+      </p:sp>
+      <p:sp>
+        <p:nvSpPr>
+          <p:cNvPr id="108" name="Rounded Rectangle 107"/>
+          <p:cNvSpPr/>
+          <p:nvPr/>
+        </p:nvSpPr>
+        <p:spPr>
+          <a:xfrm>
+            <a:off x="9235440" y="6062472"/>
+            <a:ext cx="2011680" cy="228600"/>
+          </a:xfrm>
+          <a:prstGeom prst="roundRect">
+            <a:avLst/>
+          </a:prstGeom>
+          <a:solidFill>
+            <a:srgbClr val="FFEBEE"/>
+          </a:solidFill>
+          <a:ln>
+            <a:noFill/>
+          </a:ln>
+        </p:spPr>
+        <p:style>
+          <a:lnRef idx="1">
+            <a:schemeClr val="accent1"/>
+          </a:lnRef>
+          <a:fillRef idx="3">
+            <a:schemeClr val="accent1"/>
+          </a:fillRef>
+          <a:effectRef idx="2">
+            <a:schemeClr val="accent1"/>
+          </a:effectRef>
+          <a:fontRef idx="minor">
+            <a:schemeClr val="lt1"/>
+          </a:fontRef>
+        </p:style>
+        <p:txBody>
+          <a:bodyPr rtlCol="0" anchor="ctr" wrap="square" lIns="45720" rIns="45720" tIns="27432" bIns="27432"/>
+          <a:lstStyle/>
+          <a:p>
+            <a:pPr algn="ctr">
+              <a:defRPr sz="900" b="0">
+                <a:solidFill>
+                  <a:srgbClr val="1E1E1E"/>
+                </a:solidFill>
+              </a:defRPr>
+            </a:pPr>
+            <a:r>
+              <a:t>¥13.4M</a:t>
+            </a:r>
+          </a:p>
+        </p:txBody>
+      </p:sp>
+      <p:sp>
+        <p:nvSpPr>
+          <p:cNvPr id="109" name="Rounded Rectangle 108"/>
+          <p:cNvSpPr/>
+          <p:nvPr/>
+        </p:nvSpPr>
+        <p:spPr>
+          <a:xfrm>
+            <a:off x="11247120" y="6062472"/>
+            <a:ext cx="2011680" cy="228600"/>
+          </a:xfrm>
+          <a:prstGeom prst="roundRect">
+            <a:avLst/>
+          </a:prstGeom>
+          <a:solidFill>
+            <a:srgbClr val="FFEBEE"/>
+          </a:solidFill>
+          <a:ln>
+            <a:noFill/>
+          </a:ln>
+        </p:spPr>
+        <p:style>
+          <a:lnRef idx="1">
+            <a:schemeClr val="accent1"/>
+          </a:lnRef>
+          <a:fillRef idx="3">
+            <a:schemeClr val="accent1"/>
+          </a:fillRef>
+          <a:effectRef idx="2">
+            <a:schemeClr val="accent1"/>
+          </a:effectRef>
+          <a:fontRef idx="minor">
+            <a:schemeClr val="lt1"/>
+          </a:fontRef>
+        </p:style>
+        <p:txBody>
+          <a:bodyPr rtlCol="0" anchor="ctr" wrap="square" lIns="45720" rIns="45720" tIns="27432" bIns="27432"/>
+          <a:lstStyle/>
+          <a:p>
+            <a:pPr algn="ctr">
+              <a:defRPr sz="900" b="0">
+                <a:solidFill>
+                  <a:srgbClr val="1E1E1E"/>
+                </a:solidFill>
+              </a:defRPr>
+            </a:pPr>
+            <a:r>
+              <a:t>¥13.4M</a:t>
+            </a:r>
+          </a:p>
+        </p:txBody>
+      </p:sp>
+      <p:sp>
+        <p:nvSpPr>
+          <p:cNvPr id="110" name="Rounded Rectangle 109"/>
+          <p:cNvSpPr/>
+          <p:nvPr/>
+        </p:nvSpPr>
+        <p:spPr>
+          <a:xfrm>
+            <a:off x="457200" y="6318504"/>
+            <a:ext cx="2743200" cy="228600"/>
+          </a:xfrm>
+          <a:prstGeom prst="roundRect">
+            <a:avLst/>
+          </a:prstGeom>
+          <a:solidFill>
+            <a:srgbClr val="E8EAF6"/>
+          </a:solidFill>
+          <a:ln>
+            <a:noFill/>
+          </a:ln>
+        </p:spPr>
+        <p:style>
+          <a:lnRef idx="1">
+            <a:schemeClr val="accent1"/>
+          </a:lnRef>
+          <a:fillRef idx="3">
+            <a:schemeClr val="accent1"/>
+          </a:fillRef>
+          <a:effectRef idx="2">
+            <a:schemeClr val="accent1"/>
+          </a:effectRef>
+          <a:fontRef idx="minor">
+            <a:schemeClr val="lt1"/>
+          </a:fontRef>
+        </p:style>
+        <p:txBody>
+          <a:bodyPr rtlCol="0" anchor="ctr" wrap="square" lIns="45720" rIns="45720" tIns="27432" bIns="27432"/>
+          <a:lstStyle/>
+          <a:p>
+            <a:pPr algn="ctr">
+              <a:defRPr sz="900" b="1">
+                <a:solidFill>
+                  <a:srgbClr val="1E1E1E"/>
+                </a:solidFill>
+              </a:defRPr>
+            </a:pPr>
+            <a:r>
+              <a:t>Annual Profit/(Loss)</a:t>
+            </a:r>
+          </a:p>
+        </p:txBody>
+      </p:sp>
+      <p:sp>
+        <p:nvSpPr>
+          <p:cNvPr id="111" name="Rounded Rectangle 110"/>
+          <p:cNvSpPr/>
+          <p:nvPr/>
+        </p:nvSpPr>
+        <p:spPr>
+          <a:xfrm>
+            <a:off x="3200400" y="6318504"/>
+            <a:ext cx="2011680" cy="228600"/>
+          </a:xfrm>
+          <a:prstGeom prst="roundRect">
+            <a:avLst/>
+          </a:prstGeom>
+          <a:solidFill>
+            <a:srgbClr val="E8EAF6"/>
+          </a:solidFill>
+          <a:ln>
+            <a:noFill/>
+          </a:ln>
+        </p:spPr>
+        <p:style>
+          <a:lnRef idx="1">
+            <a:schemeClr val="accent1"/>
+          </a:lnRef>
+          <a:fillRef idx="3">
+            <a:schemeClr val="accent1"/>
+          </a:fillRef>
+          <a:effectRef idx="2">
+            <a:schemeClr val="accent1"/>
+          </a:effectRef>
+          <a:fontRef idx="minor">
+            <a:schemeClr val="lt1"/>
+          </a:fontRef>
+        </p:style>
+        <p:txBody>
+          <a:bodyPr rtlCol="0" anchor="ctr" wrap="square" lIns="45720" rIns="45720" tIns="27432" bIns="27432"/>
+          <a:lstStyle/>
+          <a:p>
+            <a:pPr algn="ctr">
+              <a:defRPr sz="900" b="1">
+                <a:solidFill>
+                  <a:srgbClr val="C62828"/>
+                </a:solidFill>
+              </a:defRPr>
+            </a:pPr>
+            <a:r>
+              <a:t>-¥3.0M</a:t>
+            </a:r>
+          </a:p>
+        </p:txBody>
+      </p:sp>
+      <p:sp>
+        <p:nvSpPr>
+          <p:cNvPr id="112" name="Rounded Rectangle 111"/>
+          <p:cNvSpPr/>
+          <p:nvPr/>
+        </p:nvSpPr>
+        <p:spPr>
+          <a:xfrm>
+            <a:off x="5212080" y="6318504"/>
+            <a:ext cx="2011680" cy="228600"/>
+          </a:xfrm>
+          <a:prstGeom prst="roundRect">
+            <a:avLst/>
+          </a:prstGeom>
+          <a:solidFill>
+            <a:srgbClr val="E8EAF6"/>
+          </a:solidFill>
+          <a:ln>
+            <a:noFill/>
+          </a:ln>
+        </p:spPr>
+        <p:style>
+          <a:lnRef idx="1">
+            <a:schemeClr val="accent1"/>
+          </a:lnRef>
+          <a:fillRef idx="3">
+            <a:schemeClr val="accent1"/>
+          </a:fillRef>
+          <a:effectRef idx="2">
+            <a:schemeClr val="accent1"/>
+          </a:effectRef>
+          <a:fontRef idx="minor">
+            <a:schemeClr val="lt1"/>
+          </a:fontRef>
+        </p:style>
+        <p:txBody>
+          <a:bodyPr rtlCol="0" anchor="ctr" wrap="square" lIns="45720" rIns="45720" tIns="27432" bIns="27432"/>
+          <a:lstStyle/>
+          <a:p>
+            <a:pPr algn="ctr">
+              <a:defRPr sz="900" b="1">
+                <a:solidFill>
+                  <a:srgbClr val="C62828"/>
+                </a:solidFill>
+              </a:defRPr>
+            </a:pPr>
+            <a:r>
+              <a:t>-¥6.8M</a:t>
+            </a:r>
+          </a:p>
+        </p:txBody>
+      </p:sp>
+      <p:sp>
+        <p:nvSpPr>
+          <p:cNvPr id="113" name="Rounded Rectangle 112"/>
+          <p:cNvSpPr/>
+          <p:nvPr/>
+        </p:nvSpPr>
+        <p:spPr>
+          <a:xfrm>
+            <a:off x="7223760" y="6318504"/>
+            <a:ext cx="2011680" cy="228600"/>
+          </a:xfrm>
+          <a:prstGeom prst="roundRect">
+            <a:avLst/>
+          </a:prstGeom>
+          <a:solidFill>
+            <a:srgbClr val="E8EAF6"/>
+          </a:solidFill>
+          <a:ln>
+            <a:noFill/>
+          </a:ln>
+        </p:spPr>
+        <p:style>
+          <a:lnRef idx="1">
+            <a:schemeClr val="accent1"/>
+          </a:lnRef>
+          <a:fillRef idx="3">
+            <a:schemeClr val="accent1"/>
+          </a:fillRef>
+          <a:effectRef idx="2">
+            <a:schemeClr val="accent1"/>
+          </a:effectRef>
+          <a:fontRef idx="minor">
+            <a:schemeClr val="lt1"/>
+          </a:fontRef>
+        </p:style>
+        <p:txBody>
+          <a:bodyPr rtlCol="0" anchor="ctr" wrap="square" lIns="45720" rIns="45720" tIns="27432" bIns="27432"/>
+          <a:lstStyle/>
+          <a:p>
+            <a:pPr algn="ctr">
+              <a:defRPr sz="900" b="1">
+                <a:solidFill>
+                  <a:srgbClr val="C62828"/>
+                </a:solidFill>
+              </a:defRPr>
+            </a:pPr>
+            <a:r>
+              <a:t>-¥9.6M</a:t>
+            </a:r>
+          </a:p>
+        </p:txBody>
+      </p:sp>
+      <p:sp>
+        <p:nvSpPr>
+          <p:cNvPr id="114" name="Rounded Rectangle 113"/>
+          <p:cNvSpPr/>
+          <p:nvPr/>
+        </p:nvSpPr>
+        <p:spPr>
+          <a:xfrm>
+            <a:off x="9235440" y="6318504"/>
+            <a:ext cx="2011680" cy="228600"/>
+          </a:xfrm>
+          <a:prstGeom prst="roundRect">
+            <a:avLst/>
+          </a:prstGeom>
+          <a:solidFill>
+            <a:srgbClr val="E8EAF6"/>
+          </a:solidFill>
+          <a:ln>
+            <a:noFill/>
+          </a:ln>
+        </p:spPr>
+        <p:style>
+          <a:lnRef idx="1">
+            <a:schemeClr val="accent1"/>
+          </a:lnRef>
+          <a:fillRef idx="3">
+            <a:schemeClr val="accent1"/>
+          </a:fillRef>
+          <a:effectRef idx="2">
+            <a:schemeClr val="accent1"/>
+          </a:effectRef>
+          <a:fontRef idx="minor">
+            <a:schemeClr val="lt1"/>
+          </a:fontRef>
+        </p:style>
+        <p:txBody>
+          <a:bodyPr rtlCol="0" anchor="ctr" wrap="square" lIns="45720" rIns="45720" tIns="27432" bIns="27432"/>
+          <a:lstStyle/>
+          <a:p>
+            <a:pPr algn="ctr">
+              <a:defRPr sz="900" b="1">
+                <a:solidFill>
+                  <a:srgbClr val="C62828"/>
+                </a:solidFill>
+              </a:defRPr>
+            </a:pPr>
+            <a:r>
+              <a:t>-¥1.9M</a:t>
+            </a:r>
+          </a:p>
+        </p:txBody>
+      </p:sp>
+      <p:sp>
+        <p:nvSpPr>
+          <p:cNvPr id="115" name="Rounded Rectangle 114"/>
+          <p:cNvSpPr/>
+          <p:nvPr/>
+        </p:nvSpPr>
+        <p:spPr>
+          <a:xfrm>
+            <a:off x="11247120" y="6318504"/>
+            <a:ext cx="2011680" cy="228600"/>
+          </a:xfrm>
+          <a:prstGeom prst="roundRect">
+            <a:avLst/>
+          </a:prstGeom>
+          <a:solidFill>
+            <a:srgbClr val="E8EAF6"/>
+          </a:solidFill>
+          <a:ln>
+            <a:noFill/>
+          </a:ln>
+        </p:spPr>
+        <p:style>
+          <a:lnRef idx="1">
+            <a:schemeClr val="accent1"/>
+          </a:lnRef>
+          <a:fillRef idx="3">
+            <a:schemeClr val="accent1"/>
+          </a:fillRef>
+          <a:effectRef idx="2">
+            <a:schemeClr val="accent1"/>
+          </a:effectRef>
+          <a:fontRef idx="minor">
+            <a:schemeClr val="lt1"/>
+          </a:fontRef>
+        </p:style>
+        <p:txBody>
+          <a:bodyPr rtlCol="0" anchor="ctr" wrap="square" lIns="45720" rIns="45720" tIns="27432" bIns="27432"/>
+          <a:lstStyle/>
+          <a:p>
+            <a:pPr algn="ctr">
+              <a:defRPr sz="900" b="1">
+                <a:solidFill>
+                  <a:srgbClr val="2E7D32"/>
+                </a:solidFill>
+              </a:defRPr>
+            </a:pPr>
+            <a:r>
+              <a:t>¥13.9M</a:t>
+            </a:r>
+          </a:p>
+        </p:txBody>
+      </p:sp>
+      <p:sp>
+        <p:nvSpPr>
+          <p:cNvPr id="116" name="Rounded Rectangle 115"/>
+          <p:cNvSpPr/>
+          <p:nvPr/>
+        </p:nvSpPr>
+        <p:spPr>
+          <a:xfrm>
+            <a:off x="457200" y="6574536"/>
+            <a:ext cx="2743200" cy="228600"/>
+          </a:xfrm>
+          <a:prstGeom prst="roundRect">
+            <a:avLst/>
+          </a:prstGeom>
+          <a:solidFill>
+            <a:srgbClr val="FFF9C4"/>
+          </a:solidFill>
+          <a:ln>
+            <a:noFill/>
+          </a:ln>
+        </p:spPr>
+        <p:style>
+          <a:lnRef idx="1">
+            <a:schemeClr val="accent1"/>
+          </a:lnRef>
+          <a:fillRef idx="3">
+            <a:schemeClr val="accent1"/>
+          </a:fillRef>
+          <a:effectRef idx="2">
+            <a:schemeClr val="accent1"/>
+          </a:effectRef>
+          <a:fontRef idx="minor">
+            <a:schemeClr val="lt1"/>
+          </a:fontRef>
+        </p:style>
+        <p:txBody>
+          <a:bodyPr rtlCol="0" anchor="ctr" wrap="square" lIns="45720" rIns="45720" tIns="27432" bIns="27432"/>
+          <a:lstStyle/>
+          <a:p>
+            <a:pPr algn="ctr">
+              <a:defRPr sz="900" b="1">
+                <a:solidFill>
+                  <a:srgbClr val="1E1E1E"/>
+                </a:solidFill>
+              </a:defRPr>
+            </a:pPr>
+            <a:r>
+              <a:t>Cumulative</a:t>
+            </a:r>
+          </a:p>
+        </p:txBody>
+      </p:sp>
+      <p:sp>
+        <p:nvSpPr>
+          <p:cNvPr id="117" name="Rounded Rectangle 116"/>
+          <p:cNvSpPr/>
+          <p:nvPr/>
+        </p:nvSpPr>
+        <p:spPr>
+          <a:xfrm>
+            <a:off x="3200400" y="6574536"/>
+            <a:ext cx="2011680" cy="228600"/>
+          </a:xfrm>
+          <a:prstGeom prst="roundRect">
+            <a:avLst/>
+          </a:prstGeom>
+          <a:solidFill>
+            <a:srgbClr val="FFF9C4"/>
+          </a:solidFill>
+          <a:ln>
+            <a:noFill/>
+          </a:ln>
+        </p:spPr>
+        <p:style>
+          <a:lnRef idx="1">
+            <a:schemeClr val="accent1"/>
+          </a:lnRef>
+          <a:fillRef idx="3">
+            <a:schemeClr val="accent1"/>
+          </a:fillRef>
+          <a:effectRef idx="2">
+            <a:schemeClr val="accent1"/>
+          </a:effectRef>
+          <a:fontRef idx="minor">
+            <a:schemeClr val="lt1"/>
+          </a:fontRef>
+        </p:style>
+        <p:txBody>
+          <a:bodyPr rtlCol="0" anchor="ctr" wrap="square" lIns="45720" rIns="45720" tIns="27432" bIns="27432"/>
+          <a:lstStyle/>
+          <a:p>
+            <a:pPr algn="ctr">
+              <a:defRPr sz="900" b="1">
+                <a:solidFill>
+                  <a:srgbClr val="C62828"/>
+                </a:solidFill>
+              </a:defRPr>
+            </a:pPr>
+            <a:r>
+              <a:t>-¥3.0M</a:t>
+            </a:r>
+          </a:p>
+        </p:txBody>
+      </p:sp>
+      <p:sp>
+        <p:nvSpPr>
+          <p:cNvPr id="118" name="Rounded Rectangle 117"/>
+          <p:cNvSpPr/>
+          <p:nvPr/>
+        </p:nvSpPr>
+        <p:spPr>
+          <a:xfrm>
+            <a:off x="5212080" y="6574536"/>
+            <a:ext cx="2011680" cy="228600"/>
+          </a:xfrm>
+          <a:prstGeom prst="roundRect">
+            <a:avLst/>
+          </a:prstGeom>
+          <a:solidFill>
+            <a:srgbClr val="FFF9C4"/>
+          </a:solidFill>
+          <a:ln>
+            <a:noFill/>
+          </a:ln>
+        </p:spPr>
+        <p:style>
+          <a:lnRef idx="1">
+            <a:schemeClr val="accent1"/>
+          </a:lnRef>
+          <a:fillRef idx="3">
+            <a:schemeClr val="accent1"/>
+          </a:fillRef>
+          <a:effectRef idx="2">
+            <a:schemeClr val="accent1"/>
+          </a:effectRef>
+          <a:fontRef idx="minor">
+            <a:schemeClr val="lt1"/>
+          </a:fontRef>
+        </p:style>
+        <p:txBody>
+          <a:bodyPr rtlCol="0" anchor="ctr" wrap="square" lIns="45720" rIns="45720" tIns="27432" bIns="27432"/>
+          <a:lstStyle/>
+          <a:p>
+            <a:pPr algn="ctr">
+              <a:defRPr sz="900" b="1">
+                <a:solidFill>
+                  <a:srgbClr val="C62828"/>
+                </a:solidFill>
+              </a:defRPr>
+            </a:pPr>
+            <a:r>
+              <a:t>-¥9.8M</a:t>
+            </a:r>
+          </a:p>
+        </p:txBody>
+      </p:sp>
+      <p:sp>
+        <p:nvSpPr>
+          <p:cNvPr id="119" name="Rounded Rectangle 118"/>
+          <p:cNvSpPr/>
+          <p:nvPr/>
+        </p:nvSpPr>
+        <p:spPr>
+          <a:xfrm>
+            <a:off x="7223760" y="6574536"/>
+            <a:ext cx="2011680" cy="228600"/>
+          </a:xfrm>
+          <a:prstGeom prst="roundRect">
+            <a:avLst/>
+          </a:prstGeom>
+          <a:solidFill>
+            <a:srgbClr val="FFF9C4"/>
+          </a:solidFill>
+          <a:ln>
+            <a:noFill/>
+          </a:ln>
+        </p:spPr>
+        <p:style>
+          <a:lnRef idx="1">
+            <a:schemeClr val="accent1"/>
+          </a:lnRef>
+          <a:fillRef idx="3">
+            <a:schemeClr val="accent1"/>
+          </a:fillRef>
+          <a:effectRef idx="2">
+            <a:schemeClr val="accent1"/>
+          </a:effectRef>
+          <a:fontRef idx="minor">
+            <a:schemeClr val="lt1"/>
+          </a:fontRef>
+        </p:style>
+        <p:txBody>
+          <a:bodyPr rtlCol="0" anchor="ctr" wrap="square" lIns="45720" rIns="45720" tIns="27432" bIns="27432"/>
+          <a:lstStyle/>
+          <a:p>
+            <a:pPr algn="ctr">
+              <a:defRPr sz="900" b="1">
+                <a:solidFill>
+                  <a:srgbClr val="C62828"/>
+                </a:solidFill>
+              </a:defRPr>
+            </a:pPr>
+            <a:r>
+              <a:t>-¥19.4M</a:t>
+            </a:r>
+          </a:p>
+        </p:txBody>
+      </p:sp>
+      <p:sp>
+        <p:nvSpPr>
+          <p:cNvPr id="120" name="Rounded Rectangle 119"/>
+          <p:cNvSpPr/>
+          <p:nvPr/>
+        </p:nvSpPr>
+        <p:spPr>
+          <a:xfrm>
+            <a:off x="9235440" y="6574536"/>
+            <a:ext cx="2011680" cy="228600"/>
+          </a:xfrm>
+          <a:prstGeom prst="roundRect">
+            <a:avLst/>
+          </a:prstGeom>
+          <a:solidFill>
+            <a:srgbClr val="FFF9C4"/>
+          </a:solidFill>
+          <a:ln>
+            <a:noFill/>
+          </a:ln>
+        </p:spPr>
+        <p:style>
+          <a:lnRef idx="1">
+            <a:schemeClr val="accent1"/>
+          </a:lnRef>
+          <a:fillRef idx="3">
+            <a:schemeClr val="accent1"/>
+          </a:fillRef>
+          <a:effectRef idx="2">
+            <a:schemeClr val="accent1"/>
+          </a:effectRef>
+          <a:fontRef idx="minor">
+            <a:schemeClr val="lt1"/>
+          </a:fontRef>
+        </p:style>
+        <p:txBody>
+          <a:bodyPr rtlCol="0" anchor="ctr" wrap="square" lIns="45720" rIns="45720" tIns="27432" bIns="27432"/>
+          <a:lstStyle/>
+          <a:p>
+            <a:pPr algn="ctr">
+              <a:defRPr sz="900" b="1">
+                <a:solidFill>
+                  <a:srgbClr val="C62828"/>
+                </a:solidFill>
+              </a:defRPr>
+            </a:pPr>
+            <a:r>
+              <a:t>-¥21.3M</a:t>
+            </a:r>
+          </a:p>
+        </p:txBody>
+      </p:sp>
+      <p:sp>
+        <p:nvSpPr>
+          <p:cNvPr id="121" name="Rounded Rectangle 120"/>
+          <p:cNvSpPr/>
+          <p:nvPr/>
+        </p:nvSpPr>
+        <p:spPr>
+          <a:xfrm>
+            <a:off x="11247120" y="6574536"/>
+            <a:ext cx="2011680" cy="228600"/>
+          </a:xfrm>
+          <a:prstGeom prst="roundRect">
+            <a:avLst/>
+          </a:prstGeom>
+          <a:solidFill>
+            <a:srgbClr val="FFF9C4"/>
+          </a:solidFill>
+          <a:ln>
+            <a:noFill/>
+          </a:ln>
+        </p:spPr>
+        <p:style>
+          <a:lnRef idx="1">
+            <a:schemeClr val="accent1"/>
+          </a:lnRef>
+          <a:fillRef idx="3">
+            <a:schemeClr val="accent1"/>
+          </a:fillRef>
+          <a:effectRef idx="2">
+            <a:schemeClr val="accent1"/>
+          </a:effectRef>
+          <a:fontRef idx="minor">
+            <a:schemeClr val="lt1"/>
+          </a:fontRef>
+        </p:style>
+        <p:txBody>
+          <a:bodyPr rtlCol="0" anchor="ctr" wrap="square" lIns="45720" rIns="45720" tIns="27432" bIns="27432"/>
+          <a:lstStyle/>
+          <a:p>
+            <a:pPr algn="ctr">
+              <a:defRPr sz="900" b="1">
+                <a:solidFill>
+                  <a:srgbClr val="C62828"/>
+                </a:solidFill>
+              </a:defRPr>
+            </a:pPr>
+            <a:r>
+              <a:t>-¥7.4M</a:t>
+            </a:r>
+          </a:p>
+        </p:txBody>
+      </p:sp>
+      <p:sp>
+        <p:nvSpPr>
+          <p:cNvPr id="122" name="TextBox 121"/>
+          <p:cNvSpPr txBox="1"/>
+          <p:nvPr/>
+        </p:nvSpPr>
+        <p:spPr>
+          <a:xfrm>
+            <a:off x="457200" y="6720840"/>
+            <a:ext cx="11247120" cy="228600"/>
+          </a:xfrm>
+          <a:prstGeom prst="rect">
+            <a:avLst/>
+          </a:prstGeom>
+          <a:noFill/>
+        </p:spPr>
+        <p:txBody>
+          <a:bodyPr wrap="none">
+            <a:spAutoFit/>
+          </a:bodyPr>
+          <a:lstStyle/>
+          <a:p>
+            <a:pPr>
+              <a:defRPr sz="800" b="0">
+                <a:solidFill>
+                  <a:srgbClr val="616161"/>
+                </a:solidFill>
+              </a:defRPr>
+            </a:pPr>
+            <a:r>
+              <a:t>Key assumptions: Dev salary ¥450K/mo · AI Harness ¥3M impl + ¥300K/mo retainer · SaaS ¥100K/mo per tenant · OD savings ¥2.88M/yr · Break-even ~2031</a:t>
             </a:r>
           </a:p>
         </p:txBody>
